--- a/presentation/WETCF_Launch_Presentation.pptx
+++ b/presentation/WETCF_Launch_Presentation.pptx
@@ -2048,8 +2048,8 @@
         </p:blipFill>
         <p:spPr>
           <a:xfrm>
-            <a:off x="3977640" y="384048"/>
-            <a:ext cx="1188720" cy="1188720"/>
+            <a:off x="3886200" y="347472"/>
+            <a:ext cx="1371600" cy="1371600"/>
           </a:xfrm>
           <a:prstGeom prst="rect">
             <a:avLst/>
@@ -2064,8 +2064,8 @@
         </p:nvSpPr>
         <p:spPr>
           <a:xfrm>
-            <a:off x="457200" y="1691640"/>
-            <a:ext cx="8229600" cy="731520"/>
+            <a:off x="457200" y="1847088"/>
+            <a:ext cx="8229600" cy="777240"/>
           </a:xfrm>
           <a:prstGeom prst="rect">
             <a:avLst/>
@@ -2081,7 +2081,7 @@
               <a:buNone/>
             </a:pPr>
             <a:r>
-              <a:rPr lang="en-US" sz="4000" b="1" dirty="0">
+              <a:rPr lang="en-US" sz="4200" b="1" dirty="0">
                 <a:solidFill>
                   <a:srgbClr val="C9A84C"/>
                 </a:solidFill>
@@ -2091,7 +2091,7 @@
               </a:rPr>
               <a:t>Welcome to wetcf.com</a:t>
             </a:r>
-            <a:endParaRPr lang="en-US" sz="4000" dirty="0"/>
+            <a:endParaRPr lang="en-US" sz="4200" dirty="0"/>
           </a:p>
         </p:txBody>
       </p:sp>
@@ -2103,7 +2103,7 @@
         </p:nvSpPr>
         <p:spPr>
           <a:xfrm>
-            <a:off x="457200" y="2423160"/>
+            <a:off x="457200" y="2615184"/>
             <a:ext cx="8229600" cy="457200"/>
           </a:xfrm>
           <a:prstGeom prst="rect">
@@ -2120,14 +2120,14 @@
               <a:buNone/>
             </a:pPr>
             <a:r>
-              <a:rPr lang="en-US" sz="2000" dirty="0">
+              <a:rPr lang="en-US" sz="2200" dirty="0">
                 <a:solidFill>
                   <a:srgbClr val="FAF7F0"/>
                 </a:solidFill>
               </a:rPr>
               <a:t>እንኳን ወደ wetcf.com በደህና መጡ</a:t>
             </a:r>
-            <a:endParaRPr lang="en-US" sz="2000" dirty="0"/>
+            <a:endParaRPr lang="en-US" sz="2200" dirty="0"/>
           </a:p>
         </p:txBody>
       </p:sp>
@@ -2139,8 +2139,8 @@
         </p:nvSpPr>
         <p:spPr>
           <a:xfrm>
-            <a:off x="2926080" y="2971800"/>
-            <a:ext cx="3291840" cy="32004"/>
+            <a:off x="2834640" y="3163824"/>
+            <a:ext cx="3474720" cy="36576"/>
           </a:xfrm>
           <a:prstGeom prst="rect">
             <a:avLst/>
@@ -2164,8 +2164,8 @@
         </p:nvSpPr>
         <p:spPr>
           <a:xfrm>
-            <a:off x="457200" y="3127248"/>
-            <a:ext cx="8229600" cy="347472"/>
+            <a:off x="457200" y="3328416"/>
+            <a:ext cx="8229600" cy="365760"/>
           </a:xfrm>
           <a:prstGeom prst="rect">
             <a:avLst/>
@@ -2181,17 +2181,17 @@
               <a:buNone/>
             </a:pPr>
             <a:r>
-              <a:rPr lang="en-US" sz="1400" i="1" dirty="0">
-                <a:solidFill>
-                  <a:srgbClr val="FAF7F0"/>
+              <a:rPr lang="en-US" sz="1600" i="1" dirty="0">
+                <a:solidFill>
+                  <a:srgbClr val="EDD090"/>
                 </a:solidFill>
                 <a:latin typeface="Calibri" pitchFamily="34" charset="0"/>
                 <a:ea typeface="Calibri" pitchFamily="34" charset="-122"/>
                 <a:cs typeface="Calibri" pitchFamily="34" charset="-120"/>
               </a:rPr>
-              <a:t>Our website, our member portal, and our library — launching today</a:t>
-            </a:r>
-            <a:endParaRPr lang="en-US" sz="1400" dirty="0"/>
+              <a:t>Our website, our member portal, and our library</a:t>
+            </a:r>
+            <a:endParaRPr lang="en-US" sz="1600" dirty="0"/>
           </a:p>
         </p:txBody>
       </p:sp>
@@ -2203,8 +2203,8 @@
         </p:nvSpPr>
         <p:spPr>
           <a:xfrm>
-            <a:off x="457200" y="3493008"/>
-            <a:ext cx="8229600" cy="347472"/>
+            <a:off x="457200" y="3712464"/>
+            <a:ext cx="8229600" cy="365760"/>
           </a:xfrm>
           <a:prstGeom prst="rect">
             <a:avLst/>
@@ -2220,14 +2220,14 @@
               <a:buNone/>
             </a:pPr>
             <a:r>
-              <a:rPr lang="en-US" sz="1300" i="1" dirty="0">
+              <a:rPr lang="en-US" sz="1600" i="1" dirty="0">
                 <a:solidFill>
                   <a:srgbClr val="FAF7F0"/>
                 </a:solidFill>
               </a:rPr>
-              <a:t>ድረ-ገጻችን፣ የአባላት ፖርታል እና ቤተ-መጻሕፍት — ዛሬ ይጀምራሉ</a:t>
-            </a:r>
-            <a:endParaRPr lang="en-US" sz="1300" dirty="0"/>
+              <a:t>ዛሬ ይጀምራሉ</a:t>
+            </a:r>
+            <a:endParaRPr lang="en-US" sz="1600" dirty="0"/>
           </a:p>
         </p:txBody>
       </p:sp>
@@ -2239,8 +2239,8 @@
         </p:nvSpPr>
         <p:spPr>
           <a:xfrm>
-            <a:off x="0" y="4498848"/>
-            <a:ext cx="9144000" cy="274320"/>
+            <a:off x="0" y="4480560"/>
+            <a:ext cx="9144000" cy="292608"/>
           </a:xfrm>
           <a:prstGeom prst="rect">
             <a:avLst/>
@@ -2256,7 +2256,7 @@
               <a:buNone/>
             </a:pPr>
             <a:r>
-              <a:rPr lang="en-US" sz="1100" spc="100" kern="0" dirty="0">
+              <a:rPr lang="en-US" sz="1300" spc="100" kern="0" dirty="0">
                 <a:solidFill>
                   <a:srgbClr val="C4A882"/>
                 </a:solidFill>
@@ -2266,7 +2266,7 @@
               </a:rPr>
               <a:t>Warsaw Ethiopian Christian Fellowship</a:t>
             </a:r>
-            <a:endParaRPr lang="en-US" sz="1100" dirty="0"/>
+            <a:endParaRPr lang="en-US" sz="1300" dirty="0"/>
           </a:p>
         </p:txBody>
       </p:sp>
@@ -2311,7 +2311,7 @@
         <p:spPr>
           <a:xfrm>
             <a:off x="502920" y="274320"/>
-            <a:ext cx="8138160" cy="566928"/>
+            <a:ext cx="8138160" cy="603504"/>
           </a:xfrm>
           <a:prstGeom prst="rect">
             <a:avLst/>
@@ -2327,7 +2327,7 @@
               <a:buNone/>
             </a:pPr>
             <a:r>
-              <a:rPr lang="en-US" sz="3200" b="1" dirty="0">
+              <a:rPr lang="en-US" sz="3400" b="1" dirty="0">
                 <a:solidFill>
                   <a:srgbClr val="1C0F07"/>
                 </a:solidFill>
@@ -2337,7 +2337,7 @@
               </a:rPr>
               <a:t>Put It On Your Phone</a:t>
             </a:r>
-            <a:endParaRPr lang="en-US" sz="3200" dirty="0"/>
+            <a:endParaRPr lang="en-US" sz="3400" dirty="0"/>
           </a:p>
         </p:txBody>
       </p:sp>
@@ -2349,8 +2349,8 @@
         </p:nvSpPr>
         <p:spPr>
           <a:xfrm>
-            <a:off x="502920" y="804672"/>
-            <a:ext cx="8138160" cy="347472"/>
+            <a:off x="502920" y="841248"/>
+            <a:ext cx="8138160" cy="365760"/>
           </a:xfrm>
           <a:prstGeom prst="rect">
             <a:avLst/>
@@ -2366,14 +2366,14 @@
               <a:buNone/>
             </a:pPr>
             <a:r>
-              <a:rPr lang="en-US" sz="1700" dirty="0">
+              <a:rPr lang="en-US" sz="1900" dirty="0">
                 <a:solidFill>
                   <a:srgbClr val="7A5535"/>
                 </a:solidFill>
               </a:rPr>
               <a:t>በስልክዎ ላይ ያስቀምጡት</a:t>
             </a:r>
-            <a:endParaRPr lang="en-US" sz="1700" dirty="0"/>
+            <a:endParaRPr lang="en-US" sz="1900" dirty="0"/>
           </a:p>
         </p:txBody>
       </p:sp>
@@ -2385,8 +2385,8 @@
         </p:nvSpPr>
         <p:spPr>
           <a:xfrm>
-            <a:off x="502920" y="1188720"/>
-            <a:ext cx="8138160" cy="292608"/>
+            <a:off x="502920" y="1243584"/>
+            <a:ext cx="8138160" cy="329184"/>
           </a:xfrm>
           <a:prstGeom prst="rect">
             <a:avLst/>
@@ -2402,7 +2402,7 @@
               <a:buNone/>
             </a:pPr>
             <a:r>
-              <a:rPr lang="en-US" sz="1300" i="1" dirty="0">
+              <a:rPr lang="en-US" sz="1500" i="1" dirty="0">
                 <a:solidFill>
                   <a:srgbClr val="3D2312"/>
                 </a:solidFill>
@@ -2410,9 +2410,9 @@
                 <a:ea typeface="Calibri" pitchFamily="34" charset="-122"/>
                 <a:cs typeface="Calibri" pitchFamily="34" charset="-120"/>
               </a:rPr>
-              <a:t>No app store. It installs straight from your browser in about ten seconds.</a:t>
-            </a:r>
-            <a:endParaRPr lang="en-US" sz="1300" dirty="0"/>
+              <a:t>No app store. It installs from your browser in seconds.</a:t>
+            </a:r>
+            <a:endParaRPr lang="en-US" sz="1500" dirty="0"/>
           </a:p>
         </p:txBody>
       </p:sp>
@@ -2424,18 +2424,18 @@
         </p:nvSpPr>
         <p:spPr>
           <a:xfrm>
-            <a:off x="502920" y="1627632"/>
-            <a:ext cx="3931920" cy="2651760"/>
+            <a:off x="502920" y="1682496"/>
+            <a:ext cx="3931920" cy="2615184"/>
           </a:xfrm>
           <a:prstGeom prst="roundRect">
             <a:avLst>
-              <a:gd name="adj" fmla="val 3448"/>
+              <a:gd name="adj" fmla="val 3846"/>
             </a:avLst>
           </a:prstGeom>
           <a:solidFill>
             <a:srgbClr val="1C0F07"/>
           </a:solidFill>
-          <a:ln w="12700">
+          <a:ln w="15875">
             <a:solidFill>
               <a:srgbClr val="C9A84C"/>
             </a:solidFill>
@@ -2451,8 +2451,8 @@
         </p:nvSpPr>
         <p:spPr>
           <a:xfrm>
-            <a:off x="640080" y="1828800"/>
-            <a:ext cx="3657600" cy="329184"/>
+            <a:off x="640080" y="1883664"/>
+            <a:ext cx="3657600" cy="365760"/>
           </a:xfrm>
           <a:prstGeom prst="rect">
             <a:avLst/>
@@ -2468,7 +2468,7 @@
               <a:buNone/>
             </a:pPr>
             <a:r>
-              <a:rPr lang="en-US" sz="1500" b="1" dirty="0">
+              <a:rPr lang="en-US" sz="1700" b="1" dirty="0">
                 <a:solidFill>
                   <a:srgbClr val="C9A84C"/>
                 </a:solidFill>
@@ -2478,7 +2478,7 @@
               </a:rPr>
               <a:t>iPhone  ·  Safari</a:t>
             </a:r>
-            <a:endParaRPr lang="en-US" sz="1500" dirty="0"/>
+            <a:endParaRPr lang="en-US" sz="1700" dirty="0"/>
           </a:p>
         </p:txBody>
       </p:sp>
@@ -2490,8 +2490,8 @@
         </p:nvSpPr>
         <p:spPr>
           <a:xfrm>
-            <a:off x="1691640" y="2231136"/>
-            <a:ext cx="1554480" cy="32004"/>
+            <a:off x="1691640" y="2340864"/>
+            <a:ext cx="1554480" cy="36576"/>
           </a:xfrm>
           <a:prstGeom prst="rect">
             <a:avLst/>
@@ -2515,8 +2515,8 @@
         </p:nvSpPr>
         <p:spPr>
           <a:xfrm>
-            <a:off x="822960" y="2404872"/>
-            <a:ext cx="3383280" cy="347472"/>
+            <a:off x="1005840" y="2542032"/>
+            <a:ext cx="3200400" cy="365760"/>
           </a:xfrm>
           <a:prstGeom prst="rect">
             <a:avLst/>
@@ -2532,7 +2532,7 @@
               <a:buNone/>
             </a:pPr>
             <a:r>
-              <a:rPr lang="en-US" sz="1150" dirty="0">
+              <a:rPr lang="en-US" sz="1350" dirty="0">
                 <a:solidFill>
                   <a:srgbClr val="FAF7F0"/>
                 </a:solidFill>
@@ -2540,9 +2540,9 @@
                 <a:ea typeface="Calibri" pitchFamily="34" charset="-122"/>
                 <a:cs typeface="Calibri" pitchFamily="34" charset="-120"/>
               </a:rPr>
-              <a:t>1.  Open wetcf.com in Safari</a:t>
-            </a:r>
-            <a:endParaRPr lang="en-US" sz="1150" dirty="0"/>
+              <a:t>1.  Open wetcf.com</a:t>
+            </a:r>
+            <a:endParaRPr lang="en-US" sz="1350" dirty="0"/>
           </a:p>
         </p:txBody>
       </p:sp>
@@ -2554,8 +2554,8 @@
         </p:nvSpPr>
         <p:spPr>
           <a:xfrm>
-            <a:off x="822960" y="2834640"/>
-            <a:ext cx="3383280" cy="347472"/>
+            <a:off x="1005840" y="2962656"/>
+            <a:ext cx="3200400" cy="365760"/>
           </a:xfrm>
           <a:prstGeom prst="rect">
             <a:avLst/>
@@ -2571,7 +2571,7 @@
               <a:buNone/>
             </a:pPr>
             <a:r>
-              <a:rPr lang="en-US" sz="1150" dirty="0">
+              <a:rPr lang="en-US" sz="1350" dirty="0">
                 <a:solidFill>
                   <a:srgbClr val="FAF7F0"/>
                 </a:solidFill>
@@ -2579,9 +2579,9 @@
                 <a:ea typeface="Calibri" pitchFamily="34" charset="-122"/>
                 <a:cs typeface="Calibri" pitchFamily="34" charset="-120"/>
               </a:rPr>
-              <a:t>2.  Tap the Share button</a:t>
-            </a:r>
-            <a:endParaRPr lang="en-US" sz="1150" dirty="0"/>
+              <a:t>2.  Tap Share</a:t>
+            </a:r>
+            <a:endParaRPr lang="en-US" sz="1350" dirty="0"/>
           </a:p>
         </p:txBody>
       </p:sp>
@@ -2593,8 +2593,8 @@
         </p:nvSpPr>
         <p:spPr>
           <a:xfrm>
-            <a:off x="822960" y="3264408"/>
-            <a:ext cx="3383280" cy="347472"/>
+            <a:off x="1005840" y="3383280"/>
+            <a:ext cx="3200400" cy="365760"/>
           </a:xfrm>
           <a:prstGeom prst="rect">
             <a:avLst/>
@@ -2610,7 +2610,7 @@
               <a:buNone/>
             </a:pPr>
             <a:r>
-              <a:rPr lang="en-US" sz="1150" dirty="0">
+              <a:rPr lang="en-US" sz="1350" dirty="0">
                 <a:solidFill>
                   <a:srgbClr val="FAF7F0"/>
                 </a:solidFill>
@@ -2618,9 +2618,9 @@
                 <a:ea typeface="Calibri" pitchFamily="34" charset="-122"/>
                 <a:cs typeface="Calibri" pitchFamily="34" charset="-120"/>
               </a:rPr>
-              <a:t>3.  Tap "Add to Home Screen"</a:t>
-            </a:r>
-            <a:endParaRPr lang="en-US" sz="1150" dirty="0"/>
+              <a:t>3.  Add to Home Screen</a:t>
+            </a:r>
+            <a:endParaRPr lang="en-US" sz="1350" dirty="0"/>
           </a:p>
         </p:txBody>
       </p:sp>
@@ -2632,8 +2632,8 @@
         </p:nvSpPr>
         <p:spPr>
           <a:xfrm>
-            <a:off x="822960" y="3694176"/>
-            <a:ext cx="3383280" cy="347472"/>
+            <a:off x="1005840" y="3803904"/>
+            <a:ext cx="3200400" cy="365760"/>
           </a:xfrm>
           <a:prstGeom prst="rect">
             <a:avLst/>
@@ -2649,7 +2649,7 @@
               <a:buNone/>
             </a:pPr>
             <a:r>
-              <a:rPr lang="en-US" sz="1150" dirty="0">
+              <a:rPr lang="en-US" sz="1350" dirty="0">
                 <a:solidFill>
                   <a:srgbClr val="FAF7F0"/>
                 </a:solidFill>
@@ -2657,9 +2657,9 @@
                 <a:ea typeface="Calibri" pitchFamily="34" charset="-122"/>
                 <a:cs typeface="Calibri" pitchFamily="34" charset="-120"/>
               </a:rPr>
-              <a:t>4.  Tap "Add"</a:t>
-            </a:r>
-            <a:endParaRPr lang="en-US" sz="1150" dirty="0"/>
+              <a:t>4.  Tap Add</a:t>
+            </a:r>
+            <a:endParaRPr lang="en-US" sz="1350" dirty="0"/>
           </a:p>
         </p:txBody>
       </p:sp>
@@ -2671,18 +2671,18 @@
         </p:nvSpPr>
         <p:spPr>
           <a:xfrm>
-            <a:off x="4709160" y="1627632"/>
-            <a:ext cx="3931920" cy="2651760"/>
+            <a:off x="4709160" y="1682496"/>
+            <a:ext cx="3931920" cy="2615184"/>
           </a:xfrm>
           <a:prstGeom prst="roundRect">
             <a:avLst>
-              <a:gd name="adj" fmla="val 3448"/>
+              <a:gd name="adj" fmla="val 3846"/>
             </a:avLst>
           </a:prstGeom>
           <a:solidFill>
             <a:srgbClr val="1C0F07"/>
           </a:solidFill>
-          <a:ln w="12700">
+          <a:ln w="15875">
             <a:solidFill>
               <a:srgbClr val="C9A84C"/>
             </a:solidFill>
@@ -2698,8 +2698,8 @@
         </p:nvSpPr>
         <p:spPr>
           <a:xfrm>
-            <a:off x="4846320" y="1828800"/>
-            <a:ext cx="3657600" cy="329184"/>
+            <a:off x="4846320" y="1883664"/>
+            <a:ext cx="3657600" cy="365760"/>
           </a:xfrm>
           <a:prstGeom prst="rect">
             <a:avLst/>
@@ -2715,7 +2715,7 @@
               <a:buNone/>
             </a:pPr>
             <a:r>
-              <a:rPr lang="en-US" sz="1500" b="1" dirty="0">
+              <a:rPr lang="en-US" sz="1700" b="1" dirty="0">
                 <a:solidFill>
                   <a:srgbClr val="C9A84C"/>
                 </a:solidFill>
@@ -2725,7 +2725,7 @@
               </a:rPr>
               <a:t>Android  ·  Chrome</a:t>
             </a:r>
-            <a:endParaRPr lang="en-US" sz="1500" dirty="0"/>
+            <a:endParaRPr lang="en-US" sz="1700" dirty="0"/>
           </a:p>
         </p:txBody>
       </p:sp>
@@ -2737,8 +2737,8 @@
         </p:nvSpPr>
         <p:spPr>
           <a:xfrm>
-            <a:off x="5897880" y="2231136"/>
-            <a:ext cx="1554480" cy="32004"/>
+            <a:off x="5897880" y="2340864"/>
+            <a:ext cx="1554480" cy="36576"/>
           </a:xfrm>
           <a:prstGeom prst="rect">
             <a:avLst/>
@@ -2762,8 +2762,8 @@
         </p:nvSpPr>
         <p:spPr>
           <a:xfrm>
-            <a:off x="5029200" y="2404872"/>
-            <a:ext cx="3383280" cy="347472"/>
+            <a:off x="5212080" y="2542032"/>
+            <a:ext cx="3200400" cy="365760"/>
           </a:xfrm>
           <a:prstGeom prst="rect">
             <a:avLst/>
@@ -2779,7 +2779,7 @@
               <a:buNone/>
             </a:pPr>
             <a:r>
-              <a:rPr lang="en-US" sz="1150" dirty="0">
+              <a:rPr lang="en-US" sz="1350" dirty="0">
                 <a:solidFill>
                   <a:srgbClr val="FAF7F0"/>
                 </a:solidFill>
@@ -2787,9 +2787,9 @@
                 <a:ea typeface="Calibri" pitchFamily="34" charset="-122"/>
                 <a:cs typeface="Calibri" pitchFamily="34" charset="-120"/>
               </a:rPr>
-              <a:t>1.  Open wetcf.com in Chrome</a:t>
-            </a:r>
-            <a:endParaRPr lang="en-US" sz="1150" dirty="0"/>
+              <a:t>1.  Open wetcf.com</a:t>
+            </a:r>
+            <a:endParaRPr lang="en-US" sz="1350" dirty="0"/>
           </a:p>
         </p:txBody>
       </p:sp>
@@ -2801,8 +2801,8 @@
         </p:nvSpPr>
         <p:spPr>
           <a:xfrm>
-            <a:off x="5029200" y="2834640"/>
-            <a:ext cx="3383280" cy="347472"/>
+            <a:off x="5212080" y="2962656"/>
+            <a:ext cx="3200400" cy="365760"/>
           </a:xfrm>
           <a:prstGeom prst="rect">
             <a:avLst/>
@@ -2818,7 +2818,7 @@
               <a:buNone/>
             </a:pPr>
             <a:r>
-              <a:rPr lang="en-US" sz="1150" dirty="0">
+              <a:rPr lang="en-US" sz="1350" dirty="0">
                 <a:solidFill>
                   <a:srgbClr val="FAF7F0"/>
                 </a:solidFill>
@@ -2826,9 +2826,9 @@
                 <a:ea typeface="Calibri" pitchFamily="34" charset="-122"/>
                 <a:cs typeface="Calibri" pitchFamily="34" charset="-120"/>
               </a:rPr>
-              <a:t>2.  Tap the three-dot menu</a:t>
-            </a:r>
-            <a:endParaRPr lang="en-US" sz="1150" dirty="0"/>
+              <a:t>2.  Tap the ⋮ menu</a:t>
+            </a:r>
+            <a:endParaRPr lang="en-US" sz="1350" dirty="0"/>
           </a:p>
         </p:txBody>
       </p:sp>
@@ -2840,8 +2840,8 @@
         </p:nvSpPr>
         <p:spPr>
           <a:xfrm>
-            <a:off x="5029200" y="3264408"/>
-            <a:ext cx="3383280" cy="347472"/>
+            <a:off x="5212080" y="3383280"/>
+            <a:ext cx="3200400" cy="365760"/>
           </a:xfrm>
           <a:prstGeom prst="rect">
             <a:avLst/>
@@ -2857,7 +2857,7 @@
               <a:buNone/>
             </a:pPr>
             <a:r>
-              <a:rPr lang="en-US" sz="1150" dirty="0">
+              <a:rPr lang="en-US" sz="1350" dirty="0">
                 <a:solidFill>
                   <a:srgbClr val="FAF7F0"/>
                 </a:solidFill>
@@ -2865,9 +2865,9 @@
                 <a:ea typeface="Calibri" pitchFamily="34" charset="-122"/>
                 <a:cs typeface="Calibri" pitchFamily="34" charset="-120"/>
               </a:rPr>
-              <a:t>3.  Tap "Add to Home screen"</a:t>
-            </a:r>
-            <a:endParaRPr lang="en-US" sz="1150" dirty="0"/>
+              <a:t>3.  Add to Home screen</a:t>
+            </a:r>
+            <a:endParaRPr lang="en-US" sz="1350" dirty="0"/>
           </a:p>
         </p:txBody>
       </p:sp>
@@ -2879,8 +2879,8 @@
         </p:nvSpPr>
         <p:spPr>
           <a:xfrm>
-            <a:off x="5029200" y="3694176"/>
-            <a:ext cx="3383280" cy="347472"/>
+            <a:off x="5212080" y="3803904"/>
+            <a:ext cx="3200400" cy="365760"/>
           </a:xfrm>
           <a:prstGeom prst="rect">
             <a:avLst/>
@@ -2896,7 +2896,7 @@
               <a:buNone/>
             </a:pPr>
             <a:r>
-              <a:rPr lang="en-US" sz="1150" dirty="0">
+              <a:rPr lang="en-US" sz="1350" dirty="0">
                 <a:solidFill>
                   <a:srgbClr val="FAF7F0"/>
                 </a:solidFill>
@@ -2904,9 +2904,9 @@
                 <a:ea typeface="Calibri" pitchFamily="34" charset="-122"/>
                 <a:cs typeface="Calibri" pitchFamily="34" charset="-120"/>
               </a:rPr>
-              <a:t>4.  Tap "Add"</a:t>
-            </a:r>
-            <a:endParaRPr lang="en-US" sz="1150" dirty="0"/>
+              <a:t>4.  Tap Add</a:t>
+            </a:r>
+            <a:endParaRPr lang="en-US" sz="1350" dirty="0"/>
           </a:p>
         </p:txBody>
       </p:sp>
@@ -2918,8 +2918,8 @@
         </p:nvSpPr>
         <p:spPr>
           <a:xfrm>
-            <a:off x="502920" y="4434840"/>
-            <a:ext cx="8138160" cy="274320"/>
+            <a:off x="502920" y="4443984"/>
+            <a:ext cx="8138160" cy="292608"/>
           </a:xfrm>
           <a:prstGeom prst="rect">
             <a:avLst/>
@@ -2935,7 +2935,7 @@
               <a:buNone/>
             </a:pPr>
             <a:r>
-              <a:rPr lang="en-US" sz="1050" i="1" dirty="0">
+              <a:rPr lang="en-US" sz="1300" i="1" dirty="0">
                 <a:solidFill>
                   <a:srgbClr val="7A5535"/>
                 </a:solidFill>
@@ -2943,9 +2943,9 @@
                 <a:ea typeface="Calibri" pitchFamily="34" charset="-122"/>
                 <a:cs typeface="Calibri" pitchFamily="34" charset="-120"/>
               </a:rPr>
-              <a:t>It then behaves like a normal app — full screen, with notifications · ልክ እንደ መደበኛ አፕ ይሠራል</a:t>
-            </a:r>
-            <a:endParaRPr lang="en-US" sz="1050" dirty="0"/>
+              <a:t>It then behaves like a normal app — full screen, with notifications</a:t>
+            </a:r>
+            <a:endParaRPr lang="en-US" sz="1300" dirty="0"/>
           </a:p>
         </p:txBody>
       </p:sp>
@@ -2990,7 +2990,7 @@
         <p:spPr>
           <a:xfrm>
             <a:off x="502920" y="274320"/>
-            <a:ext cx="8138160" cy="566928"/>
+            <a:ext cx="8138160" cy="603504"/>
           </a:xfrm>
           <a:prstGeom prst="rect">
             <a:avLst/>
@@ -3006,7 +3006,7 @@
               <a:buNone/>
             </a:pPr>
             <a:r>
-              <a:rPr lang="en-US" sz="3200" b="1" dirty="0">
+              <a:rPr lang="en-US" sz="3400" b="1" dirty="0">
                 <a:solidFill>
                   <a:srgbClr val="C9A84C"/>
                 </a:solidFill>
@@ -3016,7 +3016,7 @@
               </a:rPr>
               <a:t>Your Information Is Safe</a:t>
             </a:r>
-            <a:endParaRPr lang="en-US" sz="3200" dirty="0"/>
+            <a:endParaRPr lang="en-US" sz="3400" dirty="0"/>
           </a:p>
         </p:txBody>
       </p:sp>
@@ -3028,8 +3028,8 @@
         </p:nvSpPr>
         <p:spPr>
           <a:xfrm>
-            <a:off x="502920" y="804672"/>
-            <a:ext cx="8138160" cy="347472"/>
+            <a:off x="502920" y="841248"/>
+            <a:ext cx="8138160" cy="365760"/>
           </a:xfrm>
           <a:prstGeom prst="rect">
             <a:avLst/>
@@ -3045,14 +3045,14 @@
               <a:buNone/>
             </a:pPr>
             <a:r>
-              <a:rPr lang="en-US" sz="1700" dirty="0">
+              <a:rPr lang="en-US" sz="1900" dirty="0">
                 <a:solidFill>
                   <a:srgbClr val="FAF7F0"/>
                 </a:solidFill>
               </a:rPr>
               <a:t>መረጃዎ የተጠበቀ ነው</a:t>
             </a:r>
-            <a:endParaRPr lang="en-US" sz="1700" dirty="0"/>
+            <a:endParaRPr lang="en-US" sz="1900" dirty="0"/>
           </a:p>
         </p:txBody>
       </p:sp>
@@ -3064,8 +3064,8 @@
         </p:nvSpPr>
         <p:spPr>
           <a:xfrm>
-            <a:off x="685800" y="1353312"/>
-            <a:ext cx="512064" cy="512064"/>
+            <a:off x="621792" y="1389888"/>
+            <a:ext cx="640080" cy="640080"/>
           </a:xfrm>
           <a:prstGeom prst="ellipse">
             <a:avLst/>
@@ -3097,8 +3097,8 @@
         </p:blipFill>
         <p:spPr>
           <a:xfrm>
-            <a:off x="772851" y="1440363"/>
-            <a:ext cx="337962" cy="337962"/>
+            <a:off x="743407" y="1511503"/>
+            <a:ext cx="396850" cy="396850"/>
           </a:xfrm>
           <a:prstGeom prst="rect">
             <a:avLst/>
@@ -3113,8 +3113,8 @@
         </p:nvSpPr>
         <p:spPr>
           <a:xfrm>
-            <a:off x="1389888" y="1298448"/>
-            <a:ext cx="7223760" cy="292608"/>
+            <a:off x="1463040" y="1353312"/>
+            <a:ext cx="7132320" cy="329184"/>
           </a:xfrm>
           <a:prstGeom prst="rect">
             <a:avLst/>
@@ -3130,7 +3130,7 @@
               <a:buNone/>
             </a:pPr>
             <a:r>
-              <a:rPr lang="en-US" sz="1400" b="1" dirty="0">
+              <a:rPr lang="en-US" sz="1600" b="1" dirty="0">
                 <a:solidFill>
                   <a:srgbClr val="C9A84C"/>
                 </a:solidFill>
@@ -3140,7 +3140,7 @@
               </a:rPr>
               <a:t>Members only</a:t>
             </a:r>
-            <a:endParaRPr lang="en-US" sz="1400" dirty="0"/>
+            <a:endParaRPr lang="en-US" sz="1600" dirty="0"/>
           </a:p>
         </p:txBody>
       </p:sp>
@@ -3152,8 +3152,8 @@
         </p:nvSpPr>
         <p:spPr>
           <a:xfrm>
-            <a:off x="1389888" y="1591056"/>
-            <a:ext cx="7223760" cy="347472"/>
+            <a:off x="1463040" y="1682496"/>
+            <a:ext cx="7132320" cy="365760"/>
           </a:xfrm>
           <a:prstGeom prst="rect">
             <a:avLst/>
@@ -3169,7 +3169,7 @@
               <a:buNone/>
             </a:pPr>
             <a:r>
-              <a:rPr lang="en-US" sz="1150" dirty="0">
+              <a:rPr lang="en-US" sz="1350" dirty="0">
                 <a:solidFill>
                   <a:srgbClr val="FAF7F0"/>
                 </a:solidFill>
@@ -3177,9 +3177,9 @@
                 <a:ea typeface="Calibri" pitchFamily="34" charset="-122"/>
                 <a:cs typeface="Calibri" pitchFamily="34" charset="-120"/>
               </a:rPr>
-              <a:t>The portal is not open to the public. A leader approves every account.</a:t>
-            </a:r>
-            <a:endParaRPr lang="en-US" sz="1150" dirty="0"/>
+              <a:t>Not open to the public. A leader approves every account.</a:t>
+            </a:r>
+            <a:endParaRPr lang="en-US" sz="1350" dirty="0"/>
           </a:p>
         </p:txBody>
       </p:sp>
@@ -3191,8 +3191,8 @@
         </p:nvSpPr>
         <p:spPr>
           <a:xfrm>
-            <a:off x="685800" y="2194560"/>
-            <a:ext cx="512064" cy="512064"/>
+            <a:off x="621792" y="2240280"/>
+            <a:ext cx="640080" cy="640080"/>
           </a:xfrm>
           <a:prstGeom prst="ellipse">
             <a:avLst/>
@@ -3224,8 +3224,8 @@
         </p:blipFill>
         <p:spPr>
           <a:xfrm>
-            <a:off x="772851" y="2281611"/>
-            <a:ext cx="337962" cy="337962"/>
+            <a:off x="743407" y="2361895"/>
+            <a:ext cx="396850" cy="396850"/>
           </a:xfrm>
           <a:prstGeom prst="rect">
             <a:avLst/>
@@ -3240,8 +3240,8 @@
         </p:nvSpPr>
         <p:spPr>
           <a:xfrm>
-            <a:off x="1389888" y="2139696"/>
-            <a:ext cx="7223760" cy="292608"/>
+            <a:off x="1463040" y="2203704"/>
+            <a:ext cx="7132320" cy="329184"/>
           </a:xfrm>
           <a:prstGeom prst="rect">
             <a:avLst/>
@@ -3257,7 +3257,7 @@
               <a:buNone/>
             </a:pPr>
             <a:r>
-              <a:rPr lang="en-US" sz="1400" b="1" dirty="0">
+              <a:rPr lang="en-US" sz="1600" b="1" dirty="0">
                 <a:solidFill>
                   <a:srgbClr val="C9A84C"/>
                 </a:solidFill>
@@ -3267,7 +3267,7 @@
               </a:rPr>
               <a:t>Properly protected</a:t>
             </a:r>
-            <a:endParaRPr lang="en-US" sz="1400" dirty="0"/>
+            <a:endParaRPr lang="en-US" sz="1600" dirty="0"/>
           </a:p>
         </p:txBody>
       </p:sp>
@@ -3279,8 +3279,8 @@
         </p:nvSpPr>
         <p:spPr>
           <a:xfrm>
-            <a:off x="1389888" y="2432304"/>
-            <a:ext cx="7223760" cy="347472"/>
+            <a:off x="1463040" y="2532888"/>
+            <a:ext cx="7132320" cy="365760"/>
           </a:xfrm>
           <a:prstGeom prst="rect">
             <a:avLst/>
@@ -3296,7 +3296,7 @@
               <a:buNone/>
             </a:pPr>
             <a:r>
-              <a:rPr lang="en-US" sz="1150" dirty="0">
+              <a:rPr lang="en-US" sz="1350" dirty="0">
                 <a:solidFill>
                   <a:srgbClr val="FAF7F0"/>
                 </a:solidFill>
@@ -3304,9 +3304,9 @@
                 <a:ea typeface="Calibri" pitchFamily="34" charset="-122"/>
                 <a:cs typeface="Calibri" pitchFamily="34" charset="-120"/>
               </a:rPr>
-              <a:t>Everything is encrypted, and passwords are stored so even we cannot read them.</a:t>
-            </a:r>
-            <a:endParaRPr lang="en-US" sz="1150" dirty="0"/>
+              <a:t>Encrypted, and passwords stored so even we cannot read them.</a:t>
+            </a:r>
+            <a:endParaRPr lang="en-US" sz="1350" dirty="0"/>
           </a:p>
         </p:txBody>
       </p:sp>
@@ -3318,8 +3318,8 @@
         </p:nvSpPr>
         <p:spPr>
           <a:xfrm>
-            <a:off x="685800" y="3035808"/>
-            <a:ext cx="512064" cy="512064"/>
+            <a:off x="621792" y="3090672"/>
+            <a:ext cx="640080" cy="640080"/>
           </a:xfrm>
           <a:prstGeom prst="ellipse">
             <a:avLst/>
@@ -3351,8 +3351,8 @@
         </p:blipFill>
         <p:spPr>
           <a:xfrm>
-            <a:off x="772851" y="3122859"/>
-            <a:ext cx="337962" cy="337962"/>
+            <a:off x="743407" y="3212287"/>
+            <a:ext cx="396850" cy="396850"/>
           </a:xfrm>
           <a:prstGeom prst="rect">
             <a:avLst/>
@@ -3367,8 +3367,8 @@
         </p:nvSpPr>
         <p:spPr>
           <a:xfrm>
-            <a:off x="1389888" y="2980944"/>
-            <a:ext cx="7223760" cy="292608"/>
+            <a:off x="1463040" y="3054096"/>
+            <a:ext cx="7132320" cy="329184"/>
           </a:xfrm>
           <a:prstGeom prst="rect">
             <a:avLst/>
@@ -3384,7 +3384,7 @@
               <a:buNone/>
             </a:pPr>
             <a:r>
-              <a:rPr lang="en-US" sz="1400" b="1" dirty="0">
+              <a:rPr lang="en-US" sz="1600" b="1" dirty="0">
                 <a:solidFill>
                   <a:srgbClr val="C9A84C"/>
                 </a:solidFill>
@@ -3394,7 +3394,7 @@
               </a:rPr>
               <a:t>Yours to remove</a:t>
             </a:r>
-            <a:endParaRPr lang="en-US" sz="1400" dirty="0"/>
+            <a:endParaRPr lang="en-US" sz="1600" dirty="0"/>
           </a:p>
         </p:txBody>
       </p:sp>
@@ -3406,8 +3406,8 @@
         </p:nvSpPr>
         <p:spPr>
           <a:xfrm>
-            <a:off x="1389888" y="3273552"/>
-            <a:ext cx="7223760" cy="347472"/>
+            <a:off x="1463040" y="3383280"/>
+            <a:ext cx="7132320" cy="365760"/>
           </a:xfrm>
           <a:prstGeom prst="rect">
             <a:avLst/>
@@ -3423,7 +3423,7 @@
               <a:buNone/>
             </a:pPr>
             <a:r>
-              <a:rPr lang="en-US" sz="1150" dirty="0">
+              <a:rPr lang="en-US" sz="1350" dirty="0">
                 <a:solidFill>
                   <a:srgbClr val="FAF7F0"/>
                 </a:solidFill>
@@ -3431,9 +3431,9 @@
                 <a:ea typeface="Calibri" pitchFamily="34" charset="-122"/>
                 <a:cs typeface="Calibri" pitchFamily="34" charset="-120"/>
               </a:rPr>
-              <a:t>You can delete your account and your details at any time, from your profile.</a:t>
-            </a:r>
-            <a:endParaRPr lang="en-US" sz="1150" dirty="0"/>
+              <a:t>Delete your account and details any time, from your profile.</a:t>
+            </a:r>
+            <a:endParaRPr lang="en-US" sz="1350" dirty="0"/>
           </a:p>
         </p:txBody>
       </p:sp>
@@ -3445,8 +3445,8 @@
         </p:nvSpPr>
         <p:spPr>
           <a:xfrm>
-            <a:off x="685800" y="3877056"/>
-            <a:ext cx="512064" cy="512064"/>
+            <a:off x="621792" y="3941064"/>
+            <a:ext cx="640080" cy="640080"/>
           </a:xfrm>
           <a:prstGeom prst="ellipse">
             <a:avLst/>
@@ -3478,8 +3478,8 @@
         </p:blipFill>
         <p:spPr>
           <a:xfrm>
-            <a:off x="772851" y="3964107"/>
-            <a:ext cx="337962" cy="337962"/>
+            <a:off x="743407" y="4062679"/>
+            <a:ext cx="396850" cy="396850"/>
           </a:xfrm>
           <a:prstGeom prst="rect">
             <a:avLst/>
@@ -3494,8 +3494,8 @@
         </p:nvSpPr>
         <p:spPr>
           <a:xfrm>
-            <a:off x="1389888" y="3822192"/>
-            <a:ext cx="7223760" cy="292608"/>
+            <a:off x="1463040" y="3904488"/>
+            <a:ext cx="7132320" cy="329184"/>
           </a:xfrm>
           <a:prstGeom prst="rect">
             <a:avLst/>
@@ -3511,7 +3511,7 @@
               <a:buNone/>
             </a:pPr>
             <a:r>
-              <a:rPr lang="en-US" sz="1400" b="1" dirty="0">
+              <a:rPr lang="en-US" sz="1600" b="1" dirty="0">
                 <a:solidFill>
                   <a:srgbClr val="C9A84C"/>
                 </a:solidFill>
@@ -3521,7 +3521,7 @@
               </a:rPr>
               <a:t>Never sold</a:t>
             </a:r>
-            <a:endParaRPr lang="en-US" sz="1400" dirty="0"/>
+            <a:endParaRPr lang="en-US" sz="1600" dirty="0"/>
           </a:p>
         </p:txBody>
       </p:sp>
@@ -3533,8 +3533,8 @@
         </p:nvSpPr>
         <p:spPr>
           <a:xfrm>
-            <a:off x="1389888" y="4114800"/>
-            <a:ext cx="7223760" cy="347472"/>
+            <a:off x="1463040" y="4233672"/>
+            <a:ext cx="7132320" cy="365760"/>
           </a:xfrm>
           <a:prstGeom prst="rect">
             <a:avLst/>
@@ -3550,7 +3550,7 @@
               <a:buNone/>
             </a:pPr>
             <a:r>
-              <a:rPr lang="en-US" sz="1150" dirty="0">
+              <a:rPr lang="en-US" sz="1350" dirty="0">
                 <a:solidFill>
                   <a:srgbClr val="FAF7F0"/>
                 </a:solidFill>
@@ -3558,9 +3558,9 @@
                 <a:ea typeface="Calibri" pitchFamily="34" charset="-122"/>
                 <a:cs typeface="Calibri" pitchFamily="34" charset="-120"/>
               </a:rPr>
-              <a:t>We do not sell or share your information with anyone. Ever.</a:t>
-            </a:r>
-            <a:endParaRPr lang="en-US" sz="1150" dirty="0"/>
+              <a:t>We do not sell or share your information. Ever.</a:t>
+            </a:r>
+            <a:endParaRPr lang="en-US" sz="1350" dirty="0"/>
           </a:p>
         </p:txBody>
       </p:sp>
@@ -3604,8 +3604,8 @@
         </p:nvSpPr>
         <p:spPr>
           <a:xfrm>
-            <a:off x="502920" y="411480"/>
-            <a:ext cx="4937760" cy="566928"/>
+            <a:off x="502920" y="384048"/>
+            <a:ext cx="4937760" cy="603504"/>
           </a:xfrm>
           <a:prstGeom prst="rect">
             <a:avLst/>
@@ -3621,7 +3621,7 @@
               <a:buNone/>
             </a:pPr>
             <a:r>
-              <a:rPr lang="en-US" sz="3200" b="1" dirty="0">
+              <a:rPr lang="en-US" sz="3400" b="1" dirty="0">
                 <a:solidFill>
                   <a:srgbClr val="1C0F07"/>
                 </a:solidFill>
@@ -3631,7 +3631,7 @@
               </a:rPr>
               <a:t>Join Us — Right Now</a:t>
             </a:r>
-            <a:endParaRPr lang="en-US" sz="3200" dirty="0"/>
+            <a:endParaRPr lang="en-US" sz="3400" dirty="0"/>
           </a:p>
         </p:txBody>
       </p:sp>
@@ -3643,8 +3643,8 @@
         </p:nvSpPr>
         <p:spPr>
           <a:xfrm>
-            <a:off x="502920" y="960120"/>
-            <a:ext cx="4937760" cy="347472"/>
+            <a:off x="502920" y="950976"/>
+            <a:ext cx="4937760" cy="365760"/>
           </a:xfrm>
           <a:prstGeom prst="rect">
             <a:avLst/>
@@ -3660,14 +3660,14 @@
               <a:buNone/>
             </a:pPr>
             <a:r>
-              <a:rPr lang="en-US" sz="1700" dirty="0">
+              <a:rPr lang="en-US" sz="1900" dirty="0">
                 <a:solidFill>
                   <a:srgbClr val="7A5535"/>
                 </a:solidFill>
               </a:rPr>
               <a:t>አሁኑኑ ይቀላቀሉን</a:t>
             </a:r>
-            <a:endParaRPr lang="en-US" sz="1700" dirty="0"/>
+            <a:endParaRPr lang="en-US" sz="1900" dirty="0"/>
           </a:p>
         </p:txBody>
       </p:sp>
@@ -3679,8 +3679,8 @@
         </p:nvSpPr>
         <p:spPr>
           <a:xfrm>
-            <a:off x="548640" y="1499616"/>
-            <a:ext cx="457200" cy="457200"/>
+            <a:off x="530352" y="1554480"/>
+            <a:ext cx="530352" cy="530352"/>
           </a:xfrm>
           <a:prstGeom prst="ellipse">
             <a:avLst/>
@@ -3704,8 +3704,8 @@
         </p:nvSpPr>
         <p:spPr>
           <a:xfrm>
-            <a:off x="548640" y="1527048"/>
-            <a:ext cx="457200" cy="402336"/>
+            <a:off x="530352" y="1591056"/>
+            <a:ext cx="530352" cy="457200"/>
           </a:xfrm>
           <a:prstGeom prst="rect">
             <a:avLst/>
@@ -3721,43 +3721,43 @@
               <a:buNone/>
             </a:pPr>
             <a:r>
+              <a:rPr lang="en-US" sz="1900" b="1" dirty="0">
+                <a:solidFill>
+                  <a:srgbClr val="C9A84C"/>
+                </a:solidFill>
+              </a:rPr>
+              <a:t>1</a:t>
+            </a:r>
+            <a:endParaRPr lang="en-US" sz="1900" dirty="0"/>
+          </a:p>
+        </p:txBody>
+      </p:sp>
+      <p:sp>
+        <p:nvSpPr>
+          <p:cNvPr id="6" name="Text 4"/>
+          <p:cNvSpPr txBox="1"/>
+          <p:nvPr/>
+        </p:nvSpPr>
+        <p:spPr>
+          <a:xfrm>
+            <a:off x="1207008" y="1536192"/>
+            <a:ext cx="4023360" cy="310896"/>
+          </a:xfrm>
+          <a:prstGeom prst="rect">
+            <a:avLst/>
+          </a:prstGeom>
+          <a:noFill/>
+          <a:ln/>
+        </p:spPr>
+        <p:txBody>
+          <a:bodyPr wrap="square" lIns="0" tIns="0" rIns="0" bIns="0" rtlCol="0" anchor="ctr"/>
+          <a:lstStyle/>
+          <a:p>
+            <a:pPr indent="0" marL="0">
+              <a:buNone/>
+            </a:pPr>
+            <a:r>
               <a:rPr lang="en-US" sz="1600" b="1" dirty="0">
-                <a:solidFill>
-                  <a:srgbClr val="C9A84C"/>
-                </a:solidFill>
-              </a:rPr>
-              <a:t>1</a:t>
-            </a:r>
-            <a:endParaRPr lang="en-US" sz="1600" dirty="0"/>
-          </a:p>
-        </p:txBody>
-      </p:sp>
-      <p:sp>
-        <p:nvSpPr>
-          <p:cNvPr id="6" name="Text 4"/>
-          <p:cNvSpPr txBox="1"/>
-          <p:nvPr/>
-        </p:nvSpPr>
-        <p:spPr>
-          <a:xfrm>
-            <a:off x="1143000" y="1481328"/>
-            <a:ext cx="4114800" cy="274320"/>
-          </a:xfrm>
-          <a:prstGeom prst="rect">
-            <a:avLst/>
-          </a:prstGeom>
-          <a:noFill/>
-          <a:ln/>
-        </p:spPr>
-        <p:txBody>
-          <a:bodyPr wrap="square" lIns="0" tIns="0" rIns="0" bIns="0" rtlCol="0" anchor="ctr"/>
-          <a:lstStyle/>
-          <a:p>
-            <a:pPr indent="0" marL="0">
-              <a:buNone/>
-            </a:pPr>
-            <a:r>
-              <a:rPr lang="en-US" sz="1400" b="1" dirty="0">
                 <a:solidFill>
                   <a:srgbClr val="1C0F07"/>
                 </a:solidFill>
@@ -3767,7 +3767,7 @@
               </a:rPr>
               <a:t>Scan the code</a:t>
             </a:r>
-            <a:endParaRPr lang="en-US" sz="1400" dirty="0"/>
+            <a:endParaRPr lang="en-US" sz="1600" dirty="0"/>
           </a:p>
         </p:txBody>
       </p:sp>
@@ -3779,8 +3779,8 @@
         </p:nvSpPr>
         <p:spPr>
           <a:xfrm>
-            <a:off x="1143000" y="1755648"/>
-            <a:ext cx="4114800" cy="274320"/>
+            <a:off x="1207008" y="1847088"/>
+            <a:ext cx="4023360" cy="292608"/>
           </a:xfrm>
           <a:prstGeom prst="rect">
             <a:avLst/>
@@ -3796,7 +3796,7 @@
               <a:buNone/>
             </a:pPr>
             <a:r>
-              <a:rPr lang="en-US" sz="1100" dirty="0">
+              <a:rPr lang="en-US" sz="1300" dirty="0">
                 <a:solidFill>
                   <a:srgbClr val="3D2312"/>
                 </a:solidFill>
@@ -3806,7 +3806,7 @@
               </a:rPr>
               <a:t>Point your phone camera at it</a:t>
             </a:r>
-            <a:endParaRPr lang="en-US" sz="1100" dirty="0"/>
+            <a:endParaRPr lang="en-US" sz="1300" dirty="0"/>
           </a:p>
         </p:txBody>
       </p:sp>
@@ -3818,8 +3818,8 @@
         </p:nvSpPr>
         <p:spPr>
           <a:xfrm>
-            <a:off x="548640" y="2249424"/>
-            <a:ext cx="457200" cy="457200"/>
+            <a:off x="530352" y="2322576"/>
+            <a:ext cx="530352" cy="530352"/>
           </a:xfrm>
           <a:prstGeom prst="ellipse">
             <a:avLst/>
@@ -3843,8 +3843,8 @@
         </p:nvSpPr>
         <p:spPr>
           <a:xfrm>
-            <a:off x="548640" y="2276856"/>
-            <a:ext cx="457200" cy="402336"/>
+            <a:off x="530352" y="2359152"/>
+            <a:ext cx="530352" cy="457200"/>
           </a:xfrm>
           <a:prstGeom prst="rect">
             <a:avLst/>
@@ -3860,43 +3860,43 @@
               <a:buNone/>
             </a:pPr>
             <a:r>
+              <a:rPr lang="en-US" sz="1900" b="1" dirty="0">
+                <a:solidFill>
+                  <a:srgbClr val="C9A84C"/>
+                </a:solidFill>
+              </a:rPr>
+              <a:t>2</a:t>
+            </a:r>
+            <a:endParaRPr lang="en-US" sz="1900" dirty="0"/>
+          </a:p>
+        </p:txBody>
+      </p:sp>
+      <p:sp>
+        <p:nvSpPr>
+          <p:cNvPr id="10" name="Text 8"/>
+          <p:cNvSpPr txBox="1"/>
+          <p:nvPr/>
+        </p:nvSpPr>
+        <p:spPr>
+          <a:xfrm>
+            <a:off x="1207008" y="2304288"/>
+            <a:ext cx="4023360" cy="310896"/>
+          </a:xfrm>
+          <a:prstGeom prst="rect">
+            <a:avLst/>
+          </a:prstGeom>
+          <a:noFill/>
+          <a:ln/>
+        </p:spPr>
+        <p:txBody>
+          <a:bodyPr wrap="square" lIns="0" tIns="0" rIns="0" bIns="0" rtlCol="0" anchor="ctr"/>
+          <a:lstStyle/>
+          <a:p>
+            <a:pPr indent="0" marL="0">
+              <a:buNone/>
+            </a:pPr>
+            <a:r>
               <a:rPr lang="en-US" sz="1600" b="1" dirty="0">
-                <a:solidFill>
-                  <a:srgbClr val="C9A84C"/>
-                </a:solidFill>
-              </a:rPr>
-              <a:t>2</a:t>
-            </a:r>
-            <a:endParaRPr lang="en-US" sz="1600" dirty="0"/>
-          </a:p>
-        </p:txBody>
-      </p:sp>
-      <p:sp>
-        <p:nvSpPr>
-          <p:cNvPr id="10" name="Text 8"/>
-          <p:cNvSpPr txBox="1"/>
-          <p:nvPr/>
-        </p:nvSpPr>
-        <p:spPr>
-          <a:xfrm>
-            <a:off x="1143000" y="2231136"/>
-            <a:ext cx="4114800" cy="274320"/>
-          </a:xfrm>
-          <a:prstGeom prst="rect">
-            <a:avLst/>
-          </a:prstGeom>
-          <a:noFill/>
-          <a:ln/>
-        </p:spPr>
-        <p:txBody>
-          <a:bodyPr wrap="square" lIns="0" tIns="0" rIns="0" bIns="0" rtlCol="0" anchor="ctr"/>
-          <a:lstStyle/>
-          <a:p>
-            <a:pPr indent="0" marL="0">
-              <a:buNone/>
-            </a:pPr>
-            <a:r>
-              <a:rPr lang="en-US" sz="1400" b="1" dirty="0">
                 <a:solidFill>
                   <a:srgbClr val="1C0F07"/>
                 </a:solidFill>
@@ -3906,7 +3906,7 @@
               </a:rPr>
               <a:t>Create your account</a:t>
             </a:r>
-            <a:endParaRPr lang="en-US" sz="1400" dirty="0"/>
+            <a:endParaRPr lang="en-US" sz="1600" dirty="0"/>
           </a:p>
         </p:txBody>
       </p:sp>
@@ -3918,8 +3918,8 @@
         </p:nvSpPr>
         <p:spPr>
           <a:xfrm>
-            <a:off x="1143000" y="2505456"/>
-            <a:ext cx="4114800" cy="274320"/>
+            <a:off x="1207008" y="2615184"/>
+            <a:ext cx="4023360" cy="292608"/>
           </a:xfrm>
           <a:prstGeom prst="rect">
             <a:avLst/>
@@ -3935,7 +3935,7 @@
               <a:buNone/>
             </a:pPr>
             <a:r>
-              <a:rPr lang="en-US" sz="1100" dirty="0">
+              <a:rPr lang="en-US" sz="1300" dirty="0">
                 <a:solidFill>
                   <a:srgbClr val="3D2312"/>
                 </a:solidFill>
@@ -3943,9 +3943,9 @@
                 <a:ea typeface="Calibri" pitchFamily="34" charset="-122"/>
                 <a:cs typeface="Calibri" pitchFamily="34" charset="-120"/>
               </a:rPr>
-              <a:t>Your name, email and phone — under two minutes</a:t>
-            </a:r>
-            <a:endParaRPr lang="en-US" sz="1100" dirty="0"/>
+              <a:t>Under two minutes</a:t>
+            </a:r>
+            <a:endParaRPr lang="en-US" sz="1300" dirty="0"/>
           </a:p>
         </p:txBody>
       </p:sp>
@@ -3957,8 +3957,8 @@
         </p:nvSpPr>
         <p:spPr>
           <a:xfrm>
-            <a:off x="548640" y="2999232"/>
-            <a:ext cx="457200" cy="457200"/>
+            <a:off x="530352" y="3090672"/>
+            <a:ext cx="530352" cy="530352"/>
           </a:xfrm>
           <a:prstGeom prst="ellipse">
             <a:avLst/>
@@ -3982,8 +3982,8 @@
         </p:nvSpPr>
         <p:spPr>
           <a:xfrm>
-            <a:off x="548640" y="3026664"/>
-            <a:ext cx="457200" cy="402336"/>
+            <a:off x="530352" y="3127248"/>
+            <a:ext cx="530352" cy="457200"/>
           </a:xfrm>
           <a:prstGeom prst="rect">
             <a:avLst/>
@@ -3999,43 +3999,43 @@
               <a:buNone/>
             </a:pPr>
             <a:r>
+              <a:rPr lang="en-US" sz="1900" b="1" dirty="0">
+                <a:solidFill>
+                  <a:srgbClr val="C9A84C"/>
+                </a:solidFill>
+              </a:rPr>
+              <a:t>3</a:t>
+            </a:r>
+            <a:endParaRPr lang="en-US" sz="1900" dirty="0"/>
+          </a:p>
+        </p:txBody>
+      </p:sp>
+      <p:sp>
+        <p:nvSpPr>
+          <p:cNvPr id="14" name="Text 12"/>
+          <p:cNvSpPr txBox="1"/>
+          <p:nvPr/>
+        </p:nvSpPr>
+        <p:spPr>
+          <a:xfrm>
+            <a:off x="1207008" y="3072384"/>
+            <a:ext cx="4023360" cy="310896"/>
+          </a:xfrm>
+          <a:prstGeom prst="rect">
+            <a:avLst/>
+          </a:prstGeom>
+          <a:noFill/>
+          <a:ln/>
+        </p:spPr>
+        <p:txBody>
+          <a:bodyPr wrap="square" lIns="0" tIns="0" rIns="0" bIns="0" rtlCol="0" anchor="ctr"/>
+          <a:lstStyle/>
+          <a:p>
+            <a:pPr indent="0" marL="0">
+              <a:buNone/>
+            </a:pPr>
+            <a:r>
               <a:rPr lang="en-US" sz="1600" b="1" dirty="0">
-                <a:solidFill>
-                  <a:srgbClr val="C9A84C"/>
-                </a:solidFill>
-              </a:rPr>
-              <a:t>3</a:t>
-            </a:r>
-            <a:endParaRPr lang="en-US" sz="1600" dirty="0"/>
-          </a:p>
-        </p:txBody>
-      </p:sp>
-      <p:sp>
-        <p:nvSpPr>
-          <p:cNvPr id="14" name="Text 12"/>
-          <p:cNvSpPr txBox="1"/>
-          <p:nvPr/>
-        </p:nvSpPr>
-        <p:spPr>
-          <a:xfrm>
-            <a:off x="1143000" y="2980944"/>
-            <a:ext cx="4114800" cy="274320"/>
-          </a:xfrm>
-          <a:prstGeom prst="rect">
-            <a:avLst/>
-          </a:prstGeom>
-          <a:noFill/>
-          <a:ln/>
-        </p:spPr>
-        <p:txBody>
-          <a:bodyPr wrap="square" lIns="0" tIns="0" rIns="0" bIns="0" rtlCol="0" anchor="ctr"/>
-          <a:lstStyle/>
-          <a:p>
-            <a:pPr indent="0" marL="0">
-              <a:buNone/>
-            </a:pPr>
-            <a:r>
-              <a:rPr lang="en-US" sz="1400" b="1" dirty="0">
                 <a:solidFill>
                   <a:srgbClr val="1C0F07"/>
                 </a:solidFill>
@@ -4045,7 +4045,7 @@
               </a:rPr>
               <a:t>Add it to your phone</a:t>
             </a:r>
-            <a:endParaRPr lang="en-US" sz="1400" dirty="0"/>
+            <a:endParaRPr lang="en-US" sz="1600" dirty="0"/>
           </a:p>
         </p:txBody>
       </p:sp>
@@ -4057,8 +4057,8 @@
         </p:nvSpPr>
         <p:spPr>
           <a:xfrm>
-            <a:off x="1143000" y="3255264"/>
-            <a:ext cx="4114800" cy="274320"/>
+            <a:off x="1207008" y="3383280"/>
+            <a:ext cx="4023360" cy="292608"/>
           </a:xfrm>
           <a:prstGeom prst="rect">
             <a:avLst/>
@@ -4074,7 +4074,7 @@
               <a:buNone/>
             </a:pPr>
             <a:r>
-              <a:rPr lang="en-US" sz="1100" dirty="0">
+              <a:rPr lang="en-US" sz="1300" dirty="0">
                 <a:solidFill>
                   <a:srgbClr val="3D2312"/>
                 </a:solidFill>
@@ -4082,9 +4082,9 @@
                 <a:ea typeface="Calibri" pitchFamily="34" charset="-122"/>
                 <a:cs typeface="Calibri" pitchFamily="34" charset="-120"/>
               </a:rPr>
-              <a:t>So it is one tap away next time</a:t>
-            </a:r>
-            <a:endParaRPr lang="en-US" sz="1100" dirty="0"/>
+              <a:t>One tap away next time</a:t>
+            </a:r>
+            <a:endParaRPr lang="en-US" sz="1300" dirty="0"/>
           </a:p>
         </p:txBody>
       </p:sp>
@@ -4096,8 +4096,8 @@
         </p:nvSpPr>
         <p:spPr>
           <a:xfrm>
-            <a:off x="548640" y="3749040"/>
-            <a:ext cx="457200" cy="457200"/>
+            <a:off x="530352" y="3858768"/>
+            <a:ext cx="530352" cy="530352"/>
           </a:xfrm>
           <a:prstGeom prst="ellipse">
             <a:avLst/>
@@ -4121,8 +4121,8 @@
         </p:nvSpPr>
         <p:spPr>
           <a:xfrm>
-            <a:off x="548640" y="3776472"/>
-            <a:ext cx="457200" cy="402336"/>
+            <a:off x="530352" y="3895344"/>
+            <a:ext cx="530352" cy="457200"/>
           </a:xfrm>
           <a:prstGeom prst="rect">
             <a:avLst/>
@@ -4138,43 +4138,43 @@
               <a:buNone/>
             </a:pPr>
             <a:r>
+              <a:rPr lang="en-US" sz="1900" b="1" dirty="0">
+                <a:solidFill>
+                  <a:srgbClr val="C9A84C"/>
+                </a:solidFill>
+              </a:rPr>
+              <a:t>4</a:t>
+            </a:r>
+            <a:endParaRPr lang="en-US" sz="1900" dirty="0"/>
+          </a:p>
+        </p:txBody>
+      </p:sp>
+      <p:sp>
+        <p:nvSpPr>
+          <p:cNvPr id="18" name="Text 16"/>
+          <p:cNvSpPr txBox="1"/>
+          <p:nvPr/>
+        </p:nvSpPr>
+        <p:spPr>
+          <a:xfrm>
+            <a:off x="1207008" y="3840480"/>
+            <a:ext cx="4023360" cy="310896"/>
+          </a:xfrm>
+          <a:prstGeom prst="rect">
+            <a:avLst/>
+          </a:prstGeom>
+          <a:noFill/>
+          <a:ln/>
+        </p:spPr>
+        <p:txBody>
+          <a:bodyPr wrap="square" lIns="0" tIns="0" rIns="0" bIns="0" rtlCol="0" anchor="ctr"/>
+          <a:lstStyle/>
+          <a:p>
+            <a:pPr indent="0" marL="0">
+              <a:buNone/>
+            </a:pPr>
+            <a:r>
               <a:rPr lang="en-US" sz="1600" b="1" dirty="0">
-                <a:solidFill>
-                  <a:srgbClr val="C9A84C"/>
-                </a:solidFill>
-              </a:rPr>
-              <a:t>4</a:t>
-            </a:r>
-            <a:endParaRPr lang="en-US" sz="1600" dirty="0"/>
-          </a:p>
-        </p:txBody>
-      </p:sp>
-      <p:sp>
-        <p:nvSpPr>
-          <p:cNvPr id="18" name="Text 16"/>
-          <p:cNvSpPr txBox="1"/>
-          <p:nvPr/>
-        </p:nvSpPr>
-        <p:spPr>
-          <a:xfrm>
-            <a:off x="1143000" y="3730752"/>
-            <a:ext cx="4114800" cy="274320"/>
-          </a:xfrm>
-          <a:prstGeom prst="rect">
-            <a:avLst/>
-          </a:prstGeom>
-          <a:noFill/>
-          <a:ln/>
-        </p:spPr>
-        <p:txBody>
-          <a:bodyPr wrap="square" lIns="0" tIns="0" rIns="0" bIns="0" rtlCol="0" anchor="ctr"/>
-          <a:lstStyle/>
-          <a:p>
-            <a:pPr indent="0" marL="0">
-              <a:buNone/>
-            </a:pPr>
-            <a:r>
-              <a:rPr lang="en-US" sz="1400" b="1" dirty="0">
                 <a:solidFill>
                   <a:srgbClr val="1C0F07"/>
                 </a:solidFill>
@@ -4184,7 +4184,7 @@
               </a:rPr>
               <a:t>Turn on notifications</a:t>
             </a:r>
-            <a:endParaRPr lang="en-US" sz="1400" dirty="0"/>
+            <a:endParaRPr lang="en-US" sz="1600" dirty="0"/>
           </a:p>
         </p:txBody>
       </p:sp>
@@ -4196,8 +4196,8 @@
         </p:nvSpPr>
         <p:spPr>
           <a:xfrm>
-            <a:off x="1143000" y="4005072"/>
-            <a:ext cx="4114800" cy="274320"/>
+            <a:off x="1207008" y="4151376"/>
+            <a:ext cx="4023360" cy="292608"/>
           </a:xfrm>
           <a:prstGeom prst="rect">
             <a:avLst/>
@@ -4213,7 +4213,7 @@
               <a:buNone/>
             </a:pPr>
             <a:r>
-              <a:rPr lang="en-US" sz="1100" dirty="0">
+              <a:rPr lang="en-US" sz="1300" dirty="0">
                 <a:solidFill>
                   <a:srgbClr val="3D2312"/>
                 </a:solidFill>
@@ -4223,7 +4223,7 @@
               </a:rPr>
               <a:t>Profile → Notifications</a:t>
             </a:r>
-            <a:endParaRPr lang="en-US" sz="1100" dirty="0"/>
+            <a:endParaRPr lang="en-US" sz="1300" dirty="0"/>
           </a:p>
         </p:txBody>
       </p:sp>
@@ -4235,18 +4235,18 @@
         </p:nvSpPr>
         <p:spPr>
           <a:xfrm>
-            <a:off x="5715000" y="868680"/>
-            <a:ext cx="2926080" cy="3566160"/>
+            <a:off x="5623560" y="804672"/>
+            <a:ext cx="3035808" cy="3703320"/>
           </a:xfrm>
           <a:prstGeom prst="roundRect">
             <a:avLst>
-              <a:gd name="adj" fmla="val 3750"/>
+              <a:gd name="adj" fmla="val 3614"/>
             </a:avLst>
           </a:prstGeom>
           <a:solidFill>
             <a:srgbClr val="1C0F07"/>
           </a:solidFill>
-          <a:ln w="15875">
+          <a:ln w="19050">
             <a:solidFill>
               <a:srgbClr val="C9A84C"/>
             </a:solidFill>
@@ -4262,8 +4262,8 @@
         </p:nvSpPr>
         <p:spPr>
           <a:xfrm>
-            <a:off x="5806440" y="1024128"/>
-            <a:ext cx="2743200" cy="292608"/>
+            <a:off x="5715000" y="969264"/>
+            <a:ext cx="2852928" cy="329184"/>
           </a:xfrm>
           <a:prstGeom prst="rect">
             <a:avLst/>
@@ -4279,7 +4279,7 @@
               <a:buNone/>
             </a:pPr>
             <a:r>
-              <a:rPr lang="en-US" sz="1400" b="1" dirty="0">
+              <a:rPr lang="en-US" sz="1700" b="1" dirty="0">
                 <a:solidFill>
                   <a:srgbClr val="C9A84C"/>
                 </a:solidFill>
@@ -4289,7 +4289,7 @@
               </a:rPr>
               <a:t>Scan to join</a:t>
             </a:r>
-            <a:endParaRPr lang="en-US" sz="1400" dirty="0"/>
+            <a:endParaRPr lang="en-US" sz="1700" dirty="0"/>
           </a:p>
         </p:txBody>
       </p:sp>
@@ -4301,12 +4301,12 @@
         </p:nvSpPr>
         <p:spPr>
           <a:xfrm>
-            <a:off x="6355080" y="1417320"/>
-            <a:ext cx="1645920" cy="1645920"/>
+            <a:off x="6254496" y="1408176"/>
+            <a:ext cx="1773936" cy="1773936"/>
           </a:xfrm>
           <a:prstGeom prst="roundRect">
             <a:avLst>
-              <a:gd name="adj" fmla="val 3333"/>
+              <a:gd name="adj" fmla="val 3093"/>
             </a:avLst>
           </a:prstGeom>
           <a:solidFill>
@@ -4336,8 +4336,8 @@
         </p:blipFill>
         <p:spPr>
           <a:xfrm>
-            <a:off x="6428232" y="1490472"/>
-            <a:ext cx="1499616" cy="1499616"/>
+            <a:off x="6336792" y="1490472"/>
+            <a:ext cx="1609344" cy="1609344"/>
           </a:xfrm>
           <a:prstGeom prst="rect">
             <a:avLst/>
@@ -4352,8 +4352,8 @@
         </p:nvSpPr>
         <p:spPr>
           <a:xfrm>
-            <a:off x="5806440" y="3200400"/>
-            <a:ext cx="2743200" cy="274320"/>
+            <a:off x="5715000" y="3310128"/>
+            <a:ext cx="2852928" cy="310896"/>
           </a:xfrm>
           <a:prstGeom prst="rect">
             <a:avLst/>
@@ -4369,7 +4369,7 @@
               <a:buNone/>
             </a:pPr>
             <a:r>
-              <a:rPr lang="en-US" sz="1200" b="1" dirty="0">
+              <a:rPr lang="en-US" sz="1500" b="1" dirty="0">
                 <a:solidFill>
                   <a:srgbClr val="EDD090"/>
                 </a:solidFill>
@@ -4379,7 +4379,7 @@
               </a:rPr>
               <a:t>wetcf.com/register</a:t>
             </a:r>
-            <a:endParaRPr lang="en-US" sz="1200" dirty="0"/>
+            <a:endParaRPr lang="en-US" sz="1500" dirty="0"/>
           </a:p>
         </p:txBody>
       </p:sp>
@@ -4391,8 +4391,8 @@
         </p:nvSpPr>
         <p:spPr>
           <a:xfrm>
-            <a:off x="5852160" y="3547872"/>
-            <a:ext cx="2651760" cy="594360"/>
+            <a:off x="5760720" y="3694176"/>
+            <a:ext cx="2761488" cy="658368"/>
           </a:xfrm>
           <a:prstGeom prst="rect">
             <a:avLst/>
@@ -4408,7 +4408,7 @@
               <a:buNone/>
             </a:pPr>
             <a:r>
-              <a:rPr lang="en-US" sz="1050" i="1" dirty="0">
+              <a:rPr lang="en-US" sz="1300" i="1" dirty="0">
                 <a:solidFill>
                   <a:srgbClr val="FAF7F0"/>
                 </a:solidFill>
@@ -4418,14 +4418,14 @@
               </a:rPr>
               <a:t>No phone with you?</a:t>
             </a:r>
-            <a:endParaRPr lang="en-US" sz="1050" dirty="0"/>
+            <a:endParaRPr lang="en-US" sz="1300" dirty="0"/>
           </a:p>
           <a:p>
             <a:pPr algn="ctr" indent="0" marL="0">
               <a:buNone/>
             </a:pPr>
             <a:r>
-              <a:rPr lang="en-US" sz="1050" i="1" dirty="0">
+              <a:rPr lang="en-US" sz="1300" i="1" dirty="0">
                 <a:solidFill>
                   <a:srgbClr val="FAF7F0"/>
                 </a:solidFill>
@@ -4433,9 +4433,9 @@
                 <a:ea typeface="Calibri" pitchFamily="34" charset="-122"/>
                 <a:cs typeface="Calibri" pitchFamily="34" charset="-120"/>
               </a:rPr>
-              <a:t>Speak to any of our leaders.</a:t>
-            </a:r>
-            <a:endParaRPr lang="en-US" sz="1050" dirty="0"/>
+              <a:t>Speak to one of our leaders.</a:t>
+            </a:r>
+            <a:endParaRPr lang="en-US" sz="1300" dirty="0"/>
           </a:p>
         </p:txBody>
       </p:sp>
@@ -4480,7 +4480,7 @@
         <p:spPr>
           <a:xfrm>
             <a:off x="457200" y="274320"/>
-            <a:ext cx="8229600" cy="566928"/>
+            <a:ext cx="8229600" cy="603504"/>
           </a:xfrm>
           <a:prstGeom prst="rect">
             <a:avLst/>
@@ -4496,7 +4496,7 @@
               <a:buNone/>
             </a:pPr>
             <a:r>
-              <a:rPr lang="en-US" sz="3200" b="1" dirty="0">
+              <a:rPr lang="en-US" sz="3400" b="1" dirty="0">
                 <a:solidFill>
                   <a:srgbClr val="1C0F07"/>
                 </a:solidFill>
@@ -4506,7 +4506,7 @@
               </a:rPr>
               <a:t>Find Us Online</a:t>
             </a:r>
-            <a:endParaRPr lang="en-US" sz="3200" dirty="0"/>
+            <a:endParaRPr lang="en-US" sz="3400" dirty="0"/>
           </a:p>
         </p:txBody>
       </p:sp>
@@ -4518,8 +4518,8 @@
         </p:nvSpPr>
         <p:spPr>
           <a:xfrm>
-            <a:off x="457200" y="804672"/>
-            <a:ext cx="8229600" cy="347472"/>
+            <a:off x="457200" y="841248"/>
+            <a:ext cx="8229600" cy="365760"/>
           </a:xfrm>
           <a:prstGeom prst="rect">
             <a:avLst/>
@@ -4535,14 +4535,14 @@
               <a:buNone/>
             </a:pPr>
             <a:r>
-              <a:rPr lang="en-US" sz="1700" dirty="0">
+              <a:rPr lang="en-US" sz="1900" dirty="0">
                 <a:solidFill>
                   <a:srgbClr val="7A5535"/>
                 </a:solidFill>
               </a:rPr>
               <a:t>በኦንላይን ያግኙን</a:t>
             </a:r>
-            <a:endParaRPr lang="en-US" sz="1700" dirty="0"/>
+            <a:endParaRPr lang="en-US" sz="1900" dirty="0"/>
           </a:p>
         </p:txBody>
       </p:sp>
@@ -4554,18 +4554,18 @@
         </p:nvSpPr>
         <p:spPr>
           <a:xfrm>
-            <a:off x="502920" y="1600200"/>
-            <a:ext cx="2560320" cy="2286000"/>
+            <a:off x="475488" y="1627632"/>
+            <a:ext cx="2606040" cy="2286000"/>
           </a:xfrm>
           <a:prstGeom prst="roundRect">
             <a:avLst>
-              <a:gd name="adj" fmla="val 4000"/>
+              <a:gd name="adj" fmla="val 4400"/>
             </a:avLst>
           </a:prstGeom>
           <a:solidFill>
             <a:srgbClr val="FFFFFF"/>
           </a:solidFill>
-          <a:ln w="15875">
+          <a:ln w="19050">
             <a:solidFill>
               <a:srgbClr val="C9A84C"/>
             </a:solidFill>
@@ -4588,8 +4588,8 @@
         </p:nvSpPr>
         <p:spPr>
           <a:xfrm>
-            <a:off x="1481328" y="1856232"/>
-            <a:ext cx="603504" cy="603504"/>
+            <a:off x="1376172" y="1883664"/>
+            <a:ext cx="804672" cy="804672"/>
           </a:xfrm>
           <a:prstGeom prst="ellipse">
             <a:avLst/>
@@ -4621,8 +4621,8 @@
         </p:blipFill>
         <p:spPr>
           <a:xfrm>
-            <a:off x="1583924" y="1958828"/>
-            <a:ext cx="398313" cy="398313"/>
+            <a:off x="1529060" y="2036552"/>
+            <a:ext cx="498897" cy="498897"/>
           </a:xfrm>
           <a:prstGeom prst="rect">
             <a:avLst/>
@@ -4637,8 +4637,8 @@
         </p:nvSpPr>
         <p:spPr>
           <a:xfrm>
-            <a:off x="594360" y="2606040"/>
-            <a:ext cx="2377440" cy="457200"/>
+            <a:off x="548640" y="2816352"/>
+            <a:ext cx="2459736" cy="347472"/>
           </a:xfrm>
           <a:prstGeom prst="rect">
             <a:avLst/>
@@ -4654,7 +4654,7 @@
               <a:buNone/>
             </a:pPr>
             <a:r>
-              <a:rPr lang="en-US" sz="1200" b="1" dirty="0">
+              <a:rPr lang="en-US" sz="1700" b="1" dirty="0">
                 <a:solidFill>
                   <a:srgbClr val="1C0F07"/>
                 </a:solidFill>
@@ -4664,7 +4664,7 @@
               </a:rPr>
               <a:t>wetcf.com</a:t>
             </a:r>
-            <a:endParaRPr lang="en-US" sz="1200" dirty="0"/>
+            <a:endParaRPr lang="en-US" sz="1700" dirty="0"/>
           </a:p>
         </p:txBody>
       </p:sp>
@@ -4676,8 +4676,8 @@
         </p:nvSpPr>
         <p:spPr>
           <a:xfrm>
-            <a:off x="640080" y="3081528"/>
-            <a:ext cx="2286000" cy="640080"/>
+            <a:off x="585216" y="3200400"/>
+            <a:ext cx="2386584" cy="548640"/>
           </a:xfrm>
           <a:prstGeom prst="rect">
             <a:avLst/>
@@ -4693,7 +4693,7 @@
               <a:buNone/>
             </a:pPr>
             <a:r>
-              <a:rPr lang="en-US" sz="1050" dirty="0">
+              <a:rPr lang="en-US" sz="1300" dirty="0">
                 <a:solidFill>
                   <a:srgbClr val="3D2312"/>
                 </a:solidFill>
@@ -4703,7 +4703,7 @@
               </a:rPr>
               <a:t>Our website — share it with anyone</a:t>
             </a:r>
-            <a:endParaRPr lang="en-US" sz="1050" dirty="0"/>
+            <a:endParaRPr lang="en-US" sz="1300" dirty="0"/>
           </a:p>
         </p:txBody>
       </p:sp>
@@ -4715,18 +4715,18 @@
         </p:nvSpPr>
         <p:spPr>
           <a:xfrm>
-            <a:off x="3268980" y="1600200"/>
-            <a:ext cx="2560320" cy="2286000"/>
+            <a:off x="3255264" y="1627632"/>
+            <a:ext cx="2606040" cy="2286000"/>
           </a:xfrm>
           <a:prstGeom prst="roundRect">
             <a:avLst>
-              <a:gd name="adj" fmla="val 4000"/>
+              <a:gd name="adj" fmla="val 4400"/>
             </a:avLst>
           </a:prstGeom>
           <a:solidFill>
             <a:srgbClr val="FFFFFF"/>
           </a:solidFill>
-          <a:ln w="15875">
+          <a:ln w="19050">
             <a:solidFill>
               <a:srgbClr val="C9A84C"/>
             </a:solidFill>
@@ -4749,8 +4749,8 @@
         </p:nvSpPr>
         <p:spPr>
           <a:xfrm>
-            <a:off x="4247388" y="1856232"/>
-            <a:ext cx="603504" cy="603504"/>
+            <a:off x="4155948" y="1883664"/>
+            <a:ext cx="804672" cy="804672"/>
           </a:xfrm>
           <a:prstGeom prst="ellipse">
             <a:avLst/>
@@ -4782,8 +4782,8 @@
         </p:blipFill>
         <p:spPr>
           <a:xfrm>
-            <a:off x="4349984" y="1958828"/>
-            <a:ext cx="398313" cy="398313"/>
+            <a:off x="4308836" y="2036552"/>
+            <a:ext cx="498897" cy="498897"/>
           </a:xfrm>
           <a:prstGeom prst="rect">
             <a:avLst/>
@@ -4798,8 +4798,8 @@
         </p:nvSpPr>
         <p:spPr>
           <a:xfrm>
-            <a:off x="3360420" y="2606040"/>
-            <a:ext cx="2377440" cy="457200"/>
+            <a:off x="3328416" y="2816352"/>
+            <a:ext cx="2459736" cy="347472"/>
           </a:xfrm>
           <a:prstGeom prst="rect">
             <a:avLst/>
@@ -4815,7 +4815,7 @@
               <a:buNone/>
             </a:pPr>
             <a:r>
-              <a:rPr lang="en-US" sz="1200" b="1" dirty="0">
+              <a:rPr lang="en-US" sz="1700" b="1" dirty="0">
                 <a:solidFill>
                   <a:srgbClr val="1C0F07"/>
                 </a:solidFill>
@@ -4823,9 +4823,9 @@
                 <a:ea typeface="Calibri" pitchFamily="34" charset="-122"/>
                 <a:cs typeface="Calibri" pitchFamily="34" charset="-120"/>
               </a:rPr>
-              <a:t>@warsawethiopianfellowship</a:t>
-            </a:r>
-            <a:endParaRPr lang="en-US" sz="1200" dirty="0"/>
+              <a:t>YouTube</a:t>
+            </a:r>
+            <a:endParaRPr lang="en-US" sz="1700" dirty="0"/>
           </a:p>
         </p:txBody>
       </p:sp>
@@ -4837,8 +4837,8 @@
         </p:nvSpPr>
         <p:spPr>
           <a:xfrm>
-            <a:off x="3406140" y="3081528"/>
-            <a:ext cx="2286000" cy="640080"/>
+            <a:off x="3364992" y="3200400"/>
+            <a:ext cx="2386584" cy="548640"/>
           </a:xfrm>
           <a:prstGeom prst="rect">
             <a:avLst/>
@@ -4854,7 +4854,7 @@
               <a:buNone/>
             </a:pPr>
             <a:r>
-              <a:rPr lang="en-US" sz="1050" dirty="0">
+              <a:rPr lang="en-US" sz="1300" dirty="0">
                 <a:solidFill>
                   <a:srgbClr val="3D2312"/>
                 </a:solidFill>
@@ -4862,9 +4862,9 @@
                 <a:ea typeface="Calibri" pitchFamily="34" charset="-122"/>
                 <a:cs typeface="Calibri" pitchFamily="34" charset="-120"/>
               </a:rPr>
-              <a:t>Teaching and worship on YouTube</a:t>
-            </a:r>
-            <a:endParaRPr lang="en-US" sz="1050" dirty="0"/>
+              <a:t>@warsawethiopianfellowship</a:t>
+            </a:r>
+            <a:endParaRPr lang="en-US" sz="1300" dirty="0"/>
           </a:p>
         </p:txBody>
       </p:sp>
@@ -4876,18 +4876,18 @@
         </p:nvSpPr>
         <p:spPr>
           <a:xfrm>
-            <a:off x="6035040" y="1600200"/>
-            <a:ext cx="2560320" cy="2286000"/>
+            <a:off x="6035040" y="1627632"/>
+            <a:ext cx="2606040" cy="2286000"/>
           </a:xfrm>
           <a:prstGeom prst="roundRect">
             <a:avLst>
-              <a:gd name="adj" fmla="val 4000"/>
+              <a:gd name="adj" fmla="val 4400"/>
             </a:avLst>
           </a:prstGeom>
           <a:solidFill>
             <a:srgbClr val="FFFFFF"/>
           </a:solidFill>
-          <a:ln w="15875">
+          <a:ln w="19050">
             <a:solidFill>
               <a:srgbClr val="C9A84C"/>
             </a:solidFill>
@@ -4910,8 +4910,8 @@
         </p:nvSpPr>
         <p:spPr>
           <a:xfrm>
-            <a:off x="7013448" y="1856232"/>
-            <a:ext cx="603504" cy="603504"/>
+            <a:off x="6935724" y="1883664"/>
+            <a:ext cx="804672" cy="804672"/>
           </a:xfrm>
           <a:prstGeom prst="ellipse">
             <a:avLst/>
@@ -4943,8 +4943,8 @@
         </p:blipFill>
         <p:spPr>
           <a:xfrm>
-            <a:off x="7116044" y="1958828"/>
-            <a:ext cx="398313" cy="398313"/>
+            <a:off x="7088612" y="2036552"/>
+            <a:ext cx="498897" cy="498897"/>
           </a:xfrm>
           <a:prstGeom prst="rect">
             <a:avLst/>
@@ -4959,8 +4959,8 @@
         </p:nvSpPr>
         <p:spPr>
           <a:xfrm>
-            <a:off x="6126480" y="2606040"/>
-            <a:ext cx="2377440" cy="457200"/>
+            <a:off x="6108192" y="2816352"/>
+            <a:ext cx="2459736" cy="347472"/>
           </a:xfrm>
           <a:prstGeom prst="rect">
             <a:avLst/>
@@ -4976,7 +4976,7 @@
               <a:buNone/>
             </a:pPr>
             <a:r>
-              <a:rPr lang="en-US" sz="1200" b="1" dirty="0">
+              <a:rPr lang="en-US" sz="1700" b="1" dirty="0">
                 <a:solidFill>
                   <a:srgbClr val="1C0F07"/>
                 </a:solidFill>
@@ -4984,9 +4984,9 @@
                 <a:ea typeface="Calibri" pitchFamily="34" charset="-122"/>
                 <a:cs typeface="Calibri" pitchFamily="34" charset="-120"/>
               </a:rPr>
-              <a:t>@warsaw_fellowship</a:t>
-            </a:r>
-            <a:endParaRPr lang="en-US" sz="1200" dirty="0"/>
+              <a:t>Instagram</a:t>
+            </a:r>
+            <a:endParaRPr lang="en-US" sz="1700" dirty="0"/>
           </a:p>
         </p:txBody>
       </p:sp>
@@ -4998,8 +4998,8 @@
         </p:nvSpPr>
         <p:spPr>
           <a:xfrm>
-            <a:off x="6172200" y="3081528"/>
-            <a:ext cx="2286000" cy="640080"/>
+            <a:off x="6144768" y="3200400"/>
+            <a:ext cx="2386584" cy="548640"/>
           </a:xfrm>
           <a:prstGeom prst="rect">
             <a:avLst/>
@@ -5015,7 +5015,7 @@
               <a:buNone/>
             </a:pPr>
             <a:r>
-              <a:rPr lang="en-US" sz="1050" dirty="0">
+              <a:rPr lang="en-US" sz="1300" dirty="0">
                 <a:solidFill>
                   <a:srgbClr val="3D2312"/>
                 </a:solidFill>
@@ -5023,9 +5023,9 @@
                 <a:ea typeface="Calibri" pitchFamily="34" charset="-122"/>
                 <a:cs typeface="Calibri" pitchFamily="34" charset="-120"/>
               </a:rPr>
-              <a:t>Life of the fellowship on Instagram</a:t>
-            </a:r>
-            <a:endParaRPr lang="en-US" sz="1050" dirty="0"/>
+              <a:t>@warsaw_fellowship</a:t>
+            </a:r>
+            <a:endParaRPr lang="en-US" sz="1300" dirty="0"/>
           </a:p>
         </p:txBody>
       </p:sp>
@@ -5037,8 +5037,8 @@
         </p:nvSpPr>
         <p:spPr>
           <a:xfrm>
-            <a:off x="457200" y="4224528"/>
-            <a:ext cx="8229600" cy="292608"/>
+            <a:off x="457200" y="4206240"/>
+            <a:ext cx="8229600" cy="310896"/>
           </a:xfrm>
           <a:prstGeom prst="rect">
             <a:avLst/>
@@ -5054,14 +5054,14 @@
               <a:buNone/>
             </a:pPr>
             <a:r>
-              <a:rPr lang="en-US" sz="1200" i="1" dirty="0">
+              <a:rPr lang="en-US" sz="1500" i="1" dirty="0">
                 <a:solidFill>
                   <a:srgbClr val="7A5535"/>
                 </a:solidFill>
               </a:rPr>
               <a:t>Invite someone this week · በዚህ ሳምንት አንድ ሰው ይጋብዙ</a:t>
             </a:r>
-            <a:endParaRPr lang="en-US" sz="1200" dirty="0"/>
+            <a:endParaRPr lang="en-US" sz="1500" dirty="0"/>
           </a:p>
         </p:txBody>
       </p:sp>
@@ -5113,8 +5113,8 @@
         </p:blipFill>
         <p:spPr>
           <a:xfrm>
-            <a:off x="4160520" y="274320"/>
-            <a:ext cx="822960" cy="822960"/>
+            <a:off x="4114800" y="237744"/>
+            <a:ext cx="914400" cy="914400"/>
           </a:xfrm>
           <a:prstGeom prst="rect">
             <a:avLst/>
@@ -5129,8 +5129,8 @@
         </p:nvSpPr>
         <p:spPr>
           <a:xfrm>
-            <a:off x="1463040" y="1261872"/>
-            <a:ext cx="6217920" cy="32004"/>
+            <a:off x="1371600" y="1298448"/>
+            <a:ext cx="6400800" cy="36576"/>
           </a:xfrm>
           <a:prstGeom prst="rect">
             <a:avLst/>
@@ -5154,8 +5154,8 @@
         </p:nvSpPr>
         <p:spPr>
           <a:xfrm>
-            <a:off x="548640" y="1417320"/>
-            <a:ext cx="8046720" cy="1051560"/>
+            <a:off x="548640" y="1463040"/>
+            <a:ext cx="8046720" cy="1005840"/>
           </a:xfrm>
           <a:prstGeom prst="rect">
             <a:avLst/>
@@ -5171,7 +5171,7 @@
               <a:buNone/>
             </a:pPr>
             <a:r>
-              <a:rPr lang="en-US" sz="1400" i="1" dirty="0">
+              <a:rPr lang="en-US" sz="1600" i="1" dirty="0">
                 <a:solidFill>
                   <a:srgbClr val="FAF7F0"/>
                 </a:solidFill>
@@ -5179,16 +5179,16 @@
                 <a:ea typeface="Cambria" pitchFamily="34" charset="-122"/>
                 <a:cs typeface="Cambria" pitchFamily="34" charset="-120"/>
               </a:rPr>
-              <a:t>"And let us consider how we may spur one another on toward love and good deeds,</a:t>
-            </a:r>
-            <a:endParaRPr lang="en-US" sz="1400" dirty="0"/>
+              <a:t>"And let us consider how we may spur one another on</a:t>
+            </a:r>
+            <a:endParaRPr lang="en-US" sz="1600" dirty="0"/>
           </a:p>
           <a:p>
             <a:pPr algn="ctr" indent="0" marL="0">
               <a:buNone/>
             </a:pPr>
             <a:r>
-              <a:rPr lang="en-US" sz="1400" i="1" dirty="0">
+              <a:rPr lang="en-US" sz="1600" i="1" dirty="0">
                 <a:solidFill>
                   <a:srgbClr val="FAF7F0"/>
                 </a:solidFill>
@@ -5196,16 +5196,16 @@
                 <a:ea typeface="Cambria" pitchFamily="34" charset="-122"/>
                 <a:cs typeface="Cambria" pitchFamily="34" charset="-120"/>
               </a:rPr>
-              <a:t>not giving up meeting together, as some are in the habit of doing,</a:t>
-            </a:r>
-            <a:endParaRPr lang="en-US" sz="1400" dirty="0"/>
+              <a:t>toward love and good deeds, not giving up meeting together,</a:t>
+            </a:r>
+            <a:endParaRPr lang="en-US" sz="1600" dirty="0"/>
           </a:p>
           <a:p>
             <a:pPr algn="ctr" indent="0" marL="0">
               <a:buNone/>
             </a:pPr>
             <a:r>
-              <a:rPr lang="en-US" sz="1400" i="1" dirty="0">
+              <a:rPr lang="en-US" sz="1600" i="1" dirty="0">
                 <a:solidFill>
                   <a:srgbClr val="FAF7F0"/>
                 </a:solidFill>
@@ -5215,7 +5215,7 @@
               </a:rPr>
               <a:t>but encouraging one another."</a:t>
             </a:r>
-            <a:endParaRPr lang="en-US" sz="1400" dirty="0"/>
+            <a:endParaRPr lang="en-US" sz="1600" dirty="0"/>
           </a:p>
         </p:txBody>
       </p:sp>
@@ -5227,8 +5227,8 @@
         </p:nvSpPr>
         <p:spPr>
           <a:xfrm>
-            <a:off x="548640" y="2450592"/>
-            <a:ext cx="8046720" cy="274320"/>
+            <a:off x="548640" y="2468880"/>
+            <a:ext cx="8046720" cy="292608"/>
           </a:xfrm>
           <a:prstGeom prst="rect">
             <a:avLst/>
@@ -5244,7 +5244,7 @@
               <a:buNone/>
             </a:pPr>
             <a:r>
-              <a:rPr lang="en-US" sz="1150" b="1" dirty="0">
+              <a:rPr lang="en-US" sz="1350" b="1" dirty="0">
                 <a:solidFill>
                   <a:srgbClr val="C9A84C"/>
                 </a:solidFill>
@@ -5254,7 +5254,7 @@
               </a:rPr>
               <a:t>Hebrews 10:24–25</a:t>
             </a:r>
-            <a:endParaRPr lang="en-US" sz="1150" dirty="0"/>
+            <a:endParaRPr lang="en-US" sz="1350" dirty="0"/>
           </a:p>
         </p:txBody>
       </p:sp>
@@ -5266,8 +5266,8 @@
         </p:nvSpPr>
         <p:spPr>
           <a:xfrm>
-            <a:off x="548640" y="2852928"/>
-            <a:ext cx="8046720" cy="841248"/>
+            <a:off x="548640" y="2889504"/>
+            <a:ext cx="8046720" cy="804672"/>
           </a:xfrm>
           <a:prstGeom prst="rect">
             <a:avLst/>
@@ -5283,28 +5283,28 @@
               <a:buNone/>
             </a:pPr>
             <a:r>
-              <a:rPr lang="en-US" sz="1400" i="1" dirty="0">
+              <a:rPr lang="en-US" sz="1600" i="1" dirty="0">
                 <a:solidFill>
                   <a:srgbClr val="FAF7F0"/>
                 </a:solidFill>
               </a:rPr>
               <a:t>"እርስ በርሳችን ፍቅርን እና መልካም ሥራን ለማነሳሳት እንተጋ፤</a:t>
             </a:r>
-            <a:endParaRPr lang="en-US" sz="1400" dirty="0"/>
+            <a:endParaRPr lang="en-US" sz="1600" dirty="0"/>
           </a:p>
           <a:p>
             <a:pPr algn="ctr" indent="0" marL="0">
               <a:buNone/>
             </a:pPr>
             <a:r>
-              <a:rPr lang="en-US" sz="1400" i="1" dirty="0">
+              <a:rPr lang="en-US" sz="1600" i="1" dirty="0">
                 <a:solidFill>
                   <a:srgbClr val="FAF7F0"/>
                 </a:solidFill>
               </a:rPr>
-              <a:t>እንደ አንዳንዶች ልማድ መሰብሰብን ሳንተው እርስ በርሳችን እናበረታታ።"</a:t>
-            </a:r>
-            <a:endParaRPr lang="en-US" sz="1400" dirty="0"/>
+              <a:t>መሰብሰብን ሳንተው እርስ በርሳችን እናበረታታ።"</a:t>
+            </a:r>
+            <a:endParaRPr lang="en-US" sz="1600" dirty="0"/>
           </a:p>
         </p:txBody>
       </p:sp>
@@ -5317,7 +5317,7 @@
         <p:spPr>
           <a:xfrm>
             <a:off x="548640" y="3657600"/>
-            <a:ext cx="8046720" cy="274320"/>
+            <a:ext cx="8046720" cy="292608"/>
           </a:xfrm>
           <a:prstGeom prst="rect">
             <a:avLst/>
@@ -5333,14 +5333,14 @@
               <a:buNone/>
             </a:pPr>
             <a:r>
-              <a:rPr lang="en-US" sz="1150" b="1" dirty="0">
+              <a:rPr lang="en-US" sz="1350" b="1" dirty="0">
                 <a:solidFill>
                   <a:srgbClr val="C9A84C"/>
                 </a:solidFill>
               </a:rPr>
               <a:t>ዕብራውያን 10:24–25</a:t>
             </a:r>
-            <a:endParaRPr lang="en-US" sz="1150" dirty="0"/>
+            <a:endParaRPr lang="en-US" sz="1350" dirty="0"/>
           </a:p>
         </p:txBody>
       </p:sp>
@@ -5352,8 +5352,8 @@
         </p:nvSpPr>
         <p:spPr>
           <a:xfrm>
-            <a:off x="1463040" y="4069080"/>
-            <a:ext cx="6217920" cy="32004"/>
+            <a:off x="1371600" y="4078224"/>
+            <a:ext cx="6400800" cy="36576"/>
           </a:xfrm>
           <a:prstGeom prst="rect">
             <a:avLst/>
@@ -5378,7 +5378,7 @@
         <p:spPr>
           <a:xfrm>
             <a:off x="0" y="4224528"/>
-            <a:ext cx="9144000" cy="292608"/>
+            <a:ext cx="9144000" cy="310896"/>
           </a:xfrm>
           <a:prstGeom prst="rect">
             <a:avLst/>
@@ -5394,7 +5394,7 @@
               <a:buNone/>
             </a:pPr>
             <a:r>
-              <a:rPr lang="en-US" sz="1300" b="1" dirty="0">
+              <a:rPr lang="en-US" sz="1500" b="1" dirty="0">
                 <a:solidFill>
                   <a:srgbClr val="C9A84C"/>
                 </a:solidFill>
@@ -5404,43 +5404,43 @@
               </a:rPr>
               <a:t>wetcf.com</a:t>
             </a:r>
+            <a:endParaRPr lang="en-US" sz="1500" dirty="0"/>
+          </a:p>
+        </p:txBody>
+      </p:sp>
+      <p:sp>
+        <p:nvSpPr>
+          <p:cNvPr id="10" name="Text 7"/>
+          <p:cNvSpPr txBox="1"/>
+          <p:nvPr/>
+        </p:nvSpPr>
+        <p:spPr>
+          <a:xfrm>
+            <a:off x="0" y="4553712"/>
+            <a:ext cx="9144000" cy="292608"/>
+          </a:xfrm>
+          <a:prstGeom prst="rect">
+            <a:avLst/>
+          </a:prstGeom>
+          <a:noFill/>
+          <a:ln/>
+        </p:spPr>
+        <p:txBody>
+          <a:bodyPr wrap="square" lIns="0" tIns="0" rIns="0" bIns="0" rtlCol="0" anchor="ctr"/>
+          <a:lstStyle/>
+          <a:p>
+            <a:pPr algn="ctr" indent="0" marL="0">
+              <a:buNone/>
+            </a:pPr>
+            <a:r>
+              <a:rPr lang="en-US" sz="1300" dirty="0">
+                <a:solidFill>
+                  <a:srgbClr val="C4A882"/>
+                </a:solidFill>
+              </a:rPr>
+              <a:t>Thank you · እናመሰግናለን</a:t>
+            </a:r>
             <a:endParaRPr lang="en-US" sz="1300" dirty="0"/>
-          </a:p>
-        </p:txBody>
-      </p:sp>
-      <p:sp>
-        <p:nvSpPr>
-          <p:cNvPr id="10" name="Text 7"/>
-          <p:cNvSpPr txBox="1"/>
-          <p:nvPr/>
-        </p:nvSpPr>
-        <p:spPr>
-          <a:xfrm>
-            <a:off x="0" y="4535424"/>
-            <a:ext cx="9144000" cy="274320"/>
-          </a:xfrm>
-          <a:prstGeom prst="rect">
-            <a:avLst/>
-          </a:prstGeom>
-          <a:noFill/>
-          <a:ln/>
-        </p:spPr>
-        <p:txBody>
-          <a:bodyPr wrap="square" lIns="0" tIns="0" rIns="0" bIns="0" rtlCol="0" anchor="ctr"/>
-          <a:lstStyle/>
-          <a:p>
-            <a:pPr algn="ctr" indent="0" marL="0">
-              <a:buNone/>
-            </a:pPr>
-            <a:r>
-              <a:rPr lang="en-US" sz="1100" dirty="0">
-                <a:solidFill>
-                  <a:srgbClr val="C4A882"/>
-                </a:solidFill>
-              </a:rPr>
-              <a:t>Thank you · እናመሰግናለን</a:t>
-            </a:r>
-            <a:endParaRPr lang="en-US" sz="1100" dirty="0"/>
           </a:p>
         </p:txBody>
       </p:sp>
@@ -5485,7 +5485,7 @@
         <p:spPr>
           <a:xfrm>
             <a:off x="502920" y="274320"/>
-            <a:ext cx="8138160" cy="566928"/>
+            <a:ext cx="8138160" cy="603504"/>
           </a:xfrm>
           <a:prstGeom prst="rect">
             <a:avLst/>
@@ -5501,7 +5501,7 @@
               <a:buNone/>
             </a:pPr>
             <a:r>
-              <a:rPr lang="en-US" sz="3200" b="1" dirty="0">
+              <a:rPr lang="en-US" sz="3400" b="1" dirty="0">
                 <a:solidFill>
                   <a:srgbClr val="1C0F07"/>
                 </a:solidFill>
@@ -5511,7 +5511,7 @@
               </a:rPr>
               <a:t>Three Things, Launching Today</a:t>
             </a:r>
-            <a:endParaRPr lang="en-US" sz="3200" dirty="0"/>
+            <a:endParaRPr lang="en-US" sz="3400" dirty="0"/>
           </a:p>
         </p:txBody>
       </p:sp>
@@ -5523,8 +5523,8 @@
         </p:nvSpPr>
         <p:spPr>
           <a:xfrm>
-            <a:off x="502920" y="804672"/>
-            <a:ext cx="8138160" cy="347472"/>
+            <a:off x="502920" y="841248"/>
+            <a:ext cx="8138160" cy="365760"/>
           </a:xfrm>
           <a:prstGeom prst="rect">
             <a:avLst/>
@@ -5540,14 +5540,14 @@
               <a:buNone/>
             </a:pPr>
             <a:r>
-              <a:rPr lang="en-US" sz="1700" dirty="0">
+              <a:rPr lang="en-US" sz="1900" dirty="0">
                 <a:solidFill>
                   <a:srgbClr val="7A5535"/>
                 </a:solidFill>
               </a:rPr>
               <a:t>ዛሬ የሚጀምሩ ሦስት ነገሮች</a:t>
             </a:r>
-            <a:endParaRPr lang="en-US" sz="1700" dirty="0"/>
+            <a:endParaRPr lang="en-US" sz="1900" dirty="0"/>
           </a:p>
         </p:txBody>
       </p:sp>
@@ -5559,18 +5559,18 @@
         </p:nvSpPr>
         <p:spPr>
           <a:xfrm>
-            <a:off x="502920" y="1481328"/>
-            <a:ext cx="2560320" cy="2880360"/>
+            <a:off x="475488" y="1481328"/>
+            <a:ext cx="2606040" cy="2926080"/>
           </a:xfrm>
           <a:prstGeom prst="roundRect">
             <a:avLst>
-              <a:gd name="adj" fmla="val 3571"/>
+              <a:gd name="adj" fmla="val 3860"/>
             </a:avLst>
           </a:prstGeom>
           <a:solidFill>
             <a:srgbClr val="FFFFFF"/>
           </a:solidFill>
-          <a:ln w="15875">
+          <a:ln w="19050">
             <a:solidFill>
               <a:srgbClr val="C9A84C"/>
             </a:solidFill>
@@ -5593,8 +5593,8 @@
         </p:nvSpPr>
         <p:spPr>
           <a:xfrm>
-            <a:off x="1463040" y="1709928"/>
-            <a:ext cx="640080" cy="640080"/>
+            <a:off x="1348740" y="1719072"/>
+            <a:ext cx="859536" cy="859536"/>
           </a:xfrm>
           <a:prstGeom prst="ellipse">
             <a:avLst/>
@@ -5626,8 +5626,8 @@
         </p:blipFill>
         <p:spPr>
           <a:xfrm>
-            <a:off x="1571854" y="1818742"/>
-            <a:ext cx="422453" cy="422453"/>
+            <a:off x="1512052" y="1882384"/>
+            <a:ext cx="532912" cy="532912"/>
           </a:xfrm>
           <a:prstGeom prst="rect">
             <a:avLst/>
@@ -5642,8 +5642,8 @@
         </p:nvSpPr>
         <p:spPr>
           <a:xfrm>
-            <a:off x="594360" y="2468880"/>
-            <a:ext cx="2377440" cy="329184"/>
+            <a:off x="548640" y="2688336"/>
+            <a:ext cx="2459736" cy="365760"/>
           </a:xfrm>
           <a:prstGeom prst="rect">
             <a:avLst/>
@@ -5659,7 +5659,7 @@
               <a:buNone/>
             </a:pPr>
             <a:r>
-              <a:rPr lang="en-US" sz="1600" b="1" dirty="0">
+              <a:rPr lang="en-US" sz="1700" b="1" dirty="0">
                 <a:solidFill>
                   <a:srgbClr val="1C0F07"/>
                 </a:solidFill>
@@ -5669,7 +5669,7 @@
               </a:rPr>
               <a:t>Our Website</a:t>
             </a:r>
-            <a:endParaRPr lang="en-US" sz="1600" dirty="0"/>
+            <a:endParaRPr lang="en-US" sz="1700" dirty="0"/>
           </a:p>
         </p:txBody>
       </p:sp>
@@ -5681,8 +5681,8 @@
         </p:nvSpPr>
         <p:spPr>
           <a:xfrm>
-            <a:off x="594360" y="2788920"/>
-            <a:ext cx="2377440" cy="292608"/>
+            <a:off x="548640" y="3054096"/>
+            <a:ext cx="2459736" cy="329184"/>
           </a:xfrm>
           <a:prstGeom prst="rect">
             <a:avLst/>
@@ -5698,14 +5698,14 @@
               <a:buNone/>
             </a:pPr>
             <a:r>
-              <a:rPr lang="en-US" sz="1300" dirty="0">
+              <a:rPr lang="en-US" sz="1400" dirty="0">
                 <a:solidFill>
                   <a:srgbClr val="7A5535"/>
                 </a:solidFill>
               </a:rPr>
               <a:t>ድረ-ገጻችን</a:t>
             </a:r>
-            <a:endParaRPr lang="en-US" sz="1300" dirty="0"/>
+            <a:endParaRPr lang="en-US" sz="1400" dirty="0"/>
           </a:p>
         </p:txBody>
       </p:sp>
@@ -5717,8 +5717,8 @@
         </p:nvSpPr>
         <p:spPr>
           <a:xfrm>
-            <a:off x="640080" y="3172968"/>
-            <a:ext cx="2286000" cy="1188720"/>
+            <a:off x="621792" y="3438144"/>
+            <a:ext cx="2313432" cy="868680"/>
           </a:xfrm>
           <a:prstGeom prst="rect">
             <a:avLst/>
@@ -5734,7 +5734,7 @@
               <a:buNone/>
             </a:pPr>
             <a:r>
-              <a:rPr lang="en-US" sz="1150" dirty="0">
+              <a:rPr lang="en-US" sz="1350" dirty="0">
                 <a:solidFill>
                   <a:srgbClr val="3D2312"/>
                 </a:solidFill>
@@ -5742,9 +5742,9 @@
                 <a:ea typeface="Calibri" pitchFamily="34" charset="-122"/>
                 <a:cs typeface="Calibri" pitchFamily="34" charset="-120"/>
               </a:rPr>
-              <a:t>A public home at wetcf.com — who we are, what we believe, when and where we meet.</a:t>
-            </a:r>
-            <a:endParaRPr lang="en-US" sz="1150" dirty="0"/>
+              <a:t>A public home at wetcf.com — who we are and when we meet.</a:t>
+            </a:r>
+            <a:endParaRPr lang="en-US" sz="1350" dirty="0"/>
           </a:p>
         </p:txBody>
       </p:sp>
@@ -5756,18 +5756,18 @@
         </p:nvSpPr>
         <p:spPr>
           <a:xfrm>
-            <a:off x="3268980" y="1481328"/>
-            <a:ext cx="2560320" cy="2880360"/>
+            <a:off x="3255264" y="1481328"/>
+            <a:ext cx="2606040" cy="2926080"/>
           </a:xfrm>
           <a:prstGeom prst="roundRect">
             <a:avLst>
-              <a:gd name="adj" fmla="val 3571"/>
+              <a:gd name="adj" fmla="val 3860"/>
             </a:avLst>
           </a:prstGeom>
           <a:solidFill>
             <a:srgbClr val="FFFFFF"/>
           </a:solidFill>
-          <a:ln w="15875">
+          <a:ln w="19050">
             <a:solidFill>
               <a:srgbClr val="C9A84C"/>
             </a:solidFill>
@@ -5790,8 +5790,8 @@
         </p:nvSpPr>
         <p:spPr>
           <a:xfrm>
-            <a:off x="4229100" y="1709928"/>
-            <a:ext cx="640080" cy="640080"/>
+            <a:off x="4128516" y="1719072"/>
+            <a:ext cx="859536" cy="859536"/>
           </a:xfrm>
           <a:prstGeom prst="ellipse">
             <a:avLst/>
@@ -5823,8 +5823,8 @@
         </p:blipFill>
         <p:spPr>
           <a:xfrm>
-            <a:off x="4337914" y="1818742"/>
-            <a:ext cx="422453" cy="422453"/>
+            <a:off x="4291828" y="1882384"/>
+            <a:ext cx="532912" cy="532912"/>
           </a:xfrm>
           <a:prstGeom prst="rect">
             <a:avLst/>
@@ -5839,8 +5839,8 @@
         </p:nvSpPr>
         <p:spPr>
           <a:xfrm>
-            <a:off x="3360420" y="2468880"/>
-            <a:ext cx="2377440" cy="329184"/>
+            <a:off x="3328416" y="2688336"/>
+            <a:ext cx="2459736" cy="365760"/>
           </a:xfrm>
           <a:prstGeom prst="rect">
             <a:avLst/>
@@ -5856,7 +5856,7 @@
               <a:buNone/>
             </a:pPr>
             <a:r>
-              <a:rPr lang="en-US" sz="1600" b="1" dirty="0">
+              <a:rPr lang="en-US" sz="1700" b="1" dirty="0">
                 <a:solidFill>
                   <a:srgbClr val="1C0F07"/>
                 </a:solidFill>
@@ -5866,7 +5866,7 @@
               </a:rPr>
               <a:t>Members Portal</a:t>
             </a:r>
-            <a:endParaRPr lang="en-US" sz="1600" dirty="0"/>
+            <a:endParaRPr lang="en-US" sz="1700" dirty="0"/>
           </a:p>
         </p:txBody>
       </p:sp>
@@ -5878,8 +5878,8 @@
         </p:nvSpPr>
         <p:spPr>
           <a:xfrm>
-            <a:off x="3360420" y="2788920"/>
-            <a:ext cx="2377440" cy="292608"/>
+            <a:off x="3328416" y="3054096"/>
+            <a:ext cx="2459736" cy="329184"/>
           </a:xfrm>
           <a:prstGeom prst="rect">
             <a:avLst/>
@@ -5895,14 +5895,14 @@
               <a:buNone/>
             </a:pPr>
             <a:r>
-              <a:rPr lang="en-US" sz="1300" dirty="0">
+              <a:rPr lang="en-US" sz="1400" dirty="0">
                 <a:solidFill>
                   <a:srgbClr val="7A5535"/>
                 </a:solidFill>
               </a:rPr>
               <a:t>የአባላት ፖርታል</a:t>
             </a:r>
-            <a:endParaRPr lang="en-US" sz="1300" dirty="0"/>
+            <a:endParaRPr lang="en-US" sz="1400" dirty="0"/>
           </a:p>
         </p:txBody>
       </p:sp>
@@ -5914,8 +5914,8 @@
         </p:nvSpPr>
         <p:spPr>
           <a:xfrm>
-            <a:off x="3406140" y="3172968"/>
-            <a:ext cx="2286000" cy="1188720"/>
+            <a:off x="3401568" y="3438144"/>
+            <a:ext cx="2313432" cy="868680"/>
           </a:xfrm>
           <a:prstGeom prst="rect">
             <a:avLst/>
@@ -5931,7 +5931,7 @@
               <a:buNone/>
             </a:pPr>
             <a:r>
-              <a:rPr lang="en-US" sz="1150" dirty="0">
+              <a:rPr lang="en-US" sz="1350" dirty="0">
                 <a:solidFill>
                   <a:srgbClr val="3D2312"/>
                 </a:solidFill>
@@ -5939,9 +5939,9 @@
                 <a:ea typeface="Calibri" pitchFamily="34" charset="-122"/>
                 <a:cs typeface="Calibri" pitchFamily="34" charset="-120"/>
               </a:rPr>
-              <a:t>A private space for members — announcements, groups, serving teams and meetings.</a:t>
-            </a:r>
-            <a:endParaRPr lang="en-US" sz="1150" dirty="0"/>
+              <a:t>A private space for members — groups, teams and meetings.</a:t>
+            </a:r>
+            <a:endParaRPr lang="en-US" sz="1350" dirty="0"/>
           </a:p>
         </p:txBody>
       </p:sp>
@@ -5954,17 +5954,17 @@
         <p:spPr>
           <a:xfrm>
             <a:off x="6035040" y="1481328"/>
-            <a:ext cx="2560320" cy="2880360"/>
+            <a:ext cx="2606040" cy="2926080"/>
           </a:xfrm>
           <a:prstGeom prst="roundRect">
             <a:avLst>
-              <a:gd name="adj" fmla="val 3571"/>
+              <a:gd name="adj" fmla="val 3860"/>
             </a:avLst>
           </a:prstGeom>
           <a:solidFill>
             <a:srgbClr val="FFFFFF"/>
           </a:solidFill>
-          <a:ln w="15875">
+          <a:ln w="19050">
             <a:solidFill>
               <a:srgbClr val="C9A84C"/>
             </a:solidFill>
@@ -5987,8 +5987,8 @@
         </p:nvSpPr>
         <p:spPr>
           <a:xfrm>
-            <a:off x="6995160" y="1709928"/>
-            <a:ext cx="640080" cy="640080"/>
+            <a:off x="6908292" y="1719072"/>
+            <a:ext cx="859536" cy="859536"/>
           </a:xfrm>
           <a:prstGeom prst="ellipse">
             <a:avLst/>
@@ -6020,8 +6020,8 @@
         </p:blipFill>
         <p:spPr>
           <a:xfrm>
-            <a:off x="7103974" y="1818742"/>
-            <a:ext cx="422453" cy="422453"/>
+            <a:off x="7071604" y="1882384"/>
+            <a:ext cx="532912" cy="532912"/>
           </a:xfrm>
           <a:prstGeom prst="rect">
             <a:avLst/>
@@ -6036,8 +6036,8 @@
         </p:nvSpPr>
         <p:spPr>
           <a:xfrm>
-            <a:off x="6126480" y="2468880"/>
-            <a:ext cx="2377440" cy="329184"/>
+            <a:off x="6108192" y="2688336"/>
+            <a:ext cx="2459736" cy="365760"/>
           </a:xfrm>
           <a:prstGeom prst="rect">
             <a:avLst/>
@@ -6053,7 +6053,7 @@
               <a:buNone/>
             </a:pPr>
             <a:r>
-              <a:rPr lang="en-US" sz="1600" b="1" dirty="0">
+              <a:rPr lang="en-US" sz="1700" b="1" dirty="0">
                 <a:solidFill>
                   <a:srgbClr val="1C0F07"/>
                 </a:solidFill>
@@ -6063,7 +6063,7 @@
               </a:rPr>
               <a:t>Fellowship Library</a:t>
             </a:r>
-            <a:endParaRPr lang="en-US" sz="1600" dirty="0"/>
+            <a:endParaRPr lang="en-US" sz="1700" dirty="0"/>
           </a:p>
         </p:txBody>
       </p:sp>
@@ -6075,8 +6075,8 @@
         </p:nvSpPr>
         <p:spPr>
           <a:xfrm>
-            <a:off x="6126480" y="2788920"/>
-            <a:ext cx="2377440" cy="292608"/>
+            <a:off x="6108192" y="3054096"/>
+            <a:ext cx="2459736" cy="329184"/>
           </a:xfrm>
           <a:prstGeom prst="rect">
             <a:avLst/>
@@ -6092,14 +6092,14 @@
               <a:buNone/>
             </a:pPr>
             <a:r>
-              <a:rPr lang="en-US" sz="1300" dirty="0">
+              <a:rPr lang="en-US" sz="1400" dirty="0">
                 <a:solidFill>
                   <a:srgbClr val="7A5535"/>
                 </a:solidFill>
               </a:rPr>
               <a:t>ቤተ-መጻሕፍት</a:t>
             </a:r>
-            <a:endParaRPr lang="en-US" sz="1300" dirty="0"/>
+            <a:endParaRPr lang="en-US" sz="1400" dirty="0"/>
           </a:p>
         </p:txBody>
       </p:sp>
@@ -6111,8 +6111,8 @@
         </p:nvSpPr>
         <p:spPr>
           <a:xfrm>
-            <a:off x="6172200" y="3172968"/>
-            <a:ext cx="2286000" cy="1188720"/>
+            <a:off x="6181344" y="3438144"/>
+            <a:ext cx="2313432" cy="868680"/>
           </a:xfrm>
           <a:prstGeom prst="rect">
             <a:avLst/>
@@ -6128,7 +6128,7 @@
               <a:buNone/>
             </a:pPr>
             <a:r>
-              <a:rPr lang="en-US" sz="1150" dirty="0">
+              <a:rPr lang="en-US" sz="1350" dirty="0">
                 <a:solidFill>
                   <a:srgbClr val="3D2312"/>
                 </a:solidFill>
@@ -6136,9 +6136,9 @@
                 <a:ea typeface="Calibri" pitchFamily="34" charset="-122"/>
                 <a:cs typeface="Calibri" pitchFamily="34" charset="-120"/>
               </a:rPr>
-              <a:t>Our book collection, open for borrowing. Reserve online, collect at fellowship.</a:t>
-            </a:r>
-            <a:endParaRPr lang="en-US" sz="1150" dirty="0"/>
+              <a:t>Our books, open for borrowing. Reserve online, collect here.</a:t>
+            </a:r>
+            <a:endParaRPr lang="en-US" sz="1350" dirty="0"/>
           </a:p>
         </p:txBody>
       </p:sp>
@@ -6183,7 +6183,7 @@
         <p:spPr>
           <a:xfrm>
             <a:off x="502920" y="274320"/>
-            <a:ext cx="8138160" cy="566928"/>
+            <a:ext cx="8138160" cy="603504"/>
           </a:xfrm>
           <a:prstGeom prst="rect">
             <a:avLst/>
@@ -6199,7 +6199,7 @@
               <a:buNone/>
             </a:pPr>
             <a:r>
-              <a:rPr lang="en-US" sz="3200" b="1" dirty="0">
+              <a:rPr lang="en-US" sz="3400" b="1" dirty="0">
                 <a:solidFill>
                   <a:srgbClr val="C9A84C"/>
                 </a:solidFill>
@@ -6209,7 +6209,7 @@
               </a:rPr>
               <a:t>Our Public Website</a:t>
             </a:r>
-            <a:endParaRPr lang="en-US" sz="3200" dirty="0"/>
+            <a:endParaRPr lang="en-US" sz="3400" dirty="0"/>
           </a:p>
         </p:txBody>
       </p:sp>
@@ -6221,8 +6221,8 @@
         </p:nvSpPr>
         <p:spPr>
           <a:xfrm>
-            <a:off x="502920" y="804672"/>
-            <a:ext cx="8138160" cy="347472"/>
+            <a:off x="502920" y="841248"/>
+            <a:ext cx="8138160" cy="365760"/>
           </a:xfrm>
           <a:prstGeom prst="rect">
             <a:avLst/>
@@ -6238,14 +6238,14 @@
               <a:buNone/>
             </a:pPr>
             <a:r>
-              <a:rPr lang="en-US" sz="1700" dirty="0">
+              <a:rPr lang="en-US" sz="1900" dirty="0">
                 <a:solidFill>
                   <a:srgbClr val="FAF7F0"/>
                 </a:solidFill>
               </a:rPr>
               <a:t>ይፋዊ ድረ-ገጻችን</a:t>
             </a:r>
-            <a:endParaRPr lang="en-US" sz="1700" dirty="0"/>
+            <a:endParaRPr lang="en-US" sz="1900" dirty="0"/>
           </a:p>
         </p:txBody>
       </p:sp>
@@ -6257,8 +6257,8 @@
         </p:nvSpPr>
         <p:spPr>
           <a:xfrm>
-            <a:off x="502920" y="1207008"/>
-            <a:ext cx="8138160" cy="292608"/>
+            <a:off x="502920" y="1243584"/>
+            <a:ext cx="8138160" cy="329184"/>
           </a:xfrm>
           <a:prstGeom prst="rect">
             <a:avLst/>
@@ -6274,7 +6274,7 @@
               <a:buNone/>
             </a:pPr>
             <a:r>
-              <a:rPr lang="en-US" sz="1300" i="1" dirty="0">
+              <a:rPr lang="en-US" sz="1500" i="1" dirty="0">
                 <a:solidFill>
                   <a:srgbClr val="EDD090"/>
                 </a:solidFill>
@@ -6284,7 +6284,7 @@
               </a:rPr>
               <a:t>wetcf.com  —  anyone can visit, no account needed</a:t>
             </a:r>
-            <a:endParaRPr lang="en-US" sz="1300" dirty="0"/>
+            <a:endParaRPr lang="en-US" sz="1500" dirty="0"/>
           </a:p>
         </p:txBody>
       </p:sp>
@@ -6296,18 +6296,18 @@
         </p:nvSpPr>
         <p:spPr>
           <a:xfrm>
-            <a:off x="502920" y="1627632"/>
-            <a:ext cx="3931920" cy="1298448"/>
+            <a:off x="502920" y="1700784"/>
+            <a:ext cx="3931920" cy="1280160"/>
           </a:xfrm>
           <a:prstGeom prst="roundRect">
             <a:avLst>
-              <a:gd name="adj" fmla="val 5634"/>
+              <a:gd name="adj" fmla="val 7143"/>
             </a:avLst>
           </a:prstGeom>
           <a:solidFill>
             <a:srgbClr val="2B1508"/>
           </a:solidFill>
-          <a:ln w="12700">
+          <a:ln w="15875">
             <a:solidFill>
               <a:srgbClr val="C9A84C"/>
             </a:solidFill>
@@ -6323,8 +6323,8 @@
         </p:nvSpPr>
         <p:spPr>
           <a:xfrm>
-            <a:off x="740664" y="1901952"/>
-            <a:ext cx="566928" cy="566928"/>
+            <a:off x="740664" y="1975104"/>
+            <a:ext cx="731520" cy="731520"/>
           </a:xfrm>
           <a:prstGeom prst="ellipse">
             <a:avLst/>
@@ -6356,8 +6356,8 @@
         </p:blipFill>
         <p:spPr>
           <a:xfrm>
-            <a:off x="837042" y="1998330"/>
-            <a:ext cx="374172" cy="374172"/>
+            <a:off x="879653" y="2114093"/>
+            <a:ext cx="453542" cy="453542"/>
           </a:xfrm>
           <a:prstGeom prst="rect">
             <a:avLst/>
@@ -6372,8 +6372,8 @@
         </p:nvSpPr>
         <p:spPr>
           <a:xfrm>
-            <a:off x="1435608" y="1847088"/>
-            <a:ext cx="2834640" cy="292608"/>
+            <a:off x="1600200" y="1993392"/>
+            <a:ext cx="2697480" cy="329184"/>
           </a:xfrm>
           <a:prstGeom prst="rect">
             <a:avLst/>
@@ -6389,7 +6389,7 @@
               <a:buNone/>
             </a:pPr>
             <a:r>
-              <a:rPr lang="en-US" sz="1400" b="1" dirty="0">
+              <a:rPr lang="en-US" sz="1600" b="1" dirty="0">
                 <a:solidFill>
                   <a:srgbClr val="C9A84C"/>
                 </a:solidFill>
@@ -6399,105 +6399,66 @@
               </a:rPr>
               <a:t>Home &amp; About</a:t>
             </a:r>
+            <a:endParaRPr lang="en-US" sz="1600" dirty="0"/>
+          </a:p>
+        </p:txBody>
+      </p:sp>
+      <p:sp>
+        <p:nvSpPr>
+          <p:cNvPr id="9" name="Text 6"/>
+          <p:cNvSpPr txBox="1"/>
+          <p:nvPr/>
+        </p:nvSpPr>
+        <p:spPr>
+          <a:xfrm>
+            <a:off x="1600200" y="2340864"/>
+            <a:ext cx="2697480" cy="310896"/>
+          </a:xfrm>
+          <a:prstGeom prst="rect">
+            <a:avLst/>
+          </a:prstGeom>
+          <a:noFill/>
+          <a:ln/>
+        </p:spPr>
+        <p:txBody>
+          <a:bodyPr wrap="square" lIns="0" tIns="0" rIns="0" bIns="0" rtlCol="0" anchor="ctr"/>
+          <a:lstStyle/>
+          <a:p>
+            <a:pPr indent="0" marL="0">
+              <a:buNone/>
+            </a:pPr>
+            <a:r>
+              <a:rPr lang="en-US" sz="1400" dirty="0">
+                <a:solidFill>
+                  <a:srgbClr val="FAF7F0"/>
+                </a:solidFill>
+              </a:rPr>
+              <a:t>ስለ እኛ</a:t>
+            </a:r>
             <a:endParaRPr lang="en-US" sz="1400" dirty="0"/>
           </a:p>
         </p:txBody>
       </p:sp>
       <p:sp>
         <p:nvSpPr>
-          <p:cNvPr id="9" name="Text 6"/>
-          <p:cNvSpPr txBox="1"/>
-          <p:nvPr/>
-        </p:nvSpPr>
-        <p:spPr>
-          <a:xfrm>
-            <a:off x="1435608" y="2130552"/>
-            <a:ext cx="2834640" cy="256032"/>
-          </a:xfrm>
-          <a:prstGeom prst="rect">
-            <a:avLst/>
-          </a:prstGeom>
-          <a:noFill/>
-          <a:ln/>
-        </p:spPr>
-        <p:txBody>
-          <a:bodyPr wrap="square" lIns="0" tIns="0" rIns="0" bIns="0" rtlCol="0" anchor="ctr"/>
-          <a:lstStyle/>
-          <a:p>
-            <a:pPr indent="0" marL="0">
-              <a:buNone/>
-            </a:pPr>
-            <a:r>
-              <a:rPr lang="en-US" sz="1100" dirty="0">
-                <a:solidFill>
-                  <a:srgbClr val="FAF7F0"/>
-                </a:solidFill>
-              </a:rPr>
-              <a:t>ስለ እኛ</a:t>
-            </a:r>
-            <a:endParaRPr lang="en-US" sz="1100" dirty="0"/>
-          </a:p>
-        </p:txBody>
-      </p:sp>
-      <p:sp>
-        <p:nvSpPr>
-          <p:cNvPr id="10" name="Text 7"/>
-          <p:cNvSpPr txBox="1"/>
-          <p:nvPr/>
-        </p:nvSpPr>
-        <p:spPr>
-          <a:xfrm>
-            <a:off x="1435608" y="2395728"/>
-            <a:ext cx="2834640" cy="365760"/>
-          </a:xfrm>
-          <a:prstGeom prst="rect">
-            <a:avLst/>
-          </a:prstGeom>
-          <a:noFill/>
-          <a:ln/>
-        </p:spPr>
-        <p:txBody>
-          <a:bodyPr wrap="square" lIns="0" tIns="0" rIns="0" bIns="0" rtlCol="0" anchor="ctr"/>
-          <a:lstStyle/>
-          <a:p>
-            <a:pPr indent="0" marL="0">
-              <a:buNone/>
-            </a:pPr>
-            <a:r>
-              <a:rPr lang="en-US" sz="1050" dirty="0">
-                <a:solidFill>
-                  <a:srgbClr val="EDD090"/>
-                </a:solidFill>
-                <a:latin typeface="Calibri" pitchFamily="34" charset="0"/>
-                <a:ea typeface="Calibri" pitchFamily="34" charset="-122"/>
-                <a:cs typeface="Calibri" pitchFamily="34" charset="-120"/>
-              </a:rPr>
-              <a:t>Who we are and what we believe</a:t>
-            </a:r>
-            <a:endParaRPr lang="en-US" sz="1050" dirty="0"/>
-          </a:p>
-        </p:txBody>
-      </p:sp>
-      <p:sp>
-        <p:nvSpPr>
-          <p:cNvPr id="11" name="Shape 8"/>
+          <p:cNvPr id="10" name="Shape 7"/>
           <p:cNvSpPr/>
           <p:nvPr/>
         </p:nvSpPr>
         <p:spPr>
           <a:xfrm>
-            <a:off x="4709160" y="1627632"/>
-            <a:ext cx="3931920" cy="1298448"/>
+            <a:off x="4709160" y="1700784"/>
+            <a:ext cx="3931920" cy="1280160"/>
           </a:xfrm>
           <a:prstGeom prst="roundRect">
             <a:avLst>
-              <a:gd name="adj" fmla="val 5634"/>
+              <a:gd name="adj" fmla="val 7143"/>
             </a:avLst>
           </a:prstGeom>
           <a:solidFill>
             <a:srgbClr val="2B1508"/>
           </a:solidFill>
-          <a:ln w="12700">
+          <a:ln w="15875">
             <a:solidFill>
               <a:srgbClr val="C9A84C"/>
             </a:solidFill>
@@ -6507,14 +6468,14 @@
       </p:sp>
       <p:sp>
         <p:nvSpPr>
-          <p:cNvPr id="12" name="Shape 9"/>
+          <p:cNvPr id="11" name="Shape 8"/>
           <p:cNvSpPr/>
           <p:nvPr/>
         </p:nvSpPr>
         <p:spPr>
           <a:xfrm>
-            <a:off x="4946904" y="1901952"/>
-            <a:ext cx="566928" cy="566928"/>
+            <a:off x="4946904" y="1975104"/>
+            <a:ext cx="731520" cy="731520"/>
           </a:xfrm>
           <a:prstGeom prst="ellipse">
             <a:avLst/>
@@ -6532,7 +6493,7 @@
       </p:sp>
       <p:pic>
         <p:nvPicPr>
-          <p:cNvPr id="13" name="Image 1" descr="preencoded.png">    </p:cNvPr>
+          <p:cNvPr id="12" name="Image 1" descr="preencoded.png">    </p:cNvPr>
           <p:cNvPicPr>
             <a:picLocks noChangeAspect="1"/>
           </p:cNvPicPr>
@@ -6546,8 +6507,8 @@
         </p:blipFill>
         <p:spPr>
           <a:xfrm>
-            <a:off x="5043282" y="1998330"/>
-            <a:ext cx="374172" cy="374172"/>
+            <a:off x="5085893" y="2114093"/>
+            <a:ext cx="453542" cy="453542"/>
           </a:xfrm>
           <a:prstGeom prst="rect">
             <a:avLst/>
@@ -6556,14 +6517,14 @@
       </p:pic>
       <p:sp>
         <p:nvSpPr>
-          <p:cNvPr id="14" name="Text 10"/>
-          <p:cNvSpPr txBox="1"/>
-          <p:nvPr/>
-        </p:nvSpPr>
-        <p:spPr>
-          <a:xfrm>
-            <a:off x="5641848" y="1847088"/>
-            <a:ext cx="2834640" cy="292608"/>
+          <p:cNvPr id="13" name="Text 9"/>
+          <p:cNvSpPr txBox="1"/>
+          <p:nvPr/>
+        </p:nvSpPr>
+        <p:spPr>
+          <a:xfrm>
+            <a:off x="5806440" y="1993392"/>
+            <a:ext cx="2697480" cy="329184"/>
           </a:xfrm>
           <a:prstGeom prst="rect">
             <a:avLst/>
@@ -6579,7 +6540,7 @@
               <a:buNone/>
             </a:pPr>
             <a:r>
-              <a:rPr lang="en-US" sz="1400" b="1" dirty="0">
+              <a:rPr lang="en-US" sz="1600" b="1" dirty="0">
                 <a:solidFill>
                   <a:srgbClr val="C9A84C"/>
                 </a:solidFill>
@@ -6589,105 +6550,66 @@
               </a:rPr>
               <a:t>Programs &amp; Events</a:t>
             </a:r>
+            <a:endParaRPr lang="en-US" sz="1600" dirty="0"/>
+          </a:p>
+        </p:txBody>
+      </p:sp>
+      <p:sp>
+        <p:nvSpPr>
+          <p:cNvPr id="14" name="Text 10"/>
+          <p:cNvSpPr txBox="1"/>
+          <p:nvPr/>
+        </p:nvSpPr>
+        <p:spPr>
+          <a:xfrm>
+            <a:off x="5806440" y="2340864"/>
+            <a:ext cx="2697480" cy="310896"/>
+          </a:xfrm>
+          <a:prstGeom prst="rect">
+            <a:avLst/>
+          </a:prstGeom>
+          <a:noFill/>
+          <a:ln/>
+        </p:spPr>
+        <p:txBody>
+          <a:bodyPr wrap="square" lIns="0" tIns="0" rIns="0" bIns="0" rtlCol="0" anchor="ctr"/>
+          <a:lstStyle/>
+          <a:p>
+            <a:pPr indent="0" marL="0">
+              <a:buNone/>
+            </a:pPr>
+            <a:r>
+              <a:rPr lang="en-US" sz="1400" dirty="0">
+                <a:solidFill>
+                  <a:srgbClr val="FAF7F0"/>
+                </a:solidFill>
+              </a:rPr>
+              <a:t>ዝግጅቶች</a:t>
+            </a:r>
             <a:endParaRPr lang="en-US" sz="1400" dirty="0"/>
           </a:p>
         </p:txBody>
       </p:sp>
       <p:sp>
         <p:nvSpPr>
-          <p:cNvPr id="15" name="Text 11"/>
-          <p:cNvSpPr txBox="1"/>
-          <p:nvPr/>
-        </p:nvSpPr>
-        <p:spPr>
-          <a:xfrm>
-            <a:off x="5641848" y="2130552"/>
-            <a:ext cx="2834640" cy="256032"/>
-          </a:xfrm>
-          <a:prstGeom prst="rect">
-            <a:avLst/>
-          </a:prstGeom>
-          <a:noFill/>
-          <a:ln/>
-        </p:spPr>
-        <p:txBody>
-          <a:bodyPr wrap="square" lIns="0" tIns="0" rIns="0" bIns="0" rtlCol="0" anchor="ctr"/>
-          <a:lstStyle/>
-          <a:p>
-            <a:pPr indent="0" marL="0">
-              <a:buNone/>
-            </a:pPr>
-            <a:r>
-              <a:rPr lang="en-US" sz="1100" dirty="0">
-                <a:solidFill>
-                  <a:srgbClr val="FAF7F0"/>
-                </a:solidFill>
-              </a:rPr>
-              <a:t>ዝግጅቶች</a:t>
-            </a:r>
-            <a:endParaRPr lang="en-US" sz="1100" dirty="0"/>
-          </a:p>
-        </p:txBody>
-      </p:sp>
-      <p:sp>
-        <p:nvSpPr>
-          <p:cNvPr id="16" name="Text 12"/>
-          <p:cNvSpPr txBox="1"/>
-          <p:nvPr/>
-        </p:nvSpPr>
-        <p:spPr>
-          <a:xfrm>
-            <a:off x="5641848" y="2395728"/>
-            <a:ext cx="2834640" cy="365760"/>
-          </a:xfrm>
-          <a:prstGeom prst="rect">
-            <a:avLst/>
-          </a:prstGeom>
-          <a:noFill/>
-          <a:ln/>
-        </p:spPr>
-        <p:txBody>
-          <a:bodyPr wrap="square" lIns="0" tIns="0" rIns="0" bIns="0" rtlCol="0" anchor="ctr"/>
-          <a:lstStyle/>
-          <a:p>
-            <a:pPr indent="0" marL="0">
-              <a:buNone/>
-            </a:pPr>
-            <a:r>
-              <a:rPr lang="en-US" sz="1050" dirty="0">
-                <a:solidFill>
-                  <a:srgbClr val="EDD090"/>
-                </a:solidFill>
-                <a:latin typeface="Calibri" pitchFamily="34" charset="0"/>
-                <a:ea typeface="Calibri" pitchFamily="34" charset="-122"/>
-                <a:cs typeface="Calibri" pitchFamily="34" charset="-120"/>
-              </a:rPr>
-              <a:t>When we gather, and what is coming</a:t>
-            </a:r>
-            <a:endParaRPr lang="en-US" sz="1050" dirty="0"/>
-          </a:p>
-        </p:txBody>
-      </p:sp>
-      <p:sp>
-        <p:nvSpPr>
-          <p:cNvPr id="17" name="Shape 13"/>
+          <p:cNvPr id="15" name="Shape 11"/>
           <p:cNvSpPr/>
           <p:nvPr/>
         </p:nvSpPr>
         <p:spPr>
           <a:xfrm>
-            <a:off x="502920" y="3127248"/>
-            <a:ext cx="3931920" cy="1298448"/>
+            <a:off x="502920" y="3218688"/>
+            <a:ext cx="3931920" cy="1280160"/>
           </a:xfrm>
           <a:prstGeom prst="roundRect">
             <a:avLst>
-              <a:gd name="adj" fmla="val 5634"/>
+              <a:gd name="adj" fmla="val 7143"/>
             </a:avLst>
           </a:prstGeom>
           <a:solidFill>
             <a:srgbClr val="2B1508"/>
           </a:solidFill>
-          <a:ln w="12700">
+          <a:ln w="15875">
             <a:solidFill>
               <a:srgbClr val="C9A84C"/>
             </a:solidFill>
@@ -6697,14 +6619,14 @@
       </p:sp>
       <p:sp>
         <p:nvSpPr>
-          <p:cNvPr id="18" name="Shape 14"/>
+          <p:cNvPr id="16" name="Shape 12"/>
           <p:cNvSpPr/>
           <p:nvPr/>
         </p:nvSpPr>
         <p:spPr>
           <a:xfrm>
-            <a:off x="740664" y="3401568"/>
-            <a:ext cx="566928" cy="566928"/>
+            <a:off x="740664" y="3493008"/>
+            <a:ext cx="731520" cy="731520"/>
           </a:xfrm>
           <a:prstGeom prst="ellipse">
             <a:avLst/>
@@ -6722,7 +6644,7 @@
       </p:sp>
       <p:pic>
         <p:nvPicPr>
-          <p:cNvPr id="19" name="Image 2" descr="preencoded.png">    </p:cNvPr>
+          <p:cNvPr id="17" name="Image 2" descr="preencoded.png">    </p:cNvPr>
           <p:cNvPicPr>
             <a:picLocks noChangeAspect="1"/>
           </p:cNvPicPr>
@@ -6736,8 +6658,8 @@
         </p:blipFill>
         <p:spPr>
           <a:xfrm>
-            <a:off x="837042" y="3497946"/>
-            <a:ext cx="374172" cy="374172"/>
+            <a:off x="879653" y="3631997"/>
+            <a:ext cx="453542" cy="453542"/>
           </a:xfrm>
           <a:prstGeom prst="rect">
             <a:avLst/>
@@ -6746,14 +6668,14 @@
       </p:pic>
       <p:sp>
         <p:nvSpPr>
-          <p:cNvPr id="20" name="Text 15"/>
-          <p:cNvSpPr txBox="1"/>
-          <p:nvPr/>
-        </p:nvSpPr>
-        <p:spPr>
-          <a:xfrm>
-            <a:off x="1435608" y="3346704"/>
-            <a:ext cx="2834640" cy="292608"/>
+          <p:cNvPr id="18" name="Text 13"/>
+          <p:cNvSpPr txBox="1"/>
+          <p:nvPr/>
+        </p:nvSpPr>
+        <p:spPr>
+          <a:xfrm>
+            <a:off x="1600200" y="3511296"/>
+            <a:ext cx="2697480" cy="329184"/>
           </a:xfrm>
           <a:prstGeom prst="rect">
             <a:avLst/>
@@ -6769,7 +6691,7 @@
               <a:buNone/>
             </a:pPr>
             <a:r>
-              <a:rPr lang="en-US" sz="1400" b="1" dirty="0">
+              <a:rPr lang="en-US" sz="1600" b="1" dirty="0">
                 <a:solidFill>
                   <a:srgbClr val="C9A84C"/>
                 </a:solidFill>
@@ -6779,105 +6701,66 @@
               </a:rPr>
               <a:t>Visit Us</a:t>
             </a:r>
+            <a:endParaRPr lang="en-US" sz="1600" dirty="0"/>
+          </a:p>
+        </p:txBody>
+      </p:sp>
+      <p:sp>
+        <p:nvSpPr>
+          <p:cNvPr id="19" name="Text 14"/>
+          <p:cNvSpPr txBox="1"/>
+          <p:nvPr/>
+        </p:nvSpPr>
+        <p:spPr>
+          <a:xfrm>
+            <a:off x="1600200" y="3858768"/>
+            <a:ext cx="2697480" cy="310896"/>
+          </a:xfrm>
+          <a:prstGeom prst="rect">
+            <a:avLst/>
+          </a:prstGeom>
+          <a:noFill/>
+          <a:ln/>
+        </p:spPr>
+        <p:txBody>
+          <a:bodyPr wrap="square" lIns="0" tIns="0" rIns="0" bIns="0" rtlCol="0" anchor="ctr"/>
+          <a:lstStyle/>
+          <a:p>
+            <a:pPr indent="0" marL="0">
+              <a:buNone/>
+            </a:pPr>
+            <a:r>
+              <a:rPr lang="en-US" sz="1400" dirty="0">
+                <a:solidFill>
+                  <a:srgbClr val="FAF7F0"/>
+                </a:solidFill>
+              </a:rPr>
+              <a:t>ይጎብኙን</a:t>
+            </a:r>
             <a:endParaRPr lang="en-US" sz="1400" dirty="0"/>
           </a:p>
         </p:txBody>
       </p:sp>
       <p:sp>
         <p:nvSpPr>
-          <p:cNvPr id="21" name="Text 16"/>
-          <p:cNvSpPr txBox="1"/>
-          <p:nvPr/>
-        </p:nvSpPr>
-        <p:spPr>
-          <a:xfrm>
-            <a:off x="1435608" y="3630168"/>
-            <a:ext cx="2834640" cy="256032"/>
-          </a:xfrm>
-          <a:prstGeom prst="rect">
-            <a:avLst/>
-          </a:prstGeom>
-          <a:noFill/>
-          <a:ln/>
-        </p:spPr>
-        <p:txBody>
-          <a:bodyPr wrap="square" lIns="0" tIns="0" rIns="0" bIns="0" rtlCol="0" anchor="ctr"/>
-          <a:lstStyle/>
-          <a:p>
-            <a:pPr indent="0" marL="0">
-              <a:buNone/>
-            </a:pPr>
-            <a:r>
-              <a:rPr lang="en-US" sz="1100" dirty="0">
-                <a:solidFill>
-                  <a:srgbClr val="FAF7F0"/>
-                </a:solidFill>
-              </a:rPr>
-              <a:t>ይጎብኙን</a:t>
-            </a:r>
-            <a:endParaRPr lang="en-US" sz="1100" dirty="0"/>
-          </a:p>
-        </p:txBody>
-      </p:sp>
-      <p:sp>
-        <p:nvSpPr>
-          <p:cNvPr id="22" name="Text 17"/>
-          <p:cNvSpPr txBox="1"/>
-          <p:nvPr/>
-        </p:nvSpPr>
-        <p:spPr>
-          <a:xfrm>
-            <a:off x="1435608" y="3895344"/>
-            <a:ext cx="2834640" cy="365760"/>
-          </a:xfrm>
-          <a:prstGeom prst="rect">
-            <a:avLst/>
-          </a:prstGeom>
-          <a:noFill/>
-          <a:ln/>
-        </p:spPr>
-        <p:txBody>
-          <a:bodyPr wrap="square" lIns="0" tIns="0" rIns="0" bIns="0" rtlCol="0" anchor="ctr"/>
-          <a:lstStyle/>
-          <a:p>
-            <a:pPr indent="0" marL="0">
-              <a:buNone/>
-            </a:pPr>
-            <a:r>
-              <a:rPr lang="en-US" sz="1050" dirty="0">
-                <a:solidFill>
-                  <a:srgbClr val="EDD090"/>
-                </a:solidFill>
-                <a:latin typeface="Calibri" pitchFamily="34" charset="0"/>
-                <a:ea typeface="Calibri" pitchFamily="34" charset="-122"/>
-                <a:cs typeface="Calibri" pitchFamily="34" charset="-120"/>
-              </a:rPr>
-              <a:t>Address, bus routes, and a contact form</a:t>
-            </a:r>
-            <a:endParaRPr lang="en-US" sz="1050" dirty="0"/>
-          </a:p>
-        </p:txBody>
-      </p:sp>
-      <p:sp>
-        <p:nvSpPr>
-          <p:cNvPr id="23" name="Shape 18"/>
+          <p:cNvPr id="20" name="Shape 15"/>
           <p:cNvSpPr/>
           <p:nvPr/>
         </p:nvSpPr>
         <p:spPr>
           <a:xfrm>
-            <a:off x="4709160" y="3127248"/>
-            <a:ext cx="3931920" cy="1298448"/>
+            <a:off x="4709160" y="3218688"/>
+            <a:ext cx="3931920" cy="1280160"/>
           </a:xfrm>
           <a:prstGeom prst="roundRect">
             <a:avLst>
-              <a:gd name="adj" fmla="val 5634"/>
+              <a:gd name="adj" fmla="val 7143"/>
             </a:avLst>
           </a:prstGeom>
           <a:solidFill>
             <a:srgbClr val="2B1508"/>
           </a:solidFill>
-          <a:ln w="12700">
+          <a:ln w="15875">
             <a:solidFill>
               <a:srgbClr val="C9A84C"/>
             </a:solidFill>
@@ -6887,14 +6770,14 @@
       </p:sp>
       <p:sp>
         <p:nvSpPr>
-          <p:cNvPr id="24" name="Shape 19"/>
+          <p:cNvPr id="21" name="Shape 16"/>
           <p:cNvSpPr/>
           <p:nvPr/>
         </p:nvSpPr>
         <p:spPr>
           <a:xfrm>
-            <a:off x="4946904" y="3401568"/>
-            <a:ext cx="566928" cy="566928"/>
+            <a:off x="4946904" y="3493008"/>
+            <a:ext cx="731520" cy="731520"/>
           </a:xfrm>
           <a:prstGeom prst="ellipse">
             <a:avLst/>
@@ -6912,7 +6795,7 @@
       </p:sp>
       <p:pic>
         <p:nvPicPr>
-          <p:cNvPr id="25" name="Image 3" descr="preencoded.png">    </p:cNvPr>
+          <p:cNvPr id="22" name="Image 3" descr="preencoded.png">    </p:cNvPr>
           <p:cNvPicPr>
             <a:picLocks noChangeAspect="1"/>
           </p:cNvPicPr>
@@ -6926,8 +6809,8 @@
         </p:blipFill>
         <p:spPr>
           <a:xfrm>
-            <a:off x="5043282" y="3497946"/>
-            <a:ext cx="374172" cy="374172"/>
+            <a:off x="5085893" y="3631997"/>
+            <a:ext cx="453542" cy="453542"/>
           </a:xfrm>
           <a:prstGeom prst="rect">
             <a:avLst/>
@@ -6936,14 +6819,14 @@
       </p:pic>
       <p:sp>
         <p:nvSpPr>
-          <p:cNvPr id="26" name="Text 20"/>
-          <p:cNvSpPr txBox="1"/>
-          <p:nvPr/>
-        </p:nvSpPr>
-        <p:spPr>
-          <a:xfrm>
-            <a:off x="5641848" y="3346704"/>
-            <a:ext cx="2834640" cy="292608"/>
+          <p:cNvPr id="23" name="Text 17"/>
+          <p:cNvSpPr txBox="1"/>
+          <p:nvPr/>
+        </p:nvSpPr>
+        <p:spPr>
+          <a:xfrm>
+            <a:off x="5806440" y="3511296"/>
+            <a:ext cx="2697480" cy="329184"/>
           </a:xfrm>
           <a:prstGeom prst="rect">
             <a:avLst/>
@@ -6959,7 +6842,7 @@
               <a:buNone/>
             </a:pPr>
             <a:r>
-              <a:rPr lang="en-US" sz="1400" b="1" dirty="0">
+              <a:rPr lang="en-US" sz="1600" b="1" dirty="0">
                 <a:solidFill>
                   <a:srgbClr val="C9A84C"/>
                 </a:solidFill>
@@ -6969,82 +6852,43 @@
               </a:rPr>
               <a:t>Follow Us</a:t>
             </a:r>
+            <a:endParaRPr lang="en-US" sz="1600" dirty="0"/>
+          </a:p>
+        </p:txBody>
+      </p:sp>
+      <p:sp>
+        <p:nvSpPr>
+          <p:cNvPr id="24" name="Text 18"/>
+          <p:cNvSpPr txBox="1"/>
+          <p:nvPr/>
+        </p:nvSpPr>
+        <p:spPr>
+          <a:xfrm>
+            <a:off x="5806440" y="3858768"/>
+            <a:ext cx="2697480" cy="310896"/>
+          </a:xfrm>
+          <a:prstGeom prst="rect">
+            <a:avLst/>
+          </a:prstGeom>
+          <a:noFill/>
+          <a:ln/>
+        </p:spPr>
+        <p:txBody>
+          <a:bodyPr wrap="square" lIns="0" tIns="0" rIns="0" bIns="0" rtlCol="0" anchor="ctr"/>
+          <a:lstStyle/>
+          <a:p>
+            <a:pPr indent="0" marL="0">
+              <a:buNone/>
+            </a:pPr>
+            <a:r>
+              <a:rPr lang="en-US" sz="1400" dirty="0">
+                <a:solidFill>
+                  <a:srgbClr val="FAF7F0"/>
+                </a:solidFill>
+              </a:rPr>
+              <a:t>ይከታተሉን</a:t>
+            </a:r>
             <a:endParaRPr lang="en-US" sz="1400" dirty="0"/>
-          </a:p>
-        </p:txBody>
-      </p:sp>
-      <p:sp>
-        <p:nvSpPr>
-          <p:cNvPr id="27" name="Text 21"/>
-          <p:cNvSpPr txBox="1"/>
-          <p:nvPr/>
-        </p:nvSpPr>
-        <p:spPr>
-          <a:xfrm>
-            <a:off x="5641848" y="3630168"/>
-            <a:ext cx="2834640" cy="256032"/>
-          </a:xfrm>
-          <a:prstGeom prst="rect">
-            <a:avLst/>
-          </a:prstGeom>
-          <a:noFill/>
-          <a:ln/>
-        </p:spPr>
-        <p:txBody>
-          <a:bodyPr wrap="square" lIns="0" tIns="0" rIns="0" bIns="0" rtlCol="0" anchor="ctr"/>
-          <a:lstStyle/>
-          <a:p>
-            <a:pPr indent="0" marL="0">
-              <a:buNone/>
-            </a:pPr>
-            <a:r>
-              <a:rPr lang="en-US" sz="1100" dirty="0">
-                <a:solidFill>
-                  <a:srgbClr val="FAF7F0"/>
-                </a:solidFill>
-              </a:rPr>
-              <a:t>ይከታተሉን</a:t>
-            </a:r>
-            <a:endParaRPr lang="en-US" sz="1100" dirty="0"/>
-          </a:p>
-        </p:txBody>
-      </p:sp>
-      <p:sp>
-        <p:nvSpPr>
-          <p:cNvPr id="28" name="Text 22"/>
-          <p:cNvSpPr txBox="1"/>
-          <p:nvPr/>
-        </p:nvSpPr>
-        <p:spPr>
-          <a:xfrm>
-            <a:off x="5641848" y="3895344"/>
-            <a:ext cx="2834640" cy="365760"/>
-          </a:xfrm>
-          <a:prstGeom prst="rect">
-            <a:avLst/>
-          </a:prstGeom>
-          <a:noFill/>
-          <a:ln/>
-        </p:spPr>
-        <p:txBody>
-          <a:bodyPr wrap="square" lIns="0" tIns="0" rIns="0" bIns="0" rtlCol="0" anchor="ctr"/>
-          <a:lstStyle/>
-          <a:p>
-            <a:pPr indent="0" marL="0">
-              <a:buNone/>
-            </a:pPr>
-            <a:r>
-              <a:rPr lang="en-US" sz="1050" dirty="0">
-                <a:solidFill>
-                  <a:srgbClr val="EDD090"/>
-                </a:solidFill>
-                <a:latin typeface="Calibri" pitchFamily="34" charset="0"/>
-                <a:ea typeface="Calibri" pitchFamily="34" charset="-122"/>
-                <a:cs typeface="Calibri" pitchFamily="34" charset="-120"/>
-              </a:rPr>
-              <a:t>YouTube and Instagram, linked in the footer</a:t>
-            </a:r>
-            <a:endParaRPr lang="en-US" sz="1050" dirty="0"/>
           </a:p>
         </p:txBody>
       </p:sp>
@@ -7089,7 +6933,7 @@
         <p:spPr>
           <a:xfrm>
             <a:off x="502920" y="274320"/>
-            <a:ext cx="8138160" cy="566928"/>
+            <a:ext cx="8138160" cy="603504"/>
           </a:xfrm>
           <a:prstGeom prst="rect">
             <a:avLst/>
@@ -7105,7 +6949,7 @@
               <a:buNone/>
             </a:pPr>
             <a:r>
-              <a:rPr lang="en-US" sz="3200" b="1" dirty="0">
+              <a:rPr lang="en-US" sz="3400" b="1" dirty="0">
                 <a:solidFill>
                   <a:srgbClr val="1C0F07"/>
                 </a:solidFill>
@@ -7115,7 +6959,7 @@
               </a:rPr>
               <a:t>Inside the Members Portal</a:t>
             </a:r>
-            <a:endParaRPr lang="en-US" sz="3200" dirty="0"/>
+            <a:endParaRPr lang="en-US" sz="3400" dirty="0"/>
           </a:p>
         </p:txBody>
       </p:sp>
@@ -7127,8 +6971,8 @@
         </p:nvSpPr>
         <p:spPr>
           <a:xfrm>
-            <a:off x="502920" y="804672"/>
-            <a:ext cx="8138160" cy="347472"/>
+            <a:off x="502920" y="841248"/>
+            <a:ext cx="8138160" cy="365760"/>
           </a:xfrm>
           <a:prstGeom prst="rect">
             <a:avLst/>
@@ -7144,14 +6988,14 @@
               <a:buNone/>
             </a:pPr>
             <a:r>
-              <a:rPr lang="en-US" sz="1700" dirty="0">
+              <a:rPr lang="en-US" sz="1900" dirty="0">
                 <a:solidFill>
                   <a:srgbClr val="7A5535"/>
                 </a:solidFill>
               </a:rPr>
               <a:t>በአባላት ፖርታል ውስጥ</a:t>
             </a:r>
-            <a:endParaRPr lang="en-US" sz="1700" dirty="0"/>
+            <a:endParaRPr lang="en-US" sz="1900" dirty="0"/>
           </a:p>
         </p:txBody>
       </p:sp>
@@ -7163,18 +7007,18 @@
         </p:nvSpPr>
         <p:spPr>
           <a:xfrm>
-            <a:off x="502920" y="1371600"/>
-            <a:ext cx="2487168" cy="1389888"/>
+            <a:off x="475488" y="1389888"/>
+            <a:ext cx="2542032" cy="1591056"/>
           </a:xfrm>
           <a:prstGeom prst="roundRect">
             <a:avLst>
-              <a:gd name="adj" fmla="val 6579"/>
+              <a:gd name="adj" fmla="val 6322"/>
             </a:avLst>
           </a:prstGeom>
           <a:solidFill>
             <a:srgbClr val="FFFFFF"/>
           </a:solidFill>
-          <a:ln w="15875">
+          <a:ln w="19050">
             <a:solidFill>
               <a:srgbClr val="C9A84C"/>
             </a:solidFill>
@@ -7197,8 +7041,8 @@
         </p:nvSpPr>
         <p:spPr>
           <a:xfrm>
-            <a:off x="1481328" y="1527048"/>
-            <a:ext cx="530352" cy="530352"/>
+            <a:off x="1408176" y="1545336"/>
+            <a:ext cx="676656" cy="676656"/>
           </a:xfrm>
           <a:prstGeom prst="ellipse">
             <a:avLst/>
@@ -7230,8 +7074,8 @@
         </p:blipFill>
         <p:spPr>
           <a:xfrm>
-            <a:off x="1571488" y="1617208"/>
-            <a:ext cx="350032" cy="350032"/>
+            <a:off x="1536741" y="1673901"/>
+            <a:ext cx="419527" cy="419527"/>
           </a:xfrm>
           <a:prstGeom prst="rect">
             <a:avLst/>
@@ -7246,8 +7090,8 @@
         </p:nvSpPr>
         <p:spPr>
           <a:xfrm>
-            <a:off x="594360" y="2139696"/>
-            <a:ext cx="2304288" cy="292608"/>
+            <a:off x="548640" y="2286000"/>
+            <a:ext cx="2395728" cy="310896"/>
           </a:xfrm>
           <a:prstGeom prst="rect">
             <a:avLst/>
@@ -7263,7 +7107,7 @@
               <a:buNone/>
             </a:pPr>
             <a:r>
-              <a:rPr lang="en-US" sz="1350" b="1" dirty="0">
+              <a:rPr lang="en-US" sz="1550" b="1" dirty="0">
                 <a:solidFill>
                   <a:srgbClr val="1C0F07"/>
                 </a:solidFill>
@@ -7273,7 +7117,7 @@
               </a:rPr>
               <a:t>Announcements</a:t>
             </a:r>
-            <a:endParaRPr lang="en-US" sz="1350" dirty="0"/>
+            <a:endParaRPr lang="en-US" sz="1550" dirty="0"/>
           </a:p>
         </p:txBody>
       </p:sp>
@@ -7285,8 +7129,8 @@
         </p:nvSpPr>
         <p:spPr>
           <a:xfrm>
-            <a:off x="594360" y="2414016"/>
-            <a:ext cx="2304288" cy="256032"/>
+            <a:off x="548640" y="2578608"/>
+            <a:ext cx="2395728" cy="274320"/>
           </a:xfrm>
           <a:prstGeom prst="rect">
             <a:avLst/>
@@ -7302,14 +7146,14 @@
               <a:buNone/>
             </a:pPr>
             <a:r>
-              <a:rPr lang="en-US" sz="1050" dirty="0">
+              <a:rPr lang="en-US" sz="1250" dirty="0">
                 <a:solidFill>
                   <a:srgbClr val="7A5535"/>
                 </a:solidFill>
               </a:rPr>
               <a:t>ማስታወቂያዎች</a:t>
             </a:r>
-            <a:endParaRPr lang="en-US" sz="1050" dirty="0"/>
+            <a:endParaRPr lang="en-US" sz="1250" dirty="0"/>
           </a:p>
         </p:txBody>
       </p:sp>
@@ -7321,18 +7165,18 @@
         </p:nvSpPr>
         <p:spPr>
           <a:xfrm>
-            <a:off x="3232404" y="1371600"/>
-            <a:ext cx="2487168" cy="1389888"/>
+            <a:off x="3209544" y="1389888"/>
+            <a:ext cx="2542032" cy="1591056"/>
           </a:xfrm>
           <a:prstGeom prst="roundRect">
             <a:avLst>
-              <a:gd name="adj" fmla="val 6579"/>
+              <a:gd name="adj" fmla="val 6322"/>
             </a:avLst>
           </a:prstGeom>
           <a:solidFill>
             <a:srgbClr val="FFFFFF"/>
           </a:solidFill>
-          <a:ln w="15875">
+          <a:ln w="19050">
             <a:solidFill>
               <a:srgbClr val="C9A84C"/>
             </a:solidFill>
@@ -7355,8 +7199,8 @@
         </p:nvSpPr>
         <p:spPr>
           <a:xfrm>
-            <a:off x="4210812" y="1527048"/>
-            <a:ext cx="530352" cy="530352"/>
+            <a:off x="4142232" y="1545336"/>
+            <a:ext cx="676656" cy="676656"/>
           </a:xfrm>
           <a:prstGeom prst="ellipse">
             <a:avLst/>
@@ -7388,8 +7232,8 @@
         </p:blipFill>
         <p:spPr>
           <a:xfrm>
-            <a:off x="4300972" y="1617208"/>
-            <a:ext cx="350032" cy="350032"/>
+            <a:off x="4270797" y="1673901"/>
+            <a:ext cx="419527" cy="419527"/>
           </a:xfrm>
           <a:prstGeom prst="rect">
             <a:avLst/>
@@ -7404,8 +7248,8 @@
         </p:nvSpPr>
         <p:spPr>
           <a:xfrm>
-            <a:off x="3323844" y="2139696"/>
-            <a:ext cx="2304288" cy="292608"/>
+            <a:off x="3282696" y="2286000"/>
+            <a:ext cx="2395728" cy="310896"/>
           </a:xfrm>
           <a:prstGeom prst="rect">
             <a:avLst/>
@@ -7421,7 +7265,7 @@
               <a:buNone/>
             </a:pPr>
             <a:r>
-              <a:rPr lang="en-US" sz="1350" b="1" dirty="0">
+              <a:rPr lang="en-US" sz="1550" b="1" dirty="0">
                 <a:solidFill>
                   <a:srgbClr val="1C0F07"/>
                 </a:solidFill>
@@ -7431,7 +7275,7 @@
               </a:rPr>
               <a:t>Events</a:t>
             </a:r>
-            <a:endParaRPr lang="en-US" sz="1350" dirty="0"/>
+            <a:endParaRPr lang="en-US" sz="1550" dirty="0"/>
           </a:p>
         </p:txBody>
       </p:sp>
@@ -7443,8 +7287,8 @@
         </p:nvSpPr>
         <p:spPr>
           <a:xfrm>
-            <a:off x="3323844" y="2414016"/>
-            <a:ext cx="2304288" cy="256032"/>
+            <a:off x="3282696" y="2578608"/>
+            <a:ext cx="2395728" cy="274320"/>
           </a:xfrm>
           <a:prstGeom prst="rect">
             <a:avLst/>
@@ -7460,14 +7304,14 @@
               <a:buNone/>
             </a:pPr>
             <a:r>
-              <a:rPr lang="en-US" sz="1050" dirty="0">
+              <a:rPr lang="en-US" sz="1250" dirty="0">
                 <a:solidFill>
                   <a:srgbClr val="7A5535"/>
                 </a:solidFill>
               </a:rPr>
               <a:t>ዝግጅቶች</a:t>
             </a:r>
-            <a:endParaRPr lang="en-US" sz="1050" dirty="0"/>
+            <a:endParaRPr lang="en-US" sz="1250" dirty="0"/>
           </a:p>
         </p:txBody>
       </p:sp>
@@ -7479,18 +7323,18 @@
         </p:nvSpPr>
         <p:spPr>
           <a:xfrm>
-            <a:off x="5961888" y="1371600"/>
-            <a:ext cx="2487168" cy="1389888"/>
+            <a:off x="5943600" y="1389888"/>
+            <a:ext cx="2542032" cy="1591056"/>
           </a:xfrm>
           <a:prstGeom prst="roundRect">
             <a:avLst>
-              <a:gd name="adj" fmla="val 6579"/>
+              <a:gd name="adj" fmla="val 6322"/>
             </a:avLst>
           </a:prstGeom>
           <a:solidFill>
             <a:srgbClr val="FFFFFF"/>
           </a:solidFill>
-          <a:ln w="15875">
+          <a:ln w="19050">
             <a:solidFill>
               <a:srgbClr val="C9A84C"/>
             </a:solidFill>
@@ -7513,8 +7357,8 @@
         </p:nvSpPr>
         <p:spPr>
           <a:xfrm>
-            <a:off x="6940296" y="1527048"/>
-            <a:ext cx="530352" cy="530352"/>
+            <a:off x="6876288" y="1545336"/>
+            <a:ext cx="676656" cy="676656"/>
           </a:xfrm>
           <a:prstGeom prst="ellipse">
             <a:avLst/>
@@ -7546,8 +7390,8 @@
         </p:blipFill>
         <p:spPr>
           <a:xfrm>
-            <a:off x="7030456" y="1617208"/>
-            <a:ext cx="350032" cy="350032"/>
+            <a:off x="7004853" y="1673901"/>
+            <a:ext cx="419527" cy="419527"/>
           </a:xfrm>
           <a:prstGeom prst="rect">
             <a:avLst/>
@@ -7562,8 +7406,8 @@
         </p:nvSpPr>
         <p:spPr>
           <a:xfrm>
-            <a:off x="6053328" y="2139696"/>
-            <a:ext cx="2304288" cy="292608"/>
+            <a:off x="6016752" y="2286000"/>
+            <a:ext cx="2395728" cy="310896"/>
           </a:xfrm>
           <a:prstGeom prst="rect">
             <a:avLst/>
@@ -7579,7 +7423,7 @@
               <a:buNone/>
             </a:pPr>
             <a:r>
-              <a:rPr lang="en-US" sz="1350" b="1" dirty="0">
+              <a:rPr lang="en-US" sz="1550" b="1" dirty="0">
                 <a:solidFill>
                   <a:srgbClr val="1C0F07"/>
                 </a:solidFill>
@@ -7589,7 +7433,7 @@
               </a:rPr>
               <a:t>BUS Groups</a:t>
             </a:r>
-            <a:endParaRPr lang="en-US" sz="1350" dirty="0"/>
+            <a:endParaRPr lang="en-US" sz="1550" dirty="0"/>
           </a:p>
         </p:txBody>
       </p:sp>
@@ -7601,8 +7445,8 @@
         </p:nvSpPr>
         <p:spPr>
           <a:xfrm>
-            <a:off x="6053328" y="2414016"/>
-            <a:ext cx="2304288" cy="256032"/>
+            <a:off x="6016752" y="2578608"/>
+            <a:ext cx="2395728" cy="274320"/>
           </a:xfrm>
           <a:prstGeom prst="rect">
             <a:avLst/>
@@ -7618,14 +7462,14 @@
               <a:buNone/>
             </a:pPr>
             <a:r>
-              <a:rPr lang="en-US" sz="1050" dirty="0">
+              <a:rPr lang="en-US" sz="1250" dirty="0">
                 <a:solidFill>
                   <a:srgbClr val="7A5535"/>
                 </a:solidFill>
               </a:rPr>
               <a:t>BUS ቡድኖች</a:t>
             </a:r>
-            <a:endParaRPr lang="en-US" sz="1050" dirty="0"/>
+            <a:endParaRPr lang="en-US" sz="1250" dirty="0"/>
           </a:p>
         </p:txBody>
       </p:sp>
@@ -7637,18 +7481,18 @@
         </p:nvSpPr>
         <p:spPr>
           <a:xfrm>
-            <a:off x="502920" y="2944368"/>
-            <a:ext cx="2487168" cy="1389888"/>
+            <a:off x="475488" y="3127248"/>
+            <a:ext cx="2542032" cy="1591056"/>
           </a:xfrm>
           <a:prstGeom prst="roundRect">
             <a:avLst>
-              <a:gd name="adj" fmla="val 6579"/>
+              <a:gd name="adj" fmla="val 6322"/>
             </a:avLst>
           </a:prstGeom>
           <a:solidFill>
             <a:srgbClr val="FFFFFF"/>
           </a:solidFill>
-          <a:ln w="15875">
+          <a:ln w="19050">
             <a:solidFill>
               <a:srgbClr val="C9A84C"/>
             </a:solidFill>
@@ -7671,8 +7515,8 @@
         </p:nvSpPr>
         <p:spPr>
           <a:xfrm>
-            <a:off x="1481328" y="3099816"/>
-            <a:ext cx="530352" cy="530352"/>
+            <a:off x="1408176" y="3282696"/>
+            <a:ext cx="676656" cy="676656"/>
           </a:xfrm>
           <a:prstGeom prst="ellipse">
             <a:avLst/>
@@ -7704,8 +7548,8 @@
         </p:blipFill>
         <p:spPr>
           <a:xfrm>
-            <a:off x="1571488" y="3189976"/>
-            <a:ext cx="350032" cy="350032"/>
+            <a:off x="1536741" y="3411261"/>
+            <a:ext cx="419527" cy="419527"/>
           </a:xfrm>
           <a:prstGeom prst="rect">
             <a:avLst/>
@@ -7720,8 +7564,8 @@
         </p:nvSpPr>
         <p:spPr>
           <a:xfrm>
-            <a:off x="594360" y="3712464"/>
-            <a:ext cx="2304288" cy="292608"/>
+            <a:off x="548640" y="4023360"/>
+            <a:ext cx="2395728" cy="310896"/>
           </a:xfrm>
           <a:prstGeom prst="rect">
             <a:avLst/>
@@ -7737,7 +7581,7 @@
               <a:buNone/>
             </a:pPr>
             <a:r>
-              <a:rPr lang="en-US" sz="1350" b="1" dirty="0">
+              <a:rPr lang="en-US" sz="1550" b="1" dirty="0">
                 <a:solidFill>
                   <a:srgbClr val="1C0F07"/>
                 </a:solidFill>
@@ -7747,7 +7591,7 @@
               </a:rPr>
               <a:t>Serving Teams</a:t>
             </a:r>
-            <a:endParaRPr lang="en-US" sz="1350" dirty="0"/>
+            <a:endParaRPr lang="en-US" sz="1550" dirty="0"/>
           </a:p>
         </p:txBody>
       </p:sp>
@@ -7759,8 +7603,8 @@
         </p:nvSpPr>
         <p:spPr>
           <a:xfrm>
-            <a:off x="594360" y="3986784"/>
-            <a:ext cx="2304288" cy="256032"/>
+            <a:off x="548640" y="4315968"/>
+            <a:ext cx="2395728" cy="274320"/>
           </a:xfrm>
           <a:prstGeom prst="rect">
             <a:avLst/>
@@ -7776,14 +7620,14 @@
               <a:buNone/>
             </a:pPr>
             <a:r>
-              <a:rPr lang="en-US" sz="1050" dirty="0">
+              <a:rPr lang="en-US" sz="1250" dirty="0">
                 <a:solidFill>
                   <a:srgbClr val="7A5535"/>
                 </a:solidFill>
               </a:rPr>
               <a:t>የአገልግሎት ቡድኖች</a:t>
             </a:r>
-            <a:endParaRPr lang="en-US" sz="1050" dirty="0"/>
+            <a:endParaRPr lang="en-US" sz="1250" dirty="0"/>
           </a:p>
         </p:txBody>
       </p:sp>
@@ -7795,18 +7639,18 @@
         </p:nvSpPr>
         <p:spPr>
           <a:xfrm>
-            <a:off x="3232404" y="2944368"/>
-            <a:ext cx="2487168" cy="1389888"/>
+            <a:off x="3209544" y="3127248"/>
+            <a:ext cx="2542032" cy="1591056"/>
           </a:xfrm>
           <a:prstGeom prst="roundRect">
             <a:avLst>
-              <a:gd name="adj" fmla="val 6579"/>
+              <a:gd name="adj" fmla="val 6322"/>
             </a:avLst>
           </a:prstGeom>
           <a:solidFill>
             <a:srgbClr val="FFFFFF"/>
           </a:solidFill>
-          <a:ln w="15875">
+          <a:ln w="19050">
             <a:solidFill>
               <a:srgbClr val="C9A84C"/>
             </a:solidFill>
@@ -7829,8 +7673,8 @@
         </p:nvSpPr>
         <p:spPr>
           <a:xfrm>
-            <a:off x="4210812" y="3099816"/>
-            <a:ext cx="530352" cy="530352"/>
+            <a:off x="4142232" y="3282696"/>
+            <a:ext cx="676656" cy="676656"/>
           </a:xfrm>
           <a:prstGeom prst="ellipse">
             <a:avLst/>
@@ -7862,8 +7706,8 @@
         </p:blipFill>
         <p:spPr>
           <a:xfrm>
-            <a:off x="4300972" y="3189976"/>
-            <a:ext cx="350032" cy="350032"/>
+            <a:off x="4270797" y="3411261"/>
+            <a:ext cx="419527" cy="419527"/>
           </a:xfrm>
           <a:prstGeom prst="rect">
             <a:avLst/>
@@ -7878,8 +7722,8 @@
         </p:nvSpPr>
         <p:spPr>
           <a:xfrm>
-            <a:off x="3323844" y="3712464"/>
-            <a:ext cx="2304288" cy="292608"/>
+            <a:off x="3282696" y="4023360"/>
+            <a:ext cx="2395728" cy="310896"/>
           </a:xfrm>
           <a:prstGeom prst="rect">
             <a:avLst/>
@@ -7895,7 +7739,7 @@
               <a:buNone/>
             </a:pPr>
             <a:r>
-              <a:rPr lang="en-US" sz="1350" b="1" dirty="0">
+              <a:rPr lang="en-US" sz="1550" b="1" dirty="0">
                 <a:solidFill>
                   <a:srgbClr val="1C0F07"/>
                 </a:solidFill>
@@ -7905,7 +7749,7 @@
               </a:rPr>
               <a:t>Library</a:t>
             </a:r>
-            <a:endParaRPr lang="en-US" sz="1350" dirty="0"/>
+            <a:endParaRPr lang="en-US" sz="1550" dirty="0"/>
           </a:p>
         </p:txBody>
       </p:sp>
@@ -7917,8 +7761,8 @@
         </p:nvSpPr>
         <p:spPr>
           <a:xfrm>
-            <a:off x="3323844" y="3986784"/>
-            <a:ext cx="2304288" cy="256032"/>
+            <a:off x="3282696" y="4315968"/>
+            <a:ext cx="2395728" cy="274320"/>
           </a:xfrm>
           <a:prstGeom prst="rect">
             <a:avLst/>
@@ -7934,14 +7778,14 @@
               <a:buNone/>
             </a:pPr>
             <a:r>
-              <a:rPr lang="en-US" sz="1050" dirty="0">
+              <a:rPr lang="en-US" sz="1250" dirty="0">
                 <a:solidFill>
                   <a:srgbClr val="7A5535"/>
                 </a:solidFill>
               </a:rPr>
               <a:t>ቤተ-መጻሕፍት</a:t>
             </a:r>
-            <a:endParaRPr lang="en-US" sz="1050" dirty="0"/>
+            <a:endParaRPr lang="en-US" sz="1250" dirty="0"/>
           </a:p>
         </p:txBody>
       </p:sp>
@@ -7953,18 +7797,18 @@
         </p:nvSpPr>
         <p:spPr>
           <a:xfrm>
-            <a:off x="5961888" y="2944368"/>
-            <a:ext cx="2487168" cy="1389888"/>
+            <a:off x="5943600" y="3127248"/>
+            <a:ext cx="2542032" cy="1591056"/>
           </a:xfrm>
           <a:prstGeom prst="roundRect">
             <a:avLst>
-              <a:gd name="adj" fmla="val 6579"/>
+              <a:gd name="adj" fmla="val 6322"/>
             </a:avLst>
           </a:prstGeom>
           <a:solidFill>
             <a:srgbClr val="FFFFFF"/>
           </a:solidFill>
-          <a:ln w="15875">
+          <a:ln w="19050">
             <a:solidFill>
               <a:srgbClr val="C9A84C"/>
             </a:solidFill>
@@ -7987,8 +7831,8 @@
         </p:nvSpPr>
         <p:spPr>
           <a:xfrm>
-            <a:off x="6940296" y="3099816"/>
-            <a:ext cx="530352" cy="530352"/>
+            <a:off x="6876288" y="3282696"/>
+            <a:ext cx="676656" cy="676656"/>
           </a:xfrm>
           <a:prstGeom prst="ellipse">
             <a:avLst/>
@@ -8020,8 +7864,8 @@
         </p:blipFill>
         <p:spPr>
           <a:xfrm>
-            <a:off x="7030456" y="3189976"/>
-            <a:ext cx="350032" cy="350032"/>
+            <a:off x="7004853" y="3411261"/>
+            <a:ext cx="419527" cy="419527"/>
           </a:xfrm>
           <a:prstGeom prst="rect">
             <a:avLst/>
@@ -8036,8 +7880,8 @@
         </p:nvSpPr>
         <p:spPr>
           <a:xfrm>
-            <a:off x="6053328" y="3712464"/>
-            <a:ext cx="2304288" cy="292608"/>
+            <a:off x="6016752" y="4023360"/>
+            <a:ext cx="2395728" cy="310896"/>
           </a:xfrm>
           <a:prstGeom prst="rect">
             <a:avLst/>
@@ -8053,7 +7897,7 @@
               <a:buNone/>
             </a:pPr>
             <a:r>
-              <a:rPr lang="en-US" sz="1350" b="1" dirty="0">
+              <a:rPr lang="en-US" sz="1550" b="1" dirty="0">
                 <a:solidFill>
                   <a:srgbClr val="1C0F07"/>
                 </a:solidFill>
@@ -8063,7 +7907,7 @@
               </a:rPr>
               <a:t>Notifications</a:t>
             </a:r>
-            <a:endParaRPr lang="en-US" sz="1350" dirty="0"/>
+            <a:endParaRPr lang="en-US" sz="1550" dirty="0"/>
           </a:p>
         </p:txBody>
       </p:sp>
@@ -8075,8 +7919,8 @@
         </p:nvSpPr>
         <p:spPr>
           <a:xfrm>
-            <a:off x="6053328" y="3986784"/>
-            <a:ext cx="2304288" cy="256032"/>
+            <a:off x="6016752" y="4315968"/>
+            <a:ext cx="2395728" cy="274320"/>
           </a:xfrm>
           <a:prstGeom prst="rect">
             <a:avLst/>
@@ -8092,14 +7936,14 @@
               <a:buNone/>
             </a:pPr>
             <a:r>
-              <a:rPr lang="en-US" sz="1050" dirty="0">
+              <a:rPr lang="en-US" sz="1250" dirty="0">
                 <a:solidFill>
                   <a:srgbClr val="7A5535"/>
                 </a:solidFill>
               </a:rPr>
               <a:t>ማሳወቂያዎች</a:t>
             </a:r>
-            <a:endParaRPr lang="en-US" sz="1050" dirty="0"/>
+            <a:endParaRPr lang="en-US" sz="1250" dirty="0"/>
           </a:p>
         </p:txBody>
       </p:sp>
@@ -8144,7 +7988,7 @@
         <p:spPr>
           <a:xfrm>
             <a:off x="502920" y="274320"/>
-            <a:ext cx="8138160" cy="566928"/>
+            <a:ext cx="8138160" cy="603504"/>
           </a:xfrm>
           <a:prstGeom prst="rect">
             <a:avLst/>
@@ -8160,7 +8004,7 @@
               <a:buNone/>
             </a:pPr>
             <a:r>
-              <a:rPr lang="en-US" sz="3200" b="1" dirty="0">
+              <a:rPr lang="en-US" sz="3400" b="1" dirty="0">
                 <a:solidFill>
                   <a:srgbClr val="1C0F07"/>
                 </a:solidFill>
@@ -8170,7 +8014,7 @@
               </a:rPr>
               <a:t>Stay in the Loop</a:t>
             </a:r>
-            <a:endParaRPr lang="en-US" sz="3200" dirty="0"/>
+            <a:endParaRPr lang="en-US" sz="3400" dirty="0"/>
           </a:p>
         </p:txBody>
       </p:sp>
@@ -8182,8 +8026,8 @@
         </p:nvSpPr>
         <p:spPr>
           <a:xfrm>
-            <a:off x="502920" y="804672"/>
-            <a:ext cx="8138160" cy="347472"/>
+            <a:off x="502920" y="841248"/>
+            <a:ext cx="8138160" cy="365760"/>
           </a:xfrm>
           <a:prstGeom prst="rect">
             <a:avLst/>
@@ -8199,14 +8043,14 @@
               <a:buNone/>
             </a:pPr>
             <a:r>
-              <a:rPr lang="en-US" sz="1700" dirty="0">
+              <a:rPr lang="en-US" sz="1900" dirty="0">
                 <a:solidFill>
                   <a:srgbClr val="7A5535"/>
                 </a:solidFill>
               </a:rPr>
               <a:t>ዜናዎችን ይከታተሉ</a:t>
             </a:r>
-            <a:endParaRPr lang="en-US" sz="1700" dirty="0"/>
+            <a:endParaRPr lang="en-US" sz="1900" dirty="0"/>
           </a:p>
         </p:txBody>
       </p:sp>
@@ -8218,18 +8062,18 @@
         </p:nvSpPr>
         <p:spPr>
           <a:xfrm>
-            <a:off x="502920" y="1371600"/>
-            <a:ext cx="3931920" cy="3063240"/>
+            <a:off x="502920" y="1426464"/>
+            <a:ext cx="3931920" cy="3017520"/>
           </a:xfrm>
           <a:prstGeom prst="roundRect">
             <a:avLst>
-              <a:gd name="adj" fmla="val 2985"/>
+              <a:gd name="adj" fmla="val 3333"/>
             </a:avLst>
           </a:prstGeom>
           <a:solidFill>
             <a:srgbClr val="1C0F07"/>
           </a:solidFill>
-          <a:ln w="12700">
+          <a:ln w="15875">
             <a:solidFill>
               <a:srgbClr val="C9A84C"/>
             </a:solidFill>
@@ -8245,8 +8089,8 @@
         </p:nvSpPr>
         <p:spPr>
           <a:xfrm>
-            <a:off x="2167128" y="1609344"/>
-            <a:ext cx="603504" cy="603504"/>
+            <a:off x="2066544" y="1645920"/>
+            <a:ext cx="804672" cy="804672"/>
           </a:xfrm>
           <a:prstGeom prst="ellipse">
             <a:avLst/>
@@ -8278,8 +8122,8 @@
         </p:blipFill>
         <p:spPr>
           <a:xfrm>
-            <a:off x="2269724" y="1711940"/>
-            <a:ext cx="398313" cy="398313"/>
+            <a:off x="2219432" y="1798808"/>
+            <a:ext cx="498897" cy="498897"/>
           </a:xfrm>
           <a:prstGeom prst="rect">
             <a:avLst/>
@@ -8294,8 +8138,8 @@
         </p:nvSpPr>
         <p:spPr>
           <a:xfrm>
-            <a:off x="594360" y="2304288"/>
-            <a:ext cx="3749040" cy="329184"/>
+            <a:off x="594360" y="2542032"/>
+            <a:ext cx="3749040" cy="365760"/>
           </a:xfrm>
           <a:prstGeom prst="rect">
             <a:avLst/>
@@ -8311,7 +8155,7 @@
               <a:buNone/>
             </a:pPr>
             <a:r>
-              <a:rPr lang="en-US" sz="1600" b="1" dirty="0">
+              <a:rPr lang="en-US" sz="1800" b="1" dirty="0">
                 <a:solidFill>
                   <a:srgbClr val="C9A84C"/>
                 </a:solidFill>
@@ -8321,7 +8165,7 @@
               </a:rPr>
               <a:t>Announcements</a:t>
             </a:r>
-            <a:endParaRPr lang="en-US" sz="1600" dirty="0"/>
+            <a:endParaRPr lang="en-US" sz="1800" dirty="0"/>
           </a:p>
         </p:txBody>
       </p:sp>
@@ -8333,8 +8177,8 @@
         </p:nvSpPr>
         <p:spPr>
           <a:xfrm>
-            <a:off x="594360" y="2624328"/>
-            <a:ext cx="3749040" cy="274320"/>
+            <a:off x="594360" y="2907792"/>
+            <a:ext cx="3749040" cy="310896"/>
           </a:xfrm>
           <a:prstGeom prst="rect">
             <a:avLst/>
@@ -8350,14 +8194,14 @@
               <a:buNone/>
             </a:pPr>
             <a:r>
-              <a:rPr lang="en-US" sz="1200" dirty="0">
+              <a:rPr lang="en-US" sz="1400" dirty="0">
                 <a:solidFill>
                   <a:srgbClr val="FAF7F0"/>
                 </a:solidFill>
               </a:rPr>
               <a:t>ማስታወቂያዎች</a:t>
             </a:r>
-            <a:endParaRPr lang="en-US" sz="1200" dirty="0"/>
+            <a:endParaRPr lang="en-US" sz="1400" dirty="0"/>
           </a:p>
         </p:txBody>
       </p:sp>
@@ -8369,8 +8213,8 @@
         </p:nvSpPr>
         <p:spPr>
           <a:xfrm>
-            <a:off x="777240" y="3035808"/>
-            <a:ext cx="3429000" cy="329184"/>
+            <a:off x="886968" y="3328416"/>
+            <a:ext cx="3291840" cy="329184"/>
           </a:xfrm>
           <a:prstGeom prst="rect">
             <a:avLst/>
@@ -8386,7 +8230,7 @@
               <a:buNone/>
             </a:pPr>
             <a:r>
-              <a:rPr lang="en-US" sz="1150" dirty="0">
+              <a:rPr lang="en-US" sz="1350" dirty="0">
                 <a:solidFill>
                   <a:srgbClr val="FAF7F0"/>
                 </a:solidFill>
@@ -8394,9 +8238,9 @@
                 <a:ea typeface="Calibri" pitchFamily="34" charset="-122"/>
                 <a:cs typeface="Calibri" pitchFamily="34" charset="-120"/>
               </a:rPr>
-              <a:t>·  Posted by leaders, seen by everyone</a:t>
-            </a:r>
-            <a:endParaRPr lang="en-US" sz="1150" dirty="0"/>
+              <a:t>·  Posted by leaders</a:t>
+            </a:r>
+            <a:endParaRPr lang="en-US" sz="1350" dirty="0"/>
           </a:p>
         </p:txBody>
       </p:sp>
@@ -8408,8 +8252,8 @@
         </p:nvSpPr>
         <p:spPr>
           <a:xfrm>
-            <a:off x="777240" y="3419856"/>
-            <a:ext cx="3429000" cy="329184"/>
+            <a:off x="886968" y="3694176"/>
+            <a:ext cx="3291840" cy="329184"/>
           </a:xfrm>
           <a:prstGeom prst="rect">
             <a:avLst/>
@@ -8425,7 +8269,7 @@
               <a:buNone/>
             </a:pPr>
             <a:r>
-              <a:rPr lang="en-US" sz="1150" dirty="0">
+              <a:rPr lang="en-US" sz="1350" dirty="0">
                 <a:solidFill>
                   <a:srgbClr val="FAF7F0"/>
                 </a:solidFill>
@@ -8433,9 +8277,9 @@
                 <a:ea typeface="Calibri" pitchFamily="34" charset="-122"/>
                 <a:cs typeface="Calibri" pitchFamily="34" charset="-120"/>
               </a:rPr>
-              <a:t>·  Prayer requests and praise reports</a:t>
-            </a:r>
-            <a:endParaRPr lang="en-US" sz="1150" dirty="0"/>
+              <a:t>·  Prayer and praise</a:t>
+            </a:r>
+            <a:endParaRPr lang="en-US" sz="1350" dirty="0"/>
           </a:p>
         </p:txBody>
       </p:sp>
@@ -8447,8 +8291,8 @@
         </p:nvSpPr>
         <p:spPr>
           <a:xfrm>
-            <a:off x="777240" y="3803904"/>
-            <a:ext cx="3429000" cy="329184"/>
+            <a:off x="886968" y="4059936"/>
+            <a:ext cx="3291840" cy="329184"/>
           </a:xfrm>
           <a:prstGeom prst="rect">
             <a:avLst/>
@@ -8464,7 +8308,7 @@
               <a:buNone/>
             </a:pPr>
             <a:r>
-              <a:rPr lang="en-US" sz="1150" dirty="0">
+              <a:rPr lang="en-US" sz="1350" dirty="0">
                 <a:solidFill>
                   <a:srgbClr val="FAF7F0"/>
                 </a:solidFill>
@@ -8472,9 +8316,9 @@
                 <a:ea typeface="Calibri" pitchFamily="34" charset="-122"/>
                 <a:cs typeface="Calibri" pitchFamily="34" charset="-120"/>
               </a:rPr>
-              <a:t>·  Arrives on your phone right away</a:t>
-            </a:r>
-            <a:endParaRPr lang="en-US" sz="1150" dirty="0"/>
+              <a:t>·  Reaches you at once</a:t>
+            </a:r>
+            <a:endParaRPr lang="en-US" sz="1350" dirty="0"/>
           </a:p>
         </p:txBody>
       </p:sp>
@@ -8486,18 +8330,18 @@
         </p:nvSpPr>
         <p:spPr>
           <a:xfrm>
-            <a:off x="4709160" y="1371600"/>
-            <a:ext cx="3931920" cy="3063240"/>
+            <a:off x="4709160" y="1426464"/>
+            <a:ext cx="3931920" cy="3017520"/>
           </a:xfrm>
           <a:prstGeom prst="roundRect">
             <a:avLst>
-              <a:gd name="adj" fmla="val 2985"/>
+              <a:gd name="adj" fmla="val 3333"/>
             </a:avLst>
           </a:prstGeom>
           <a:solidFill>
             <a:srgbClr val="1C0F07"/>
           </a:solidFill>
-          <a:ln w="12700">
+          <a:ln w="15875">
             <a:solidFill>
               <a:srgbClr val="C9A84C"/>
             </a:solidFill>
@@ -8513,8 +8357,8 @@
         </p:nvSpPr>
         <p:spPr>
           <a:xfrm>
-            <a:off x="6373368" y="1609344"/>
-            <a:ext cx="603504" cy="603504"/>
+            <a:off x="6272784" y="1645920"/>
+            <a:ext cx="804672" cy="804672"/>
           </a:xfrm>
           <a:prstGeom prst="ellipse">
             <a:avLst/>
@@ -8546,8 +8390,8 @@
         </p:blipFill>
         <p:spPr>
           <a:xfrm>
-            <a:off x="6475964" y="1711940"/>
-            <a:ext cx="398313" cy="398313"/>
+            <a:off x="6425672" y="1798808"/>
+            <a:ext cx="498897" cy="498897"/>
           </a:xfrm>
           <a:prstGeom prst="rect">
             <a:avLst/>
@@ -8562,8 +8406,8 @@
         </p:nvSpPr>
         <p:spPr>
           <a:xfrm>
-            <a:off x="4800600" y="2304288"/>
-            <a:ext cx="3749040" cy="329184"/>
+            <a:off x="4800600" y="2542032"/>
+            <a:ext cx="3749040" cy="365760"/>
           </a:xfrm>
           <a:prstGeom prst="rect">
             <a:avLst/>
@@ -8579,7 +8423,7 @@
               <a:buNone/>
             </a:pPr>
             <a:r>
-              <a:rPr lang="en-US" sz="1600" b="1" dirty="0">
+              <a:rPr lang="en-US" sz="1800" b="1" dirty="0">
                 <a:solidFill>
                   <a:srgbClr val="C9A84C"/>
                 </a:solidFill>
@@ -8589,7 +8433,7 @@
               </a:rPr>
               <a:t>Events</a:t>
             </a:r>
-            <a:endParaRPr lang="en-US" sz="1600" dirty="0"/>
+            <a:endParaRPr lang="en-US" sz="1800" dirty="0"/>
           </a:p>
         </p:txBody>
       </p:sp>
@@ -8601,8 +8445,8 @@
         </p:nvSpPr>
         <p:spPr>
           <a:xfrm>
-            <a:off x="4800600" y="2624328"/>
-            <a:ext cx="3749040" cy="274320"/>
+            <a:off x="4800600" y="2907792"/>
+            <a:ext cx="3749040" cy="310896"/>
           </a:xfrm>
           <a:prstGeom prst="rect">
             <a:avLst/>
@@ -8618,14 +8462,14 @@
               <a:buNone/>
             </a:pPr>
             <a:r>
-              <a:rPr lang="en-US" sz="1200" dirty="0">
+              <a:rPr lang="en-US" sz="1400" dirty="0">
                 <a:solidFill>
                   <a:srgbClr val="FAF7F0"/>
                 </a:solidFill>
               </a:rPr>
               <a:t>ዝግጅቶች</a:t>
             </a:r>
-            <a:endParaRPr lang="en-US" sz="1200" dirty="0"/>
+            <a:endParaRPr lang="en-US" sz="1400" dirty="0"/>
           </a:p>
         </p:txBody>
       </p:sp>
@@ -8637,8 +8481,8 @@
         </p:nvSpPr>
         <p:spPr>
           <a:xfrm>
-            <a:off x="4983480" y="3035808"/>
-            <a:ext cx="3429000" cy="329184"/>
+            <a:off x="5093208" y="3328416"/>
+            <a:ext cx="3291840" cy="329184"/>
           </a:xfrm>
           <a:prstGeom prst="rect">
             <a:avLst/>
@@ -8654,7 +8498,7 @@
               <a:buNone/>
             </a:pPr>
             <a:r>
-              <a:rPr lang="en-US" sz="1150" dirty="0">
+              <a:rPr lang="en-US" sz="1350" dirty="0">
                 <a:solidFill>
                   <a:srgbClr val="FAF7F0"/>
                 </a:solidFill>
@@ -8662,9 +8506,9 @@
                 <a:ea typeface="Calibri" pitchFamily="34" charset="-122"/>
                 <a:cs typeface="Calibri" pitchFamily="34" charset="-120"/>
               </a:rPr>
-              <a:t>·  Every event has its own page</a:t>
-            </a:r>
-            <a:endParaRPr lang="en-US" sz="1150" dirty="0"/>
+              <a:t>·  Each has its own page</a:t>
+            </a:r>
+            <a:endParaRPr lang="en-US" sz="1350" dirty="0"/>
           </a:p>
         </p:txBody>
       </p:sp>
@@ -8676,8 +8520,8 @@
         </p:nvSpPr>
         <p:spPr>
           <a:xfrm>
-            <a:off x="4983480" y="3419856"/>
-            <a:ext cx="3429000" cy="329184"/>
+            <a:off x="5093208" y="3694176"/>
+            <a:ext cx="3291840" cy="329184"/>
           </a:xfrm>
           <a:prstGeom prst="rect">
             <a:avLst/>
@@ -8693,7 +8537,7 @@
               <a:buNone/>
             </a:pPr>
             <a:r>
-              <a:rPr lang="en-US" sz="1150" dirty="0">
+              <a:rPr lang="en-US" sz="1350" dirty="0">
                 <a:solidFill>
                   <a:srgbClr val="FAF7F0"/>
                 </a:solidFill>
@@ -8701,9 +8545,9 @@
                 <a:ea typeface="Calibri" pitchFamily="34" charset="-122"/>
                 <a:cs typeface="Calibri" pitchFamily="34" charset="-120"/>
               </a:rPr>
-              <a:t>·  Photos, video and the full details</a:t>
-            </a:r>
-            <a:endParaRPr lang="en-US" sz="1150" dirty="0"/>
+              <a:t>·  Photos and video</a:t>
+            </a:r>
+            <a:endParaRPr lang="en-US" sz="1350" dirty="0"/>
           </a:p>
         </p:txBody>
       </p:sp>
@@ -8715,8 +8559,8 @@
         </p:nvSpPr>
         <p:spPr>
           <a:xfrm>
-            <a:off x="4983480" y="3803904"/>
-            <a:ext cx="3429000" cy="329184"/>
+            <a:off x="5093208" y="4059936"/>
+            <a:ext cx="3291840" cy="329184"/>
           </a:xfrm>
           <a:prstGeom prst="rect">
             <a:avLst/>
@@ -8732,7 +8576,7 @@
               <a:buNone/>
             </a:pPr>
             <a:r>
-              <a:rPr lang="en-US" sz="1150" dirty="0">
+              <a:rPr lang="en-US" sz="1350" dirty="0">
                 <a:solidFill>
                   <a:srgbClr val="FAF7F0"/>
                 </a:solidFill>
@@ -8740,9 +8584,9 @@
                 <a:ea typeface="Calibri" pitchFamily="34" charset="-122"/>
                 <a:cs typeface="Calibri" pitchFamily="34" charset="-120"/>
               </a:rPr>
-              <a:t>·  A reminder the day before</a:t>
-            </a:r>
-            <a:endParaRPr lang="en-US" sz="1150" dirty="0"/>
+              <a:t>·  Reminder the day before</a:t>
+            </a:r>
+            <a:endParaRPr lang="en-US" sz="1350" dirty="0"/>
           </a:p>
         </p:txBody>
       </p:sp>
@@ -8787,7 +8631,7 @@
         <p:spPr>
           <a:xfrm>
             <a:off x="457200" y="274320"/>
-            <a:ext cx="8229600" cy="566928"/>
+            <a:ext cx="8229600" cy="603504"/>
           </a:xfrm>
           <a:prstGeom prst="rect">
             <a:avLst/>
@@ -8803,7 +8647,7 @@
               <a:buNone/>
             </a:pPr>
             <a:r>
-              <a:rPr lang="en-US" sz="3200" b="1" dirty="0">
+              <a:rPr lang="en-US" sz="3400" b="1" dirty="0">
                 <a:solidFill>
                   <a:srgbClr val="C9A84C"/>
                 </a:solidFill>
@@ -8813,7 +8657,7 @@
               </a:rPr>
               <a:t>BUS Groups</a:t>
             </a:r>
-            <a:endParaRPr lang="en-US" sz="3200" dirty="0"/>
+            <a:endParaRPr lang="en-US" sz="3400" dirty="0"/>
           </a:p>
         </p:txBody>
       </p:sp>
@@ -8825,8 +8669,8 @@
         </p:nvSpPr>
         <p:spPr>
           <a:xfrm>
-            <a:off x="457200" y="804672"/>
-            <a:ext cx="8229600" cy="347472"/>
+            <a:off x="457200" y="841248"/>
+            <a:ext cx="8229600" cy="365760"/>
           </a:xfrm>
           <a:prstGeom prst="rect">
             <a:avLst/>
@@ -8842,14 +8686,14 @@
               <a:buNone/>
             </a:pPr>
             <a:r>
-              <a:rPr lang="en-US" sz="1700" dirty="0">
+              <a:rPr lang="en-US" sz="1900" dirty="0">
                 <a:solidFill>
                   <a:srgbClr val="FAF7F0"/>
                 </a:solidFill>
               </a:rPr>
               <a:t>BUS ቡድኖች</a:t>
             </a:r>
-            <a:endParaRPr lang="en-US" sz="1700" dirty="0"/>
+            <a:endParaRPr lang="en-US" sz="1900" dirty="0"/>
           </a:p>
         </p:txBody>
       </p:sp>
@@ -8861,18 +8705,18 @@
         </p:nvSpPr>
         <p:spPr>
           <a:xfrm>
-            <a:off x="502920" y="1627632"/>
-            <a:ext cx="2560320" cy="2743200"/>
+            <a:off x="475488" y="1664208"/>
+            <a:ext cx="2606040" cy="2697480"/>
           </a:xfrm>
           <a:prstGeom prst="roundRect">
             <a:avLst>
-              <a:gd name="adj" fmla="val 2857"/>
+              <a:gd name="adj" fmla="val 3509"/>
             </a:avLst>
           </a:prstGeom>
           <a:solidFill>
             <a:srgbClr val="2B1508"/>
           </a:solidFill>
-          <a:ln w="12700">
+          <a:ln w="15875">
             <a:solidFill>
               <a:srgbClr val="C9A84C"/>
             </a:solidFill>
@@ -8888,8 +8732,8 @@
         </p:nvSpPr>
         <p:spPr>
           <a:xfrm>
-            <a:off x="1481328" y="1865376"/>
-            <a:ext cx="603504" cy="603504"/>
+            <a:off x="1376172" y="1901952"/>
+            <a:ext cx="804672" cy="804672"/>
           </a:xfrm>
           <a:prstGeom prst="ellipse">
             <a:avLst/>
@@ -8921,8 +8765,8 @@
         </p:blipFill>
         <p:spPr>
           <a:xfrm>
-            <a:off x="1583924" y="1967972"/>
-            <a:ext cx="398313" cy="398313"/>
+            <a:off x="1529060" y="2054840"/>
+            <a:ext cx="498897" cy="498897"/>
           </a:xfrm>
           <a:prstGeom prst="rect">
             <a:avLst/>
@@ -8937,8 +8781,8 @@
         </p:nvSpPr>
         <p:spPr>
           <a:xfrm>
-            <a:off x="594360" y="2578608"/>
-            <a:ext cx="2377440" cy="310896"/>
+            <a:off x="548640" y="2816352"/>
+            <a:ext cx="2459736" cy="347472"/>
           </a:xfrm>
           <a:prstGeom prst="rect">
             <a:avLst/>
@@ -8954,7 +8798,7 @@
               <a:buNone/>
             </a:pPr>
             <a:r>
-              <a:rPr lang="en-US" sz="1500" b="1" dirty="0">
+              <a:rPr lang="en-US" sz="1700" b="1" dirty="0">
                 <a:solidFill>
                   <a:srgbClr val="C9A84C"/>
                 </a:solidFill>
@@ -8964,7 +8808,7 @@
               </a:rPr>
               <a:t>Group Chat</a:t>
             </a:r>
-            <a:endParaRPr lang="en-US" sz="1500" dirty="0"/>
+            <a:endParaRPr lang="en-US" sz="1700" dirty="0"/>
           </a:p>
         </p:txBody>
       </p:sp>
@@ -8976,8 +8820,8 @@
         </p:nvSpPr>
         <p:spPr>
           <a:xfrm>
-            <a:off x="594360" y="2889504"/>
-            <a:ext cx="2377440" cy="274320"/>
+            <a:off x="548640" y="3163824"/>
+            <a:ext cx="2459736" cy="310896"/>
           </a:xfrm>
           <a:prstGeom prst="rect">
             <a:avLst/>
@@ -8993,14 +8837,14 @@
               <a:buNone/>
             </a:pPr>
             <a:r>
-              <a:rPr lang="en-US" sz="1150" dirty="0">
+              <a:rPr lang="en-US" sz="1400" dirty="0">
                 <a:solidFill>
                   <a:srgbClr val="FAF7F0"/>
                 </a:solidFill>
               </a:rPr>
               <a:t>የቡድን ውይይት</a:t>
             </a:r>
-            <a:endParaRPr lang="en-US" sz="1150" dirty="0"/>
+            <a:endParaRPr lang="en-US" sz="1400" dirty="0"/>
           </a:p>
         </p:txBody>
       </p:sp>
@@ -9012,8 +8856,8 @@
         </p:nvSpPr>
         <p:spPr>
           <a:xfrm>
-            <a:off x="640080" y="3273552"/>
-            <a:ext cx="2286000" cy="1097280"/>
+            <a:off x="603504" y="3529584"/>
+            <a:ext cx="2350008" cy="685800"/>
           </a:xfrm>
           <a:prstGeom prst="rect">
             <a:avLst/>
@@ -9029,7 +8873,7 @@
               <a:buNone/>
             </a:pPr>
             <a:r>
-              <a:rPr lang="en-US" sz="1100" dirty="0">
+              <a:rPr lang="en-US" sz="1350" dirty="0">
                 <a:solidFill>
                   <a:srgbClr val="EDD090"/>
                 </a:solidFill>
@@ -9037,9 +8881,9 @@
                 <a:ea typeface="Calibri" pitchFamily="34" charset="-122"/>
                 <a:cs typeface="Calibri" pitchFamily="34" charset="-120"/>
               </a:rPr>
-              <a:t>A private room for your group — share, ask, encourage</a:t>
-            </a:r>
-            <a:endParaRPr lang="en-US" sz="1100" dirty="0"/>
+              <a:t>A private room for your group</a:t>
+            </a:r>
+            <a:endParaRPr lang="en-US" sz="1350" dirty="0"/>
           </a:p>
         </p:txBody>
       </p:sp>
@@ -9051,18 +8895,18 @@
         </p:nvSpPr>
         <p:spPr>
           <a:xfrm>
-            <a:off x="3268980" y="1627632"/>
-            <a:ext cx="2560320" cy="2743200"/>
+            <a:off x="3255264" y="1664208"/>
+            <a:ext cx="2606040" cy="2697480"/>
           </a:xfrm>
           <a:prstGeom prst="roundRect">
             <a:avLst>
-              <a:gd name="adj" fmla="val 2857"/>
+              <a:gd name="adj" fmla="val 3509"/>
             </a:avLst>
           </a:prstGeom>
           <a:solidFill>
             <a:srgbClr val="2B1508"/>
           </a:solidFill>
-          <a:ln w="12700">
+          <a:ln w="15875">
             <a:solidFill>
               <a:srgbClr val="C9A84C"/>
             </a:solidFill>
@@ -9078,8 +8922,8 @@
         </p:nvSpPr>
         <p:spPr>
           <a:xfrm>
-            <a:off x="4247388" y="1865376"/>
-            <a:ext cx="603504" cy="603504"/>
+            <a:off x="4155948" y="1901952"/>
+            <a:ext cx="804672" cy="804672"/>
           </a:xfrm>
           <a:prstGeom prst="ellipse">
             <a:avLst/>
@@ -9111,8 +8955,8 @@
         </p:blipFill>
         <p:spPr>
           <a:xfrm>
-            <a:off x="4349984" y="1967972"/>
-            <a:ext cx="398313" cy="398313"/>
+            <a:off x="4308836" y="2054840"/>
+            <a:ext cx="498897" cy="498897"/>
           </a:xfrm>
           <a:prstGeom prst="rect">
             <a:avLst/>
@@ -9127,8 +8971,8 @@
         </p:nvSpPr>
         <p:spPr>
           <a:xfrm>
-            <a:off x="3360420" y="2578608"/>
-            <a:ext cx="2377440" cy="310896"/>
+            <a:off x="3328416" y="2816352"/>
+            <a:ext cx="2459736" cy="347472"/>
           </a:xfrm>
           <a:prstGeom prst="rect">
             <a:avLst/>
@@ -9144,7 +8988,7 @@
               <a:buNone/>
             </a:pPr>
             <a:r>
-              <a:rPr lang="en-US" sz="1500" b="1" dirty="0">
+              <a:rPr lang="en-US" sz="1700" b="1" dirty="0">
                 <a:solidFill>
                   <a:srgbClr val="C9A84C"/>
                 </a:solidFill>
@@ -9154,7 +8998,7 @@
               </a:rPr>
               <a:t>Video Meetings</a:t>
             </a:r>
-            <a:endParaRPr lang="en-US" sz="1500" dirty="0"/>
+            <a:endParaRPr lang="en-US" sz="1700" dirty="0"/>
           </a:p>
         </p:txBody>
       </p:sp>
@@ -9166,8 +9010,8 @@
         </p:nvSpPr>
         <p:spPr>
           <a:xfrm>
-            <a:off x="3360420" y="2889504"/>
-            <a:ext cx="2377440" cy="274320"/>
+            <a:off x="3328416" y="3163824"/>
+            <a:ext cx="2459736" cy="310896"/>
           </a:xfrm>
           <a:prstGeom prst="rect">
             <a:avLst/>
@@ -9183,14 +9027,14 @@
               <a:buNone/>
             </a:pPr>
             <a:r>
-              <a:rPr lang="en-US" sz="1150" dirty="0">
+              <a:rPr lang="en-US" sz="1400" dirty="0">
                 <a:solidFill>
                   <a:srgbClr val="FAF7F0"/>
                 </a:solidFill>
               </a:rPr>
               <a:t>ቪዲዮ ስብሰባ</a:t>
             </a:r>
-            <a:endParaRPr lang="en-US" sz="1150" dirty="0"/>
+            <a:endParaRPr lang="en-US" sz="1400" dirty="0"/>
           </a:p>
         </p:txBody>
       </p:sp>
@@ -9202,8 +9046,8 @@
         </p:nvSpPr>
         <p:spPr>
           <a:xfrm>
-            <a:off x="3406140" y="3273552"/>
-            <a:ext cx="2286000" cy="1097280"/>
+            <a:off x="3383280" y="3529584"/>
+            <a:ext cx="2350008" cy="685800"/>
           </a:xfrm>
           <a:prstGeom prst="rect">
             <a:avLst/>
@@ -9219,7 +9063,7 @@
               <a:buNone/>
             </a:pPr>
             <a:r>
-              <a:rPr lang="en-US" sz="1100" dirty="0">
+              <a:rPr lang="en-US" sz="1350" dirty="0">
                 <a:solidFill>
                   <a:srgbClr val="EDD090"/>
                 </a:solidFill>
@@ -9227,9 +9071,9 @@
                 <a:ea typeface="Calibri" pitchFamily="34" charset="-122"/>
                 <a:cs typeface="Calibri" pitchFamily="34" charset="-120"/>
               </a:rPr>
-              <a:t>One tap to meet when you cannot be in the same room</a:t>
-            </a:r>
-            <a:endParaRPr lang="en-US" sz="1100" dirty="0"/>
+              <a:t>One tap to meet from anywhere</a:t>
+            </a:r>
+            <a:endParaRPr lang="en-US" sz="1350" dirty="0"/>
           </a:p>
         </p:txBody>
       </p:sp>
@@ -9241,18 +9085,18 @@
         </p:nvSpPr>
         <p:spPr>
           <a:xfrm>
-            <a:off x="6035040" y="1627632"/>
-            <a:ext cx="2560320" cy="2743200"/>
+            <a:off x="6035040" y="1664208"/>
+            <a:ext cx="2606040" cy="2697480"/>
           </a:xfrm>
           <a:prstGeom prst="roundRect">
             <a:avLst>
-              <a:gd name="adj" fmla="val 2857"/>
+              <a:gd name="adj" fmla="val 3509"/>
             </a:avLst>
           </a:prstGeom>
           <a:solidFill>
             <a:srgbClr val="2B1508"/>
           </a:solidFill>
-          <a:ln w="12700">
+          <a:ln w="15875">
             <a:solidFill>
               <a:srgbClr val="C9A84C"/>
             </a:solidFill>
@@ -9268,8 +9112,8 @@
         </p:nvSpPr>
         <p:spPr>
           <a:xfrm>
-            <a:off x="7013448" y="1865376"/>
-            <a:ext cx="603504" cy="603504"/>
+            <a:off x="6935724" y="1901952"/>
+            <a:ext cx="804672" cy="804672"/>
           </a:xfrm>
           <a:prstGeom prst="ellipse">
             <a:avLst/>
@@ -9301,8 +9145,8 @@
         </p:blipFill>
         <p:spPr>
           <a:xfrm>
-            <a:off x="7116044" y="1967972"/>
-            <a:ext cx="398313" cy="398313"/>
+            <a:off x="7088612" y="2054840"/>
+            <a:ext cx="498897" cy="498897"/>
           </a:xfrm>
           <a:prstGeom prst="rect">
             <a:avLst/>
@@ -9317,8 +9161,8 @@
         </p:nvSpPr>
         <p:spPr>
           <a:xfrm>
-            <a:off x="6126480" y="2578608"/>
-            <a:ext cx="2377440" cy="310896"/>
+            <a:off x="6108192" y="2816352"/>
+            <a:ext cx="2459736" cy="347472"/>
           </a:xfrm>
           <a:prstGeom prst="rect">
             <a:avLst/>
@@ -9334,7 +9178,7 @@
               <a:buNone/>
             </a:pPr>
             <a:r>
-              <a:rPr lang="en-US" sz="1500" b="1" dirty="0">
+              <a:rPr lang="en-US" sz="1700" b="1" dirty="0">
                 <a:solidFill>
                   <a:srgbClr val="C9A84C"/>
                 </a:solidFill>
@@ -9344,7 +9188,7 @@
               </a:rPr>
               <a:t>Shared Tasks</a:t>
             </a:r>
-            <a:endParaRPr lang="en-US" sz="1500" dirty="0"/>
+            <a:endParaRPr lang="en-US" sz="1700" dirty="0"/>
           </a:p>
         </p:txBody>
       </p:sp>
@@ -9356,8 +9200,8 @@
         </p:nvSpPr>
         <p:spPr>
           <a:xfrm>
-            <a:off x="6126480" y="2889504"/>
-            <a:ext cx="2377440" cy="274320"/>
+            <a:off x="6108192" y="3163824"/>
+            <a:ext cx="2459736" cy="310896"/>
           </a:xfrm>
           <a:prstGeom prst="rect">
             <a:avLst/>
@@ -9373,14 +9217,14 @@
               <a:buNone/>
             </a:pPr>
             <a:r>
-              <a:rPr lang="en-US" sz="1150" dirty="0">
+              <a:rPr lang="en-US" sz="1400" dirty="0">
                 <a:solidFill>
                   <a:srgbClr val="FAF7F0"/>
                 </a:solidFill>
               </a:rPr>
               <a:t>የጋራ ተግባሮች</a:t>
             </a:r>
-            <a:endParaRPr lang="en-US" sz="1150" dirty="0"/>
+            <a:endParaRPr lang="en-US" sz="1400" dirty="0"/>
           </a:p>
         </p:txBody>
       </p:sp>
@@ -9392,8 +9236,8 @@
         </p:nvSpPr>
         <p:spPr>
           <a:xfrm>
-            <a:off x="6172200" y="3273552"/>
-            <a:ext cx="2286000" cy="1097280"/>
+            <a:off x="6163056" y="3529584"/>
+            <a:ext cx="2350008" cy="685800"/>
           </a:xfrm>
           <a:prstGeom prst="rect">
             <a:avLst/>
@@ -9409,7 +9253,7 @@
               <a:buNone/>
             </a:pPr>
             <a:r>
-              <a:rPr lang="en-US" sz="1100" dirty="0">
+              <a:rPr lang="en-US" sz="1350" dirty="0">
                 <a:solidFill>
                   <a:srgbClr val="EDD090"/>
                 </a:solidFill>
@@ -9417,9 +9261,9 @@
                 <a:ea typeface="Calibri" pitchFamily="34" charset="-122"/>
                 <a:cs typeface="Calibri" pitchFamily="34" charset="-120"/>
               </a:rPr>
-              <a:t>Agree who does what, and see it through together</a:t>
-            </a:r>
-            <a:endParaRPr lang="en-US" sz="1100" dirty="0"/>
+              <a:t>Agree who does what, together</a:t>
+            </a:r>
+            <a:endParaRPr lang="en-US" sz="1350" dirty="0"/>
           </a:p>
         </p:txBody>
       </p:sp>
@@ -9464,7 +9308,7 @@
         <p:spPr>
           <a:xfrm>
             <a:off x="502920" y="274320"/>
-            <a:ext cx="8138160" cy="566928"/>
+            <a:ext cx="8138160" cy="603504"/>
           </a:xfrm>
           <a:prstGeom prst="rect">
             <a:avLst/>
@@ -9480,7 +9324,7 @@
               <a:buNone/>
             </a:pPr>
             <a:r>
-              <a:rPr lang="en-US" sz="3200" b="1" dirty="0">
+              <a:rPr lang="en-US" sz="3400" b="1" dirty="0">
                 <a:solidFill>
                   <a:srgbClr val="1C0F07"/>
                 </a:solidFill>
@@ -9490,7 +9334,7 @@
               </a:rPr>
               <a:t>Serving Teams</a:t>
             </a:r>
-            <a:endParaRPr lang="en-US" sz="3200" dirty="0"/>
+            <a:endParaRPr lang="en-US" sz="3400" dirty="0"/>
           </a:p>
         </p:txBody>
       </p:sp>
@@ -9502,8 +9346,8 @@
         </p:nvSpPr>
         <p:spPr>
           <a:xfrm>
-            <a:off x="502920" y="804672"/>
-            <a:ext cx="8138160" cy="347472"/>
+            <a:off x="502920" y="841248"/>
+            <a:ext cx="8138160" cy="365760"/>
           </a:xfrm>
           <a:prstGeom prst="rect">
             <a:avLst/>
@@ -9519,66 +9363,27 @@
               <a:buNone/>
             </a:pPr>
             <a:r>
-              <a:rPr lang="en-US" sz="1700" dirty="0">
+              <a:rPr lang="en-US" sz="1900" dirty="0">
                 <a:solidFill>
                   <a:srgbClr val="7A5535"/>
                 </a:solidFill>
               </a:rPr>
               <a:t>የአገልግሎት ቡድኖች</a:t>
             </a:r>
-            <a:endParaRPr lang="en-US" sz="1700" dirty="0"/>
-          </a:p>
-        </p:txBody>
-      </p:sp>
-      <p:sp>
-        <p:nvSpPr>
-          <p:cNvPr id="4" name="Text 2"/>
-          <p:cNvSpPr txBox="1"/>
-          <p:nvPr/>
-        </p:nvSpPr>
-        <p:spPr>
-          <a:xfrm>
-            <a:off x="502920" y="1188720"/>
-            <a:ext cx="8138160" cy="292608"/>
-          </a:xfrm>
-          <a:prstGeom prst="rect">
-            <a:avLst/>
-          </a:prstGeom>
-          <a:noFill/>
-          <a:ln/>
-        </p:spPr>
-        <p:txBody>
-          <a:bodyPr wrap="square" lIns="0" tIns="0" rIns="0" bIns="0" rtlCol="0" anchor="ctr"/>
-          <a:lstStyle/>
-          <a:p>
-            <a:pPr indent="0" marL="0">
-              <a:buNone/>
-            </a:pPr>
-            <a:r>
-              <a:rPr lang="en-US" sz="1300" i="1" dirty="0">
-                <a:solidFill>
-                  <a:srgbClr val="3D2312"/>
-                </a:solidFill>
-                <a:latin typeface="Calibri" pitchFamily="34" charset="0"/>
-                <a:ea typeface="Calibri" pitchFamily="34" charset="-122"/>
-                <a:cs typeface="Calibri" pitchFamily="34" charset="-120"/>
-              </a:rPr>
-              <a:t>Serving together is easier when the whole team is in one place.</a:t>
-            </a:r>
-            <a:endParaRPr lang="en-US" sz="1300" dirty="0"/>
-          </a:p>
-        </p:txBody>
-      </p:sp>
-      <p:sp>
-        <p:nvSpPr>
-          <p:cNvPr id="5" name="Shape 3"/>
+            <a:endParaRPr lang="en-US" sz="1900" dirty="0"/>
+          </a:p>
+        </p:txBody>
+      </p:sp>
+      <p:sp>
+        <p:nvSpPr>
+          <p:cNvPr id="4" name="Shape 2"/>
           <p:cNvSpPr/>
           <p:nvPr/>
         </p:nvSpPr>
         <p:spPr>
           <a:xfrm>
-            <a:off x="868680" y="1627632"/>
-            <a:ext cx="566928" cy="566928"/>
+            <a:off x="763524" y="1389888"/>
+            <a:ext cx="731520" cy="731520"/>
           </a:xfrm>
           <a:prstGeom prst="ellipse">
             <a:avLst/>
@@ -9596,7 +9401,7 @@
       </p:sp>
       <p:pic>
         <p:nvPicPr>
-          <p:cNvPr id="6" name="Image 0" descr="preencoded.png">    </p:cNvPr>
+          <p:cNvPr id="5" name="Image 0" descr="preencoded.png">    </p:cNvPr>
           <p:cNvPicPr>
             <a:picLocks noChangeAspect="1"/>
           </p:cNvPicPr>
@@ -9610,8 +9415,8 @@
         </p:blipFill>
         <p:spPr>
           <a:xfrm>
-            <a:off x="965058" y="1724010"/>
-            <a:ext cx="374172" cy="374172"/>
+            <a:off x="902513" y="1528877"/>
+            <a:ext cx="453542" cy="453542"/>
           </a:xfrm>
           <a:prstGeom prst="rect">
             <a:avLst/>
@@ -9620,14 +9425,14 @@
       </p:pic>
       <p:sp>
         <p:nvSpPr>
-          <p:cNvPr id="7" name="Text 4"/>
-          <p:cNvSpPr txBox="1"/>
-          <p:nvPr/>
-        </p:nvSpPr>
-        <p:spPr>
-          <a:xfrm>
-            <a:off x="457200" y="2286000"/>
-            <a:ext cx="1389888" cy="274320"/>
+          <p:cNvPr id="6" name="Text 3"/>
+          <p:cNvSpPr txBox="1"/>
+          <p:nvPr/>
+        </p:nvSpPr>
+        <p:spPr>
+          <a:xfrm>
+            <a:off x="402336" y="2231136"/>
+            <a:ext cx="1453896" cy="292608"/>
           </a:xfrm>
           <a:prstGeom prst="rect">
             <a:avLst/>
@@ -9643,7 +9448,7 @@
               <a:buNone/>
             </a:pPr>
             <a:r>
-              <a:rPr lang="en-US" sz="1100" b="1" dirty="0">
+              <a:rPr lang="en-US" sz="1350" b="1" dirty="0">
                 <a:solidFill>
                   <a:srgbClr val="1C0F07"/>
                 </a:solidFill>
@@ -9653,20 +9458,20 @@
               </a:rPr>
               <a:t>Worship</a:t>
             </a:r>
-            <a:endParaRPr lang="en-US" sz="1100" dirty="0"/>
-          </a:p>
-        </p:txBody>
-      </p:sp>
-      <p:sp>
-        <p:nvSpPr>
-          <p:cNvPr id="8" name="Text 5"/>
-          <p:cNvSpPr txBox="1"/>
-          <p:nvPr/>
-        </p:nvSpPr>
-        <p:spPr>
-          <a:xfrm>
-            <a:off x="457200" y="2542032"/>
-            <a:ext cx="1389888" cy="256032"/>
+            <a:endParaRPr lang="en-US" sz="1350" dirty="0"/>
+          </a:p>
+        </p:txBody>
+      </p:sp>
+      <p:sp>
+        <p:nvSpPr>
+          <p:cNvPr id="7" name="Text 4"/>
+          <p:cNvSpPr txBox="1"/>
+          <p:nvPr/>
+        </p:nvSpPr>
+        <p:spPr>
+          <a:xfrm>
+            <a:off x="402336" y="2523744"/>
+            <a:ext cx="1453896" cy="274320"/>
           </a:xfrm>
           <a:prstGeom prst="rect">
             <a:avLst/>
@@ -9682,27 +9487,27 @@
               <a:buNone/>
             </a:pPr>
             <a:r>
-              <a:rPr lang="en-US" sz="950" dirty="0">
+              <a:rPr lang="en-US" sz="1200" dirty="0">
                 <a:solidFill>
                   <a:srgbClr val="7A5535"/>
                 </a:solidFill>
               </a:rPr>
               <a:t>አምልኮ</a:t>
             </a:r>
-            <a:endParaRPr lang="en-US" sz="950" dirty="0"/>
-          </a:p>
-        </p:txBody>
-      </p:sp>
-      <p:sp>
-        <p:nvSpPr>
-          <p:cNvPr id="9" name="Shape 6"/>
+            <a:endParaRPr lang="en-US" sz="1200" dirty="0"/>
+          </a:p>
+        </p:txBody>
+      </p:sp>
+      <p:sp>
+        <p:nvSpPr>
+          <p:cNvPr id="8" name="Shape 5"/>
           <p:cNvSpPr/>
           <p:nvPr/>
         </p:nvSpPr>
         <p:spPr>
           <a:xfrm>
-            <a:off x="2240280" y="1627632"/>
-            <a:ext cx="566928" cy="566928"/>
+            <a:off x="2144268" y="1389888"/>
+            <a:ext cx="731520" cy="731520"/>
           </a:xfrm>
           <a:prstGeom prst="ellipse">
             <a:avLst/>
@@ -9720,7 +9525,7 @@
       </p:sp>
       <p:pic>
         <p:nvPicPr>
-          <p:cNvPr id="10" name="Image 1" descr="preencoded.png">    </p:cNvPr>
+          <p:cNvPr id="9" name="Image 1" descr="preencoded.png">    </p:cNvPr>
           <p:cNvPicPr>
             <a:picLocks noChangeAspect="1"/>
           </p:cNvPicPr>
@@ -9734,8 +9539,8 @@
         </p:blipFill>
         <p:spPr>
           <a:xfrm>
-            <a:off x="2336658" y="1724010"/>
-            <a:ext cx="374172" cy="374172"/>
+            <a:off x="2283257" y="1528877"/>
+            <a:ext cx="453542" cy="453542"/>
           </a:xfrm>
           <a:prstGeom prst="rect">
             <a:avLst/>
@@ -9744,14 +9549,14 @@
       </p:pic>
       <p:sp>
         <p:nvSpPr>
-          <p:cNvPr id="11" name="Text 7"/>
-          <p:cNvSpPr txBox="1"/>
-          <p:nvPr/>
-        </p:nvSpPr>
-        <p:spPr>
-          <a:xfrm>
-            <a:off x="1828800" y="2286000"/>
-            <a:ext cx="1389888" cy="274320"/>
+          <p:cNvPr id="10" name="Text 6"/>
+          <p:cNvSpPr txBox="1"/>
+          <p:nvPr/>
+        </p:nvSpPr>
+        <p:spPr>
+          <a:xfrm>
+            <a:off x="1783080" y="2231136"/>
+            <a:ext cx="1453896" cy="292608"/>
           </a:xfrm>
           <a:prstGeom prst="rect">
             <a:avLst/>
@@ -9767,7 +9572,7 @@
               <a:buNone/>
             </a:pPr>
             <a:r>
-              <a:rPr lang="en-US" sz="1100" b="1" dirty="0">
+              <a:rPr lang="en-US" sz="1350" b="1" dirty="0">
                 <a:solidFill>
                   <a:srgbClr val="1C0F07"/>
                 </a:solidFill>
@@ -9777,20 +9582,20 @@
               </a:rPr>
               <a:t>Prayer</a:t>
             </a:r>
-            <a:endParaRPr lang="en-US" sz="1100" dirty="0"/>
-          </a:p>
-        </p:txBody>
-      </p:sp>
-      <p:sp>
-        <p:nvSpPr>
-          <p:cNvPr id="12" name="Text 8"/>
-          <p:cNvSpPr txBox="1"/>
-          <p:nvPr/>
-        </p:nvSpPr>
-        <p:spPr>
-          <a:xfrm>
-            <a:off x="1828800" y="2542032"/>
-            <a:ext cx="1389888" cy="256032"/>
+            <a:endParaRPr lang="en-US" sz="1350" dirty="0"/>
+          </a:p>
+        </p:txBody>
+      </p:sp>
+      <p:sp>
+        <p:nvSpPr>
+          <p:cNvPr id="11" name="Text 7"/>
+          <p:cNvSpPr txBox="1"/>
+          <p:nvPr/>
+        </p:nvSpPr>
+        <p:spPr>
+          <a:xfrm>
+            <a:off x="1783080" y="2523744"/>
+            <a:ext cx="1453896" cy="274320"/>
           </a:xfrm>
           <a:prstGeom prst="rect">
             <a:avLst/>
@@ -9806,27 +9611,27 @@
               <a:buNone/>
             </a:pPr>
             <a:r>
-              <a:rPr lang="en-US" sz="950" dirty="0">
+              <a:rPr lang="en-US" sz="1200" dirty="0">
                 <a:solidFill>
                   <a:srgbClr val="7A5535"/>
                 </a:solidFill>
               </a:rPr>
               <a:t>ጸሎት</a:t>
             </a:r>
-            <a:endParaRPr lang="en-US" sz="950" dirty="0"/>
-          </a:p>
-        </p:txBody>
-      </p:sp>
-      <p:sp>
-        <p:nvSpPr>
-          <p:cNvPr id="13" name="Shape 9"/>
+            <a:endParaRPr lang="en-US" sz="1200" dirty="0"/>
+          </a:p>
+        </p:txBody>
+      </p:sp>
+      <p:sp>
+        <p:nvSpPr>
+          <p:cNvPr id="12" name="Shape 8"/>
           <p:cNvSpPr/>
           <p:nvPr/>
         </p:nvSpPr>
         <p:spPr>
           <a:xfrm>
-            <a:off x="3611880" y="1627632"/>
-            <a:ext cx="566928" cy="566928"/>
+            <a:off x="3525012" y="1389888"/>
+            <a:ext cx="731520" cy="731520"/>
           </a:xfrm>
           <a:prstGeom prst="ellipse">
             <a:avLst/>
@@ -9844,7 +9649,7 @@
       </p:sp>
       <p:pic>
         <p:nvPicPr>
-          <p:cNvPr id="14" name="Image 2" descr="preencoded.png">    </p:cNvPr>
+          <p:cNvPr id="13" name="Image 2" descr="preencoded.png">    </p:cNvPr>
           <p:cNvPicPr>
             <a:picLocks noChangeAspect="1"/>
           </p:cNvPicPr>
@@ -9858,8 +9663,8 @@
         </p:blipFill>
         <p:spPr>
           <a:xfrm>
-            <a:off x="3708258" y="1724010"/>
-            <a:ext cx="374172" cy="374172"/>
+            <a:off x="3664001" y="1528877"/>
+            <a:ext cx="453542" cy="453542"/>
           </a:xfrm>
           <a:prstGeom prst="rect">
             <a:avLst/>
@@ -9868,14 +9673,14 @@
       </p:pic>
       <p:sp>
         <p:nvSpPr>
-          <p:cNvPr id="15" name="Text 10"/>
-          <p:cNvSpPr txBox="1"/>
-          <p:nvPr/>
-        </p:nvSpPr>
-        <p:spPr>
-          <a:xfrm>
-            <a:off x="3200400" y="2286000"/>
-            <a:ext cx="1389888" cy="274320"/>
+          <p:cNvPr id="14" name="Text 9"/>
+          <p:cNvSpPr txBox="1"/>
+          <p:nvPr/>
+        </p:nvSpPr>
+        <p:spPr>
+          <a:xfrm>
+            <a:off x="3163824" y="2231136"/>
+            <a:ext cx="1453896" cy="292608"/>
           </a:xfrm>
           <a:prstGeom prst="rect">
             <a:avLst/>
@@ -9891,7 +9696,7 @@
               <a:buNone/>
             </a:pPr>
             <a:r>
-              <a:rPr lang="en-US" sz="1100" b="1" dirty="0">
+              <a:rPr lang="en-US" sz="1350" b="1" dirty="0">
                 <a:solidFill>
                   <a:srgbClr val="1C0F07"/>
                 </a:solidFill>
@@ -9901,20 +9706,20 @@
               </a:rPr>
               <a:t>Evangelism</a:t>
             </a:r>
-            <a:endParaRPr lang="en-US" sz="1100" dirty="0"/>
-          </a:p>
-        </p:txBody>
-      </p:sp>
-      <p:sp>
-        <p:nvSpPr>
-          <p:cNvPr id="16" name="Text 11"/>
-          <p:cNvSpPr txBox="1"/>
-          <p:nvPr/>
-        </p:nvSpPr>
-        <p:spPr>
-          <a:xfrm>
-            <a:off x="3200400" y="2542032"/>
-            <a:ext cx="1389888" cy="256032"/>
+            <a:endParaRPr lang="en-US" sz="1350" dirty="0"/>
+          </a:p>
+        </p:txBody>
+      </p:sp>
+      <p:sp>
+        <p:nvSpPr>
+          <p:cNvPr id="15" name="Text 10"/>
+          <p:cNvSpPr txBox="1"/>
+          <p:nvPr/>
+        </p:nvSpPr>
+        <p:spPr>
+          <a:xfrm>
+            <a:off x="3163824" y="2523744"/>
+            <a:ext cx="1453896" cy="274320"/>
           </a:xfrm>
           <a:prstGeom prst="rect">
             <a:avLst/>
@@ -9930,27 +9735,27 @@
               <a:buNone/>
             </a:pPr>
             <a:r>
-              <a:rPr lang="en-US" sz="950" dirty="0">
+              <a:rPr lang="en-US" sz="1200" dirty="0">
                 <a:solidFill>
                   <a:srgbClr val="7A5535"/>
                 </a:solidFill>
               </a:rPr>
               <a:t>ወንጌል ስርጭት</a:t>
             </a:r>
-            <a:endParaRPr lang="en-US" sz="950" dirty="0"/>
-          </a:p>
-        </p:txBody>
-      </p:sp>
-      <p:sp>
-        <p:nvSpPr>
-          <p:cNvPr id="17" name="Shape 12"/>
+            <a:endParaRPr lang="en-US" sz="1200" dirty="0"/>
+          </a:p>
+        </p:txBody>
+      </p:sp>
+      <p:sp>
+        <p:nvSpPr>
+          <p:cNvPr id="16" name="Shape 11"/>
           <p:cNvSpPr/>
           <p:nvPr/>
         </p:nvSpPr>
         <p:spPr>
           <a:xfrm>
-            <a:off x="4983480" y="1627632"/>
-            <a:ext cx="566928" cy="566928"/>
+            <a:off x="4905756" y="1389888"/>
+            <a:ext cx="731520" cy="731520"/>
           </a:xfrm>
           <a:prstGeom prst="ellipse">
             <a:avLst/>
@@ -9968,7 +9773,7 @@
       </p:sp>
       <p:pic>
         <p:nvPicPr>
-          <p:cNvPr id="18" name="Image 3" descr="preencoded.png">    </p:cNvPr>
+          <p:cNvPr id="17" name="Image 3" descr="preencoded.png">    </p:cNvPr>
           <p:cNvPicPr>
             <a:picLocks noChangeAspect="1"/>
           </p:cNvPicPr>
@@ -9982,8 +9787,8 @@
         </p:blipFill>
         <p:spPr>
           <a:xfrm>
-            <a:off x="5079858" y="1724010"/>
-            <a:ext cx="374172" cy="374172"/>
+            <a:off x="5044745" y="1528877"/>
+            <a:ext cx="453542" cy="453542"/>
           </a:xfrm>
           <a:prstGeom prst="rect">
             <a:avLst/>
@@ -9992,14 +9797,14 @@
       </p:pic>
       <p:sp>
         <p:nvSpPr>
-          <p:cNvPr id="19" name="Text 13"/>
-          <p:cNvSpPr txBox="1"/>
-          <p:nvPr/>
-        </p:nvSpPr>
-        <p:spPr>
-          <a:xfrm>
-            <a:off x="4572000" y="2286000"/>
-            <a:ext cx="1389888" cy="274320"/>
+          <p:cNvPr id="18" name="Text 12"/>
+          <p:cNvSpPr txBox="1"/>
+          <p:nvPr/>
+        </p:nvSpPr>
+        <p:spPr>
+          <a:xfrm>
+            <a:off x="4544568" y="2231136"/>
+            <a:ext cx="1453896" cy="292608"/>
           </a:xfrm>
           <a:prstGeom prst="rect">
             <a:avLst/>
@@ -10015,7 +9820,7 @@
               <a:buNone/>
             </a:pPr>
             <a:r>
-              <a:rPr lang="en-US" sz="1100" b="1" dirty="0">
+              <a:rPr lang="en-US" sz="1350" b="1" dirty="0">
                 <a:solidFill>
                   <a:srgbClr val="1C0F07"/>
                 </a:solidFill>
@@ -10025,20 +9830,20 @@
               </a:rPr>
               <a:t>Social Affairs</a:t>
             </a:r>
-            <a:endParaRPr lang="en-US" sz="1100" dirty="0"/>
-          </a:p>
-        </p:txBody>
-      </p:sp>
-      <p:sp>
-        <p:nvSpPr>
-          <p:cNvPr id="20" name="Text 14"/>
-          <p:cNvSpPr txBox="1"/>
-          <p:nvPr/>
-        </p:nvSpPr>
-        <p:spPr>
-          <a:xfrm>
-            <a:off x="4572000" y="2542032"/>
-            <a:ext cx="1389888" cy="256032"/>
+            <a:endParaRPr lang="en-US" sz="1350" dirty="0"/>
+          </a:p>
+        </p:txBody>
+      </p:sp>
+      <p:sp>
+        <p:nvSpPr>
+          <p:cNvPr id="19" name="Text 13"/>
+          <p:cNvSpPr txBox="1"/>
+          <p:nvPr/>
+        </p:nvSpPr>
+        <p:spPr>
+          <a:xfrm>
+            <a:off x="4544568" y="2523744"/>
+            <a:ext cx="1453896" cy="274320"/>
           </a:xfrm>
           <a:prstGeom prst="rect">
             <a:avLst/>
@@ -10054,27 +9859,27 @@
               <a:buNone/>
             </a:pPr>
             <a:r>
-              <a:rPr lang="en-US" sz="950" dirty="0">
+              <a:rPr lang="en-US" sz="1200" dirty="0">
                 <a:solidFill>
                   <a:srgbClr val="7A5535"/>
                 </a:solidFill>
               </a:rPr>
               <a:t>ማህበራዊ ጉዳይ</a:t>
             </a:r>
-            <a:endParaRPr lang="en-US" sz="950" dirty="0"/>
-          </a:p>
-        </p:txBody>
-      </p:sp>
-      <p:sp>
-        <p:nvSpPr>
-          <p:cNvPr id="21" name="Shape 15"/>
+            <a:endParaRPr lang="en-US" sz="1200" dirty="0"/>
+          </a:p>
+        </p:txBody>
+      </p:sp>
+      <p:sp>
+        <p:nvSpPr>
+          <p:cNvPr id="20" name="Shape 14"/>
           <p:cNvSpPr/>
           <p:nvPr/>
         </p:nvSpPr>
         <p:spPr>
           <a:xfrm>
-            <a:off x="6355080" y="1627632"/>
-            <a:ext cx="566928" cy="566928"/>
+            <a:off x="6286500" y="1389888"/>
+            <a:ext cx="731520" cy="731520"/>
           </a:xfrm>
           <a:prstGeom prst="ellipse">
             <a:avLst/>
@@ -10092,7 +9897,7 @@
       </p:sp>
       <p:pic>
         <p:nvPicPr>
-          <p:cNvPr id="22" name="Image 4" descr="preencoded.png">    </p:cNvPr>
+          <p:cNvPr id="21" name="Image 4" descr="preencoded.png">    </p:cNvPr>
           <p:cNvPicPr>
             <a:picLocks noChangeAspect="1"/>
           </p:cNvPicPr>
@@ -10106,8 +9911,8 @@
         </p:blipFill>
         <p:spPr>
           <a:xfrm>
-            <a:off x="6451458" y="1724010"/>
-            <a:ext cx="374172" cy="374172"/>
+            <a:off x="6425489" y="1528877"/>
+            <a:ext cx="453542" cy="453542"/>
           </a:xfrm>
           <a:prstGeom prst="rect">
             <a:avLst/>
@@ -10116,14 +9921,14 @@
       </p:pic>
       <p:sp>
         <p:nvSpPr>
-          <p:cNvPr id="23" name="Text 16"/>
-          <p:cNvSpPr txBox="1"/>
-          <p:nvPr/>
-        </p:nvSpPr>
-        <p:spPr>
-          <a:xfrm>
-            <a:off x="5943600" y="2286000"/>
-            <a:ext cx="1389888" cy="274320"/>
+          <p:cNvPr id="22" name="Text 15"/>
+          <p:cNvSpPr txBox="1"/>
+          <p:nvPr/>
+        </p:nvSpPr>
+        <p:spPr>
+          <a:xfrm>
+            <a:off x="5925312" y="2231136"/>
+            <a:ext cx="1453896" cy="292608"/>
           </a:xfrm>
           <a:prstGeom prst="rect">
             <a:avLst/>
@@ -10139,7 +9944,7 @@
               <a:buNone/>
             </a:pPr>
             <a:r>
-              <a:rPr lang="en-US" sz="1100" b="1" dirty="0">
+              <a:rPr lang="en-US" sz="1350" b="1" dirty="0">
                 <a:solidFill>
                   <a:srgbClr val="1C0F07"/>
                 </a:solidFill>
@@ -10149,20 +9954,20 @@
               </a:rPr>
               <a:t>Social Media</a:t>
             </a:r>
-            <a:endParaRPr lang="en-US" sz="1100" dirty="0"/>
-          </a:p>
-        </p:txBody>
-      </p:sp>
-      <p:sp>
-        <p:nvSpPr>
-          <p:cNvPr id="24" name="Text 17"/>
-          <p:cNvSpPr txBox="1"/>
-          <p:nvPr/>
-        </p:nvSpPr>
-        <p:spPr>
-          <a:xfrm>
-            <a:off x="5943600" y="2542032"/>
-            <a:ext cx="1389888" cy="256032"/>
+            <a:endParaRPr lang="en-US" sz="1350" dirty="0"/>
+          </a:p>
+        </p:txBody>
+      </p:sp>
+      <p:sp>
+        <p:nvSpPr>
+          <p:cNvPr id="23" name="Text 16"/>
+          <p:cNvSpPr txBox="1"/>
+          <p:nvPr/>
+        </p:nvSpPr>
+        <p:spPr>
+          <a:xfrm>
+            <a:off x="5925312" y="2523744"/>
+            <a:ext cx="1453896" cy="274320"/>
           </a:xfrm>
           <a:prstGeom prst="rect">
             <a:avLst/>
@@ -10178,27 +9983,27 @@
               <a:buNone/>
             </a:pPr>
             <a:r>
-              <a:rPr lang="en-US" sz="950" dirty="0">
+              <a:rPr lang="en-US" sz="1200" dirty="0">
                 <a:solidFill>
                   <a:srgbClr val="7A5535"/>
                 </a:solidFill>
               </a:rPr>
               <a:t>ሶሻል ሚዲያ</a:t>
             </a:r>
-            <a:endParaRPr lang="en-US" sz="950" dirty="0"/>
-          </a:p>
-        </p:txBody>
-      </p:sp>
-      <p:sp>
-        <p:nvSpPr>
-          <p:cNvPr id="25" name="Shape 18"/>
+            <a:endParaRPr lang="en-US" sz="1200" dirty="0"/>
+          </a:p>
+        </p:txBody>
+      </p:sp>
+      <p:sp>
+        <p:nvSpPr>
+          <p:cNvPr id="24" name="Shape 17"/>
           <p:cNvSpPr/>
           <p:nvPr/>
         </p:nvSpPr>
         <p:spPr>
           <a:xfrm>
-            <a:off x="7726680" y="1627632"/>
-            <a:ext cx="566928" cy="566928"/>
+            <a:off x="7667244" y="1389888"/>
+            <a:ext cx="731520" cy="731520"/>
           </a:xfrm>
           <a:prstGeom prst="ellipse">
             <a:avLst/>
@@ -10216,7 +10021,7 @@
       </p:sp>
       <p:pic>
         <p:nvPicPr>
-          <p:cNvPr id="26" name="Image 5" descr="preencoded.png">    </p:cNvPr>
+          <p:cNvPr id="25" name="Image 5" descr="preencoded.png">    </p:cNvPr>
           <p:cNvPicPr>
             <a:picLocks noChangeAspect="1"/>
           </p:cNvPicPr>
@@ -10230,8 +10035,8 @@
         </p:blipFill>
         <p:spPr>
           <a:xfrm>
-            <a:off x="7823058" y="1724010"/>
-            <a:ext cx="374172" cy="374172"/>
+            <a:off x="7806233" y="1528877"/>
+            <a:ext cx="453542" cy="453542"/>
           </a:xfrm>
           <a:prstGeom prst="rect">
             <a:avLst/>
@@ -10240,14 +10045,14 @@
       </p:pic>
       <p:sp>
         <p:nvSpPr>
-          <p:cNvPr id="27" name="Text 19"/>
-          <p:cNvSpPr txBox="1"/>
-          <p:nvPr/>
-        </p:nvSpPr>
-        <p:spPr>
-          <a:xfrm>
-            <a:off x="7315200" y="2286000"/>
-            <a:ext cx="1389888" cy="274320"/>
+          <p:cNvPr id="26" name="Text 18"/>
+          <p:cNvSpPr txBox="1"/>
+          <p:nvPr/>
+        </p:nvSpPr>
+        <p:spPr>
+          <a:xfrm>
+            <a:off x="7306056" y="2231136"/>
+            <a:ext cx="1453896" cy="292608"/>
           </a:xfrm>
           <a:prstGeom prst="rect">
             <a:avLst/>
@@ -10263,7 +10068,7 @@
               <a:buNone/>
             </a:pPr>
             <a:r>
-              <a:rPr lang="en-US" sz="1100" b="1" dirty="0">
+              <a:rPr lang="en-US" sz="1350" b="1" dirty="0">
                 <a:solidFill>
                   <a:srgbClr val="1C0F07"/>
                 </a:solidFill>
@@ -10273,20 +10078,20 @@
               </a:rPr>
               <a:t>Library</a:t>
             </a:r>
-            <a:endParaRPr lang="en-US" sz="1100" dirty="0"/>
-          </a:p>
-        </p:txBody>
-      </p:sp>
-      <p:sp>
-        <p:nvSpPr>
-          <p:cNvPr id="28" name="Text 20"/>
-          <p:cNvSpPr txBox="1"/>
-          <p:nvPr/>
-        </p:nvSpPr>
-        <p:spPr>
-          <a:xfrm>
-            <a:off x="7315200" y="2542032"/>
-            <a:ext cx="1389888" cy="256032"/>
+            <a:endParaRPr lang="en-US" sz="1350" dirty="0"/>
+          </a:p>
+        </p:txBody>
+      </p:sp>
+      <p:sp>
+        <p:nvSpPr>
+          <p:cNvPr id="27" name="Text 19"/>
+          <p:cNvSpPr txBox="1"/>
+          <p:nvPr/>
+        </p:nvSpPr>
+        <p:spPr>
+          <a:xfrm>
+            <a:off x="7306056" y="2523744"/>
+            <a:ext cx="1453896" cy="274320"/>
           </a:xfrm>
           <a:prstGeom prst="rect">
             <a:avLst/>
@@ -10302,37 +10107,37 @@
               <a:buNone/>
             </a:pPr>
             <a:r>
-              <a:rPr lang="en-US" sz="950" dirty="0">
+              <a:rPr lang="en-US" sz="1200" dirty="0">
                 <a:solidFill>
                   <a:srgbClr val="7A5535"/>
                 </a:solidFill>
               </a:rPr>
               <a:t>ቤተ-መጻሕፍት</a:t>
             </a:r>
-            <a:endParaRPr lang="en-US" sz="950" dirty="0"/>
-          </a:p>
-        </p:txBody>
-      </p:sp>
-      <p:sp>
-        <p:nvSpPr>
-          <p:cNvPr id="29" name="Shape 21"/>
+            <a:endParaRPr lang="en-US" sz="1200" dirty="0"/>
+          </a:p>
+        </p:txBody>
+      </p:sp>
+      <p:sp>
+        <p:nvSpPr>
+          <p:cNvPr id="28" name="Shape 20"/>
           <p:cNvSpPr/>
           <p:nvPr/>
         </p:nvSpPr>
         <p:spPr>
           <a:xfrm>
-            <a:off x="502920" y="3127248"/>
-            <a:ext cx="2560320" cy="1371600"/>
+            <a:off x="475488" y="3017520"/>
+            <a:ext cx="2596896" cy="1572768"/>
           </a:xfrm>
           <a:prstGeom prst="roundRect">
             <a:avLst>
-              <a:gd name="adj" fmla="val 6667"/>
+              <a:gd name="adj" fmla="val 6395"/>
             </a:avLst>
           </a:prstGeom>
           <a:solidFill>
             <a:srgbClr val="FFFFFF"/>
           </a:solidFill>
-          <a:ln w="15875">
+          <a:ln w="19050">
             <a:solidFill>
               <a:srgbClr val="C9A84C"/>
             </a:solidFill>
@@ -10349,14 +10154,14 @@
       </p:sp>
       <p:sp>
         <p:nvSpPr>
-          <p:cNvPr id="30" name="Shape 22"/>
+          <p:cNvPr id="29" name="Shape 21"/>
           <p:cNvSpPr/>
           <p:nvPr/>
         </p:nvSpPr>
         <p:spPr>
           <a:xfrm>
-            <a:off x="704088" y="3346704"/>
-            <a:ext cx="457200" cy="457200"/>
+            <a:off x="658368" y="3218688"/>
+            <a:ext cx="566928" cy="566928"/>
           </a:xfrm>
           <a:prstGeom prst="ellipse">
             <a:avLst/>
@@ -10374,7 +10179,7 @@
       </p:sp>
       <p:pic>
         <p:nvPicPr>
-          <p:cNvPr id="31" name="Image 6" descr="preencoded.png">    </p:cNvPr>
+          <p:cNvPr id="30" name="Image 6" descr="preencoded.png">    </p:cNvPr>
           <p:cNvPicPr>
             <a:picLocks noChangeAspect="1"/>
           </p:cNvPicPr>
@@ -10388,8 +10193,8 @@
         </p:blipFill>
         <p:spPr>
           <a:xfrm>
-            <a:off x="781812" y="3424428"/>
-            <a:ext cx="301752" cy="301752"/>
+            <a:off x="766084" y="3326404"/>
+            <a:ext cx="351495" cy="351495"/>
           </a:xfrm>
           <a:prstGeom prst="rect">
             <a:avLst/>
@@ -10398,14 +10203,14 @@
       </p:pic>
       <p:sp>
         <p:nvSpPr>
-          <p:cNvPr id="32" name="Text 23"/>
-          <p:cNvSpPr txBox="1"/>
-          <p:nvPr/>
-        </p:nvSpPr>
-        <p:spPr>
-          <a:xfrm>
-            <a:off x="1252728" y="3364992"/>
-            <a:ext cx="1691640" cy="274320"/>
+          <p:cNvPr id="31" name="Text 22"/>
+          <p:cNvSpPr txBox="1"/>
+          <p:nvPr/>
+        </p:nvSpPr>
+        <p:spPr>
+          <a:xfrm>
+            <a:off x="1389888" y="3291840"/>
+            <a:ext cx="1609344" cy="310896"/>
           </a:xfrm>
           <a:prstGeom prst="rect">
             <a:avLst/>
@@ -10421,7 +10226,7 @@
               <a:buNone/>
             </a:pPr>
             <a:r>
-              <a:rPr lang="en-US" sz="1200" b="1" dirty="0">
+              <a:rPr lang="en-US" sz="1450" b="1" dirty="0">
                 <a:solidFill>
                   <a:srgbClr val="1C0F07"/>
                 </a:solidFill>
@@ -10431,20 +10236,20 @@
               </a:rPr>
               <a:t>Its own chat</a:t>
             </a:r>
-            <a:endParaRPr lang="en-US" sz="1200" dirty="0"/>
-          </a:p>
-        </p:txBody>
-      </p:sp>
-      <p:sp>
-        <p:nvSpPr>
-          <p:cNvPr id="33" name="Text 24"/>
-          <p:cNvSpPr txBox="1"/>
-          <p:nvPr/>
-        </p:nvSpPr>
-        <p:spPr>
-          <a:xfrm>
-            <a:off x="667512" y="3785616"/>
-            <a:ext cx="2240280" cy="621792"/>
+            <a:endParaRPr lang="en-US" sz="1450" dirty="0"/>
+          </a:p>
+        </p:txBody>
+      </p:sp>
+      <p:sp>
+        <p:nvSpPr>
+          <p:cNvPr id="32" name="Text 23"/>
+          <p:cNvSpPr txBox="1"/>
+          <p:nvPr/>
+        </p:nvSpPr>
+        <p:spPr>
+          <a:xfrm>
+            <a:off x="640080" y="3886200"/>
+            <a:ext cx="2286000" cy="621792"/>
           </a:xfrm>
           <a:prstGeom prst="rect">
             <a:avLst/>
@@ -10460,7 +10265,7 @@
               <a:buNone/>
             </a:pPr>
             <a:r>
-              <a:rPr lang="en-US" sz="1000" dirty="0">
+              <a:rPr lang="en-US" sz="1300" dirty="0">
                 <a:solidFill>
                   <a:srgbClr val="3D2312"/>
                 </a:solidFill>
@@ -10468,32 +10273,32 @@
                 <a:ea typeface="Calibri" pitchFamily="34" charset="-122"/>
                 <a:cs typeface="Calibri" pitchFamily="34" charset="-120"/>
               </a:rPr>
-              <a:t>Talk to your team without crowding the main group</a:t>
-            </a:r>
-            <a:endParaRPr lang="en-US" sz="1000" dirty="0"/>
-          </a:p>
-        </p:txBody>
-      </p:sp>
-      <p:sp>
-        <p:nvSpPr>
-          <p:cNvPr id="34" name="Shape 25"/>
+              <a:t>Talk without crowding the main group</a:t>
+            </a:r>
+            <a:endParaRPr lang="en-US" sz="1300" dirty="0"/>
+          </a:p>
+        </p:txBody>
+      </p:sp>
+      <p:sp>
+        <p:nvSpPr>
+          <p:cNvPr id="33" name="Shape 24"/>
           <p:cNvSpPr/>
           <p:nvPr/>
         </p:nvSpPr>
         <p:spPr>
           <a:xfrm>
-            <a:off x="3246120" y="3127248"/>
-            <a:ext cx="2560320" cy="1371600"/>
+            <a:off x="3236976" y="3017520"/>
+            <a:ext cx="2596896" cy="1572768"/>
           </a:xfrm>
           <a:prstGeom prst="roundRect">
             <a:avLst>
-              <a:gd name="adj" fmla="val 6667"/>
+              <a:gd name="adj" fmla="val 6395"/>
             </a:avLst>
           </a:prstGeom>
           <a:solidFill>
             <a:srgbClr val="FFFFFF"/>
           </a:solidFill>
-          <a:ln w="15875">
+          <a:ln w="19050">
             <a:solidFill>
               <a:srgbClr val="C9A84C"/>
             </a:solidFill>
@@ -10510,14 +10315,14 @@
       </p:sp>
       <p:sp>
         <p:nvSpPr>
-          <p:cNvPr id="35" name="Shape 26"/>
+          <p:cNvPr id="34" name="Shape 25"/>
           <p:cNvSpPr/>
           <p:nvPr/>
         </p:nvSpPr>
         <p:spPr>
           <a:xfrm>
-            <a:off x="3447288" y="3346704"/>
-            <a:ext cx="457200" cy="457200"/>
+            <a:off x="3419856" y="3218688"/>
+            <a:ext cx="566928" cy="566928"/>
           </a:xfrm>
           <a:prstGeom prst="ellipse">
             <a:avLst/>
@@ -10535,7 +10340,7 @@
       </p:sp>
       <p:pic>
         <p:nvPicPr>
-          <p:cNvPr id="36" name="Image 7" descr="preencoded.png">    </p:cNvPr>
+          <p:cNvPr id="35" name="Image 7" descr="preencoded.png">    </p:cNvPr>
           <p:cNvPicPr>
             <a:picLocks noChangeAspect="1"/>
           </p:cNvPicPr>
@@ -10549,8 +10354,8 @@
         </p:blipFill>
         <p:spPr>
           <a:xfrm>
-            <a:off x="3525012" y="3424428"/>
-            <a:ext cx="301752" cy="301752"/>
+            <a:off x="3527572" y="3326404"/>
+            <a:ext cx="351495" cy="351495"/>
           </a:xfrm>
           <a:prstGeom prst="rect">
             <a:avLst/>
@@ -10559,14 +10364,14 @@
       </p:pic>
       <p:sp>
         <p:nvSpPr>
-          <p:cNvPr id="37" name="Text 27"/>
-          <p:cNvSpPr txBox="1"/>
-          <p:nvPr/>
-        </p:nvSpPr>
-        <p:spPr>
-          <a:xfrm>
-            <a:off x="3995928" y="3364992"/>
-            <a:ext cx="1691640" cy="274320"/>
+          <p:cNvPr id="36" name="Text 26"/>
+          <p:cNvSpPr txBox="1"/>
+          <p:nvPr/>
+        </p:nvSpPr>
+        <p:spPr>
+          <a:xfrm>
+            <a:off x="4151376" y="3291840"/>
+            <a:ext cx="1609344" cy="310896"/>
           </a:xfrm>
           <a:prstGeom prst="rect">
             <a:avLst/>
@@ -10582,7 +10387,7 @@
               <a:buNone/>
             </a:pPr>
             <a:r>
-              <a:rPr lang="en-US" sz="1200" b="1" dirty="0">
+              <a:rPr lang="en-US" sz="1450" b="1" dirty="0">
                 <a:solidFill>
                   <a:srgbClr val="1C0F07"/>
                 </a:solidFill>
@@ -10592,20 +10397,20 @@
               </a:rPr>
               <a:t>Video meetings</a:t>
             </a:r>
-            <a:endParaRPr lang="en-US" sz="1200" dirty="0"/>
-          </a:p>
-        </p:txBody>
-      </p:sp>
-      <p:sp>
-        <p:nvSpPr>
-          <p:cNvPr id="38" name="Text 28"/>
-          <p:cNvSpPr txBox="1"/>
-          <p:nvPr/>
-        </p:nvSpPr>
-        <p:spPr>
-          <a:xfrm>
-            <a:off x="3410712" y="3785616"/>
-            <a:ext cx="2240280" cy="621792"/>
+            <a:endParaRPr lang="en-US" sz="1450" dirty="0"/>
+          </a:p>
+        </p:txBody>
+      </p:sp>
+      <p:sp>
+        <p:nvSpPr>
+          <p:cNvPr id="37" name="Text 27"/>
+          <p:cNvSpPr txBox="1"/>
+          <p:nvPr/>
+        </p:nvSpPr>
+        <p:spPr>
+          <a:xfrm>
+            <a:off x="3401568" y="3886200"/>
+            <a:ext cx="2286000" cy="621792"/>
           </a:xfrm>
           <a:prstGeom prst="rect">
             <a:avLst/>
@@ -10621,7 +10426,7 @@
               <a:buNone/>
             </a:pPr>
             <a:r>
-              <a:rPr lang="en-US" sz="1000" dirty="0">
+              <a:rPr lang="en-US" sz="1300" dirty="0">
                 <a:solidFill>
                   <a:srgbClr val="3D2312"/>
                 </a:solidFill>
@@ -10629,32 +10434,32 @@
                 <a:ea typeface="Calibri" pitchFamily="34" charset="-122"/>
                 <a:cs typeface="Calibri" pitchFamily="34" charset="-120"/>
               </a:rPr>
-              <a:t>Practise or plan without everyone travelling</a:t>
-            </a:r>
-            <a:endParaRPr lang="en-US" sz="1000" dirty="0"/>
-          </a:p>
-        </p:txBody>
-      </p:sp>
-      <p:sp>
-        <p:nvSpPr>
-          <p:cNvPr id="39" name="Shape 29"/>
+              <a:t>Plan without everyone travelling</a:t>
+            </a:r>
+            <a:endParaRPr lang="en-US" sz="1300" dirty="0"/>
+          </a:p>
+        </p:txBody>
+      </p:sp>
+      <p:sp>
+        <p:nvSpPr>
+          <p:cNvPr id="38" name="Shape 28"/>
           <p:cNvSpPr/>
           <p:nvPr/>
         </p:nvSpPr>
         <p:spPr>
           <a:xfrm>
-            <a:off x="5989320" y="3127248"/>
-            <a:ext cx="2560320" cy="1371600"/>
+            <a:off x="5998464" y="3017520"/>
+            <a:ext cx="2596896" cy="1572768"/>
           </a:xfrm>
           <a:prstGeom prst="roundRect">
             <a:avLst>
-              <a:gd name="adj" fmla="val 6667"/>
+              <a:gd name="adj" fmla="val 6395"/>
             </a:avLst>
           </a:prstGeom>
           <a:solidFill>
             <a:srgbClr val="FFFFFF"/>
           </a:solidFill>
-          <a:ln w="15875">
+          <a:ln w="19050">
             <a:solidFill>
               <a:srgbClr val="C9A84C"/>
             </a:solidFill>
@@ -10671,14 +10476,14 @@
       </p:sp>
       <p:sp>
         <p:nvSpPr>
-          <p:cNvPr id="40" name="Shape 30"/>
+          <p:cNvPr id="39" name="Shape 29"/>
           <p:cNvSpPr/>
           <p:nvPr/>
         </p:nvSpPr>
         <p:spPr>
           <a:xfrm>
-            <a:off x="6190488" y="3346704"/>
-            <a:ext cx="457200" cy="457200"/>
+            <a:off x="6181344" y="3218688"/>
+            <a:ext cx="566928" cy="566928"/>
           </a:xfrm>
           <a:prstGeom prst="ellipse">
             <a:avLst/>
@@ -10696,7 +10501,7 @@
       </p:sp>
       <p:pic>
         <p:nvPicPr>
-          <p:cNvPr id="41" name="Image 8" descr="preencoded.png">    </p:cNvPr>
+          <p:cNvPr id="40" name="Image 8" descr="preencoded.png">    </p:cNvPr>
           <p:cNvPicPr>
             <a:picLocks noChangeAspect="1"/>
           </p:cNvPicPr>
@@ -10710,8 +10515,8 @@
         </p:blipFill>
         <p:spPr>
           <a:xfrm>
-            <a:off x="6268212" y="3424428"/>
-            <a:ext cx="301752" cy="301752"/>
+            <a:off x="6289060" y="3326404"/>
+            <a:ext cx="351495" cy="351495"/>
           </a:xfrm>
           <a:prstGeom prst="rect">
             <a:avLst/>
@@ -10720,14 +10525,14 @@
       </p:pic>
       <p:sp>
         <p:nvSpPr>
-          <p:cNvPr id="42" name="Text 31"/>
-          <p:cNvSpPr txBox="1"/>
-          <p:nvPr/>
-        </p:nvSpPr>
-        <p:spPr>
-          <a:xfrm>
-            <a:off x="6739128" y="3364992"/>
-            <a:ext cx="1691640" cy="274320"/>
+          <p:cNvPr id="41" name="Text 30"/>
+          <p:cNvSpPr txBox="1"/>
+          <p:nvPr/>
+        </p:nvSpPr>
+        <p:spPr>
+          <a:xfrm>
+            <a:off x="6912864" y="3291840"/>
+            <a:ext cx="1609344" cy="310896"/>
           </a:xfrm>
           <a:prstGeom prst="rect">
             <a:avLst/>
@@ -10743,7 +10548,7 @@
               <a:buNone/>
             </a:pPr>
             <a:r>
-              <a:rPr lang="en-US" sz="1200" b="1" dirty="0">
+              <a:rPr lang="en-US" sz="1450" b="1" dirty="0">
                 <a:solidFill>
                   <a:srgbClr val="1C0F07"/>
                 </a:solidFill>
@@ -10753,20 +10558,20 @@
               </a:rPr>
               <a:t>Shared files</a:t>
             </a:r>
-            <a:endParaRPr lang="en-US" sz="1200" dirty="0"/>
-          </a:p>
-        </p:txBody>
-      </p:sp>
-      <p:sp>
-        <p:nvSpPr>
-          <p:cNvPr id="43" name="Text 32"/>
-          <p:cNvSpPr txBox="1"/>
-          <p:nvPr/>
-        </p:nvSpPr>
-        <p:spPr>
-          <a:xfrm>
-            <a:off x="6153912" y="3785616"/>
-            <a:ext cx="2240280" cy="621792"/>
+            <a:endParaRPr lang="en-US" sz="1450" dirty="0"/>
+          </a:p>
+        </p:txBody>
+      </p:sp>
+      <p:sp>
+        <p:nvSpPr>
+          <p:cNvPr id="42" name="Text 31"/>
+          <p:cNvSpPr txBox="1"/>
+          <p:nvPr/>
+        </p:nvSpPr>
+        <p:spPr>
+          <a:xfrm>
+            <a:off x="6163056" y="3886200"/>
+            <a:ext cx="2286000" cy="621792"/>
           </a:xfrm>
           <a:prstGeom prst="rect">
             <a:avLst/>
@@ -10782,7 +10587,7 @@
               <a:buNone/>
             </a:pPr>
             <a:r>
-              <a:rPr lang="en-US" sz="1000" dirty="0">
+              <a:rPr lang="en-US" sz="1300" dirty="0">
                 <a:solidFill>
                   <a:srgbClr val="3D2312"/>
                 </a:solidFill>
@@ -10790,9 +10595,9 @@
                 <a:ea typeface="Calibri" pitchFamily="34" charset="-122"/>
                 <a:cs typeface="Calibri" pitchFamily="34" charset="-120"/>
               </a:rPr>
-              <a:t>Song lists, rotas and plans in one place</a:t>
-            </a:r>
-            <a:endParaRPr lang="en-US" sz="1000" dirty="0"/>
+              <a:t>Song lists and rotas in one place</a:t>
+            </a:r>
+            <a:endParaRPr lang="en-US" sz="1300" dirty="0"/>
           </a:p>
         </p:txBody>
       </p:sp>
@@ -10836,24 +10641,24 @@
         </p:nvSpPr>
         <p:spPr>
           <a:xfrm>
-            <a:off x="502920" y="384048"/>
-            <a:ext cx="8138160" cy="548640"/>
-          </a:xfrm>
-          <a:prstGeom prst="rect">
-            <a:avLst/>
-          </a:prstGeom>
-          <a:noFill/>
-          <a:ln/>
-        </p:spPr>
-        <p:txBody>
-          <a:bodyPr wrap="square" lIns="0" tIns="0" rIns="0" bIns="0" rtlCol="0" anchor="ctr"/>
-          <a:lstStyle/>
-          <a:p>
-            <a:pPr indent="0" marL="0">
-              <a:buNone/>
-            </a:pPr>
-            <a:r>
-              <a:rPr lang="en-US" sz="3200" b="1" dirty="0">
+            <a:off x="502920" y="274320"/>
+            <a:ext cx="8138160" cy="603504"/>
+          </a:xfrm>
+          <a:prstGeom prst="rect">
+            <a:avLst/>
+          </a:prstGeom>
+          <a:noFill/>
+          <a:ln/>
+        </p:spPr>
+        <p:txBody>
+          <a:bodyPr wrap="square" lIns="0" tIns="0" rIns="0" bIns="0" rtlCol="0" anchor="ctr"/>
+          <a:lstStyle/>
+          <a:p>
+            <a:pPr algn="l" indent="0" marL="0">
+              <a:buNone/>
+            </a:pPr>
+            <a:r>
+              <a:rPr lang="en-US" sz="3400" b="1" dirty="0">
                 <a:solidFill>
                   <a:srgbClr val="C9A84C"/>
                 </a:solidFill>
@@ -10863,7 +10668,7 @@
               </a:rPr>
               <a:t>Our Library Opens Today</a:t>
             </a:r>
-            <a:endParaRPr lang="en-US" sz="3200" dirty="0"/>
+            <a:endParaRPr lang="en-US" sz="3400" dirty="0"/>
           </a:p>
         </p:txBody>
       </p:sp>
@@ -10875,8 +10680,44 @@
         </p:nvSpPr>
         <p:spPr>
           <a:xfrm>
-            <a:off x="502920" y="914400"/>
-            <a:ext cx="8138160" cy="347472"/>
+            <a:off x="502920" y="841248"/>
+            <a:ext cx="8138160" cy="365760"/>
+          </a:xfrm>
+          <a:prstGeom prst="rect">
+            <a:avLst/>
+          </a:prstGeom>
+          <a:noFill/>
+          <a:ln/>
+        </p:spPr>
+        <p:txBody>
+          <a:bodyPr wrap="square" lIns="0" tIns="0" rIns="0" bIns="0" rtlCol="0" anchor="ctr"/>
+          <a:lstStyle/>
+          <a:p>
+            <a:pPr algn="l" indent="0" marL="0">
+              <a:buNone/>
+            </a:pPr>
+            <a:r>
+              <a:rPr lang="en-US" sz="1900" dirty="0">
+                <a:solidFill>
+                  <a:srgbClr val="FAF7F0"/>
+                </a:solidFill>
+              </a:rPr>
+              <a:t>ቤተ-መጻሕፍታችን ዛሬ ይከፈታል</a:t>
+            </a:r>
+            <a:endParaRPr lang="en-US" sz="1900" dirty="0"/>
+          </a:p>
+        </p:txBody>
+      </p:sp>
+      <p:sp>
+        <p:nvSpPr>
+          <p:cNvPr id="4" name="Text 2"/>
+          <p:cNvSpPr txBox="1"/>
+          <p:nvPr/>
+        </p:nvSpPr>
+        <p:spPr>
+          <a:xfrm>
+            <a:off x="502920" y="1243584"/>
+            <a:ext cx="8138160" cy="329184"/>
           </a:xfrm>
           <a:prstGeom prst="rect">
             <a:avLst/>
@@ -10892,43 +10733,7 @@
               <a:buNone/>
             </a:pPr>
             <a:r>
-              <a:rPr lang="en-US" sz="1700" dirty="0">
-                <a:solidFill>
-                  <a:srgbClr val="FAF7F0"/>
-                </a:solidFill>
-              </a:rPr>
-              <a:t>ቤተ-መጻሕፍታችን ዛሬ ይከፈታል</a:t>
-            </a:r>
-            <a:endParaRPr lang="en-US" sz="1700" dirty="0"/>
-          </a:p>
-        </p:txBody>
-      </p:sp>
-      <p:sp>
-        <p:nvSpPr>
-          <p:cNvPr id="4" name="Text 2"/>
-          <p:cNvSpPr txBox="1"/>
-          <p:nvPr/>
-        </p:nvSpPr>
-        <p:spPr>
-          <a:xfrm>
-            <a:off x="502920" y="1335024"/>
-            <a:ext cx="8138160" cy="292608"/>
-          </a:xfrm>
-          <a:prstGeom prst="rect">
-            <a:avLst/>
-          </a:prstGeom>
-          <a:noFill/>
-          <a:ln/>
-        </p:spPr>
-        <p:txBody>
-          <a:bodyPr wrap="square" lIns="0" tIns="0" rIns="0" bIns="0" rtlCol="0" anchor="ctr"/>
-          <a:lstStyle/>
-          <a:p>
-            <a:pPr indent="0" marL="0">
-              <a:buNone/>
-            </a:pPr>
-            <a:r>
-              <a:rPr lang="en-US" sz="1300" i="1" dirty="0">
+              <a:rPr lang="en-US" sz="1500" i="1" dirty="0">
                 <a:solidFill>
                   <a:srgbClr val="EDD090"/>
                 </a:solidFill>
@@ -10936,9 +10741,9 @@
                 <a:ea typeface="Calibri" pitchFamily="34" charset="-122"/>
                 <a:cs typeface="Calibri" pitchFamily="34" charset="-120"/>
               </a:rPr>
-              <a:t>Christian books to read, borrow and return — free for every member of the fellowship.</a:t>
-            </a:r>
-            <a:endParaRPr lang="en-US" sz="1300" dirty="0"/>
+              <a:t>Christian books to borrow — free for every member.</a:t>
+            </a:r>
+            <a:endParaRPr lang="en-US" sz="1500" dirty="0"/>
           </a:p>
         </p:txBody>
       </p:sp>
@@ -10950,18 +10755,18 @@
         </p:nvSpPr>
         <p:spPr>
           <a:xfrm>
-            <a:off x="502920" y="1828800"/>
-            <a:ext cx="1920240" cy="2286000"/>
+            <a:off x="425196" y="1737360"/>
+            <a:ext cx="1956816" cy="2377440"/>
           </a:xfrm>
           <a:prstGeom prst="roundRect">
             <a:avLst>
-              <a:gd name="adj" fmla="val 3810"/>
+              <a:gd name="adj" fmla="val 4673"/>
             </a:avLst>
           </a:prstGeom>
           <a:solidFill>
             <a:srgbClr val="2B1508"/>
           </a:solidFill>
-          <a:ln w="12700">
+          <a:ln w="15875">
             <a:solidFill>
               <a:srgbClr val="C9A84C"/>
             </a:solidFill>
@@ -10977,8 +10782,8 @@
         </p:nvSpPr>
         <p:spPr>
           <a:xfrm>
-            <a:off x="1188720" y="2029968"/>
-            <a:ext cx="548640" cy="548640"/>
+            <a:off x="1046988" y="1956816"/>
+            <a:ext cx="713232" cy="713232"/>
           </a:xfrm>
           <a:prstGeom prst="ellipse">
             <a:avLst/>
@@ -11010,8 +10815,8 @@
         </p:blipFill>
         <p:spPr>
           <a:xfrm>
-            <a:off x="1281989" y="2123237"/>
-            <a:ext cx="362102" cy="362102"/>
+            <a:off x="1182502" y="2092330"/>
+            <a:ext cx="442204" cy="442204"/>
           </a:xfrm>
           <a:prstGeom prst="rect">
             <a:avLst/>
@@ -11026,8 +10831,8 @@
         </p:nvSpPr>
         <p:spPr>
           <a:xfrm>
-            <a:off x="576072" y="2670048"/>
-            <a:ext cx="1773936" cy="292608"/>
+            <a:off x="480060" y="2761488"/>
+            <a:ext cx="1847088" cy="329184"/>
           </a:xfrm>
           <a:prstGeom prst="rect">
             <a:avLst/>
@@ -11043,7 +10848,7 @@
               <a:buNone/>
             </a:pPr>
             <a:r>
-              <a:rPr lang="en-US" sz="1350" b="1" dirty="0">
+              <a:rPr lang="en-US" sz="1550" b="1" dirty="0">
                 <a:solidFill>
                   <a:srgbClr val="C9A84C"/>
                 </a:solidFill>
@@ -11053,7 +10858,7 @@
               </a:rPr>
               <a:t>1. Browse</a:t>
             </a:r>
-            <a:endParaRPr lang="en-US" sz="1350" dirty="0"/>
+            <a:endParaRPr lang="en-US" sz="1550" dirty="0"/>
           </a:p>
         </p:txBody>
       </p:sp>
@@ -11065,8 +10870,8 @@
         </p:nvSpPr>
         <p:spPr>
           <a:xfrm>
-            <a:off x="576072" y="2962656"/>
-            <a:ext cx="1773936" cy="256032"/>
+            <a:off x="480060" y="3090672"/>
+            <a:ext cx="1847088" cy="292608"/>
           </a:xfrm>
           <a:prstGeom prst="rect">
             <a:avLst/>
@@ -11082,14 +10887,14 @@
               <a:buNone/>
             </a:pPr>
             <a:r>
-              <a:rPr lang="en-US" sz="1100" dirty="0">
+              <a:rPr lang="en-US" sz="1300" dirty="0">
                 <a:solidFill>
                   <a:srgbClr val="FAF7F0"/>
                 </a:solidFill>
               </a:rPr>
               <a:t>ያስሱ</a:t>
             </a:r>
-            <a:endParaRPr lang="en-US" sz="1100" dirty="0"/>
+            <a:endParaRPr lang="en-US" sz="1300" dirty="0"/>
           </a:p>
         </p:txBody>
       </p:sp>
@@ -11101,8 +10906,8 @@
         </p:nvSpPr>
         <p:spPr>
           <a:xfrm>
-            <a:off x="612648" y="3255264"/>
-            <a:ext cx="1700784" cy="731520"/>
+            <a:off x="516636" y="3419856"/>
+            <a:ext cx="1773936" cy="603504"/>
           </a:xfrm>
           <a:prstGeom prst="rect">
             <a:avLst/>
@@ -11118,7 +10923,7 @@
               <a:buNone/>
             </a:pPr>
             <a:r>
-              <a:rPr lang="en-US" sz="1000" dirty="0">
+              <a:rPr lang="en-US" sz="1300" dirty="0">
                 <a:solidFill>
                   <a:srgbClr val="EDD090"/>
                 </a:solidFill>
@@ -11126,9 +10931,9 @@
                 <a:ea typeface="Calibri" pitchFamily="34" charset="-122"/>
                 <a:cs typeface="Calibri" pitchFamily="34" charset="-120"/>
               </a:rPr>
-              <a:t>See every title and what is on the shelf</a:t>
-            </a:r>
-            <a:endParaRPr lang="en-US" sz="1000" dirty="0"/>
+              <a:t>See what is on the shelf</a:t>
+            </a:r>
+            <a:endParaRPr lang="en-US" sz="1300" dirty="0"/>
           </a:p>
         </p:txBody>
       </p:sp>
@@ -11140,18 +10945,18 @@
         </p:nvSpPr>
         <p:spPr>
           <a:xfrm>
-            <a:off x="2587752" y="1828800"/>
-            <a:ext cx="1920240" cy="2286000"/>
+            <a:off x="2537460" y="1737360"/>
+            <a:ext cx="1956816" cy="2377440"/>
           </a:xfrm>
           <a:prstGeom prst="roundRect">
             <a:avLst>
-              <a:gd name="adj" fmla="val 3810"/>
+              <a:gd name="adj" fmla="val 4673"/>
             </a:avLst>
           </a:prstGeom>
           <a:solidFill>
             <a:srgbClr val="2B1508"/>
           </a:solidFill>
-          <a:ln w="12700">
+          <a:ln w="15875">
             <a:solidFill>
               <a:srgbClr val="C9A84C"/>
             </a:solidFill>
@@ -11167,8 +10972,8 @@
         </p:nvSpPr>
         <p:spPr>
           <a:xfrm>
-            <a:off x="3273552" y="2029968"/>
-            <a:ext cx="548640" cy="548640"/>
+            <a:off x="3159252" y="1956816"/>
+            <a:ext cx="713232" cy="713232"/>
           </a:xfrm>
           <a:prstGeom prst="ellipse">
             <a:avLst/>
@@ -11200,8 +11005,8 @@
         </p:blipFill>
         <p:spPr>
           <a:xfrm>
-            <a:off x="3366821" y="2123237"/>
-            <a:ext cx="362102" cy="362102"/>
+            <a:off x="3294766" y="2092330"/>
+            <a:ext cx="442204" cy="442204"/>
           </a:xfrm>
           <a:prstGeom prst="rect">
             <a:avLst/>
@@ -11216,8 +11021,8 @@
         </p:nvSpPr>
         <p:spPr>
           <a:xfrm>
-            <a:off x="2660904" y="2670048"/>
-            <a:ext cx="1773936" cy="292608"/>
+            <a:off x="2592324" y="2761488"/>
+            <a:ext cx="1847088" cy="329184"/>
           </a:xfrm>
           <a:prstGeom prst="rect">
             <a:avLst/>
@@ -11233,7 +11038,7 @@
               <a:buNone/>
             </a:pPr>
             <a:r>
-              <a:rPr lang="en-US" sz="1350" b="1" dirty="0">
+              <a:rPr lang="en-US" sz="1550" b="1" dirty="0">
                 <a:solidFill>
                   <a:srgbClr val="C9A84C"/>
                 </a:solidFill>
@@ -11243,7 +11048,7 @@
               </a:rPr>
               <a:t>2. Reserve</a:t>
             </a:r>
-            <a:endParaRPr lang="en-US" sz="1350" dirty="0"/>
+            <a:endParaRPr lang="en-US" sz="1550" dirty="0"/>
           </a:p>
         </p:txBody>
       </p:sp>
@@ -11255,8 +11060,8 @@
         </p:nvSpPr>
         <p:spPr>
           <a:xfrm>
-            <a:off x="2660904" y="2962656"/>
-            <a:ext cx="1773936" cy="256032"/>
+            <a:off x="2592324" y="3090672"/>
+            <a:ext cx="1847088" cy="292608"/>
           </a:xfrm>
           <a:prstGeom prst="rect">
             <a:avLst/>
@@ -11272,14 +11077,14 @@
               <a:buNone/>
             </a:pPr>
             <a:r>
-              <a:rPr lang="en-US" sz="1100" dirty="0">
+              <a:rPr lang="en-US" sz="1300" dirty="0">
                 <a:solidFill>
                   <a:srgbClr val="FAF7F0"/>
                 </a:solidFill>
               </a:rPr>
               <a:t>ያስይዙ</a:t>
             </a:r>
-            <a:endParaRPr lang="en-US" sz="1100" dirty="0"/>
+            <a:endParaRPr lang="en-US" sz="1300" dirty="0"/>
           </a:p>
         </p:txBody>
       </p:sp>
@@ -11291,8 +11096,8 @@
         </p:nvSpPr>
         <p:spPr>
           <a:xfrm>
-            <a:off x="2697480" y="3255264"/>
-            <a:ext cx="1700784" cy="731520"/>
+            <a:off x="2628900" y="3419856"/>
+            <a:ext cx="1773936" cy="603504"/>
           </a:xfrm>
           <a:prstGeom prst="rect">
             <a:avLst/>
@@ -11308,7 +11113,7 @@
               <a:buNone/>
             </a:pPr>
             <a:r>
-              <a:rPr lang="en-US" sz="1000" dirty="0">
+              <a:rPr lang="en-US" sz="1300" dirty="0">
                 <a:solidFill>
                   <a:srgbClr val="EDD090"/>
                 </a:solidFill>
@@ -11316,9 +11121,9 @@
                 <a:ea typeface="Calibri" pitchFamily="34" charset="-122"/>
                 <a:cs typeface="Calibri" pitchFamily="34" charset="-120"/>
               </a:rPr>
-              <a:t>Tap to reserve — we hold it for you</a:t>
-            </a:r>
-            <a:endParaRPr lang="en-US" sz="1000" dirty="0"/>
+              <a:t>We hold it for you</a:t>
+            </a:r>
+            <a:endParaRPr lang="en-US" sz="1300" dirty="0"/>
           </a:p>
         </p:txBody>
       </p:sp>
@@ -11330,18 +11135,18 @@
         </p:nvSpPr>
         <p:spPr>
           <a:xfrm>
-            <a:off x="4672584" y="1828800"/>
-            <a:ext cx="1920240" cy="2286000"/>
+            <a:off x="4649724" y="1737360"/>
+            <a:ext cx="1956816" cy="2377440"/>
           </a:xfrm>
           <a:prstGeom prst="roundRect">
             <a:avLst>
-              <a:gd name="adj" fmla="val 3810"/>
+              <a:gd name="adj" fmla="val 4673"/>
             </a:avLst>
           </a:prstGeom>
           <a:solidFill>
             <a:srgbClr val="2B1508"/>
           </a:solidFill>
-          <a:ln w="12700">
+          <a:ln w="15875">
             <a:solidFill>
               <a:srgbClr val="C9A84C"/>
             </a:solidFill>
@@ -11357,8 +11162,8 @@
         </p:nvSpPr>
         <p:spPr>
           <a:xfrm>
-            <a:off x="5358384" y="2029968"/>
-            <a:ext cx="548640" cy="548640"/>
+            <a:off x="5271516" y="1956816"/>
+            <a:ext cx="713232" cy="713232"/>
           </a:xfrm>
           <a:prstGeom prst="ellipse">
             <a:avLst/>
@@ -11390,8 +11195,8 @@
         </p:blipFill>
         <p:spPr>
           <a:xfrm>
-            <a:off x="5451653" y="2123237"/>
-            <a:ext cx="362102" cy="362102"/>
+            <a:off x="5407030" y="2092330"/>
+            <a:ext cx="442204" cy="442204"/>
           </a:xfrm>
           <a:prstGeom prst="rect">
             <a:avLst/>
@@ -11406,8 +11211,8 @@
         </p:nvSpPr>
         <p:spPr>
           <a:xfrm>
-            <a:off x="4745736" y="2670048"/>
-            <a:ext cx="1773936" cy="292608"/>
+            <a:off x="4704588" y="2761488"/>
+            <a:ext cx="1847088" cy="329184"/>
           </a:xfrm>
           <a:prstGeom prst="rect">
             <a:avLst/>
@@ -11423,7 +11228,7 @@
               <a:buNone/>
             </a:pPr>
             <a:r>
-              <a:rPr lang="en-US" sz="1350" b="1" dirty="0">
+              <a:rPr lang="en-US" sz="1550" b="1" dirty="0">
                 <a:solidFill>
                   <a:srgbClr val="C9A84C"/>
                 </a:solidFill>
@@ -11433,7 +11238,7 @@
               </a:rPr>
               <a:t>3. Collect</a:t>
             </a:r>
-            <a:endParaRPr lang="en-US" sz="1350" dirty="0"/>
+            <a:endParaRPr lang="en-US" sz="1550" dirty="0"/>
           </a:p>
         </p:txBody>
       </p:sp>
@@ -11445,8 +11250,8 @@
         </p:nvSpPr>
         <p:spPr>
           <a:xfrm>
-            <a:off x="4745736" y="2962656"/>
-            <a:ext cx="1773936" cy="256032"/>
+            <a:off x="4704588" y="3090672"/>
+            <a:ext cx="1847088" cy="292608"/>
           </a:xfrm>
           <a:prstGeom prst="rect">
             <a:avLst/>
@@ -11462,14 +11267,14 @@
               <a:buNone/>
             </a:pPr>
             <a:r>
-              <a:rPr lang="en-US" sz="1100" dirty="0">
+              <a:rPr lang="en-US" sz="1300" dirty="0">
                 <a:solidFill>
                   <a:srgbClr val="FAF7F0"/>
                 </a:solidFill>
               </a:rPr>
               <a:t>ይውሰዱ</a:t>
             </a:r>
-            <a:endParaRPr lang="en-US" sz="1100" dirty="0"/>
+            <a:endParaRPr lang="en-US" sz="1300" dirty="0"/>
           </a:p>
         </p:txBody>
       </p:sp>
@@ -11481,8 +11286,8 @@
         </p:nvSpPr>
         <p:spPr>
           <a:xfrm>
-            <a:off x="4782312" y="3255264"/>
-            <a:ext cx="1700784" cy="731520"/>
+            <a:off x="4741164" y="3419856"/>
+            <a:ext cx="1773936" cy="603504"/>
           </a:xfrm>
           <a:prstGeom prst="rect">
             <a:avLst/>
@@ -11498,7 +11303,7 @@
               <a:buNone/>
             </a:pPr>
             <a:r>
-              <a:rPr lang="en-US" sz="1000" dirty="0">
+              <a:rPr lang="en-US" sz="1300" dirty="0">
                 <a:solidFill>
                   <a:srgbClr val="EDD090"/>
                 </a:solidFill>
@@ -11506,9 +11311,9 @@
                 <a:ea typeface="Calibri" pitchFamily="34" charset="-122"/>
                 <a:cs typeface="Calibri" pitchFamily="34" charset="-120"/>
               </a:rPr>
-              <a:t>Pick it up at the next fellowship</a:t>
-            </a:r>
-            <a:endParaRPr lang="en-US" sz="1000" dirty="0"/>
+              <a:t>Pick it up at fellowship</a:t>
+            </a:r>
+            <a:endParaRPr lang="en-US" sz="1300" dirty="0"/>
           </a:p>
         </p:txBody>
       </p:sp>
@@ -11520,18 +11325,18 @@
         </p:nvSpPr>
         <p:spPr>
           <a:xfrm>
-            <a:off x="6757416" y="1828800"/>
-            <a:ext cx="1920240" cy="2286000"/>
+            <a:off x="6761988" y="1737360"/>
+            <a:ext cx="1956816" cy="2377440"/>
           </a:xfrm>
           <a:prstGeom prst="roundRect">
             <a:avLst>
-              <a:gd name="adj" fmla="val 3810"/>
+              <a:gd name="adj" fmla="val 4673"/>
             </a:avLst>
           </a:prstGeom>
           <a:solidFill>
             <a:srgbClr val="2B1508"/>
           </a:solidFill>
-          <a:ln w="12700">
+          <a:ln w="15875">
             <a:solidFill>
               <a:srgbClr val="C9A84C"/>
             </a:solidFill>
@@ -11547,8 +11352,8 @@
         </p:nvSpPr>
         <p:spPr>
           <a:xfrm>
-            <a:off x="7443216" y="2029968"/>
-            <a:ext cx="548640" cy="548640"/>
+            <a:off x="7383780" y="1956816"/>
+            <a:ext cx="713232" cy="713232"/>
           </a:xfrm>
           <a:prstGeom prst="ellipse">
             <a:avLst/>
@@ -11580,8 +11385,8 @@
         </p:blipFill>
         <p:spPr>
           <a:xfrm>
-            <a:off x="7536485" y="2123237"/>
-            <a:ext cx="362102" cy="362102"/>
+            <a:off x="7519294" y="2092330"/>
+            <a:ext cx="442204" cy="442204"/>
           </a:xfrm>
           <a:prstGeom prst="rect">
             <a:avLst/>
@@ -11596,8 +11401,8 @@
         </p:nvSpPr>
         <p:spPr>
           <a:xfrm>
-            <a:off x="6830568" y="2670048"/>
-            <a:ext cx="1773936" cy="292608"/>
+            <a:off x="6816852" y="2761488"/>
+            <a:ext cx="1847088" cy="329184"/>
           </a:xfrm>
           <a:prstGeom prst="rect">
             <a:avLst/>
@@ -11613,7 +11418,7 @@
               <a:buNone/>
             </a:pPr>
             <a:r>
-              <a:rPr lang="en-US" sz="1350" b="1" dirty="0">
+              <a:rPr lang="en-US" sz="1550" b="1" dirty="0">
                 <a:solidFill>
                   <a:srgbClr val="C9A84C"/>
                 </a:solidFill>
@@ -11623,7 +11428,7 @@
               </a:rPr>
               <a:t>4. Return</a:t>
             </a:r>
-            <a:endParaRPr lang="en-US" sz="1350" dirty="0"/>
+            <a:endParaRPr lang="en-US" sz="1550" dirty="0"/>
           </a:p>
         </p:txBody>
       </p:sp>
@@ -11635,8 +11440,8 @@
         </p:nvSpPr>
         <p:spPr>
           <a:xfrm>
-            <a:off x="6830568" y="2962656"/>
-            <a:ext cx="1773936" cy="256032"/>
+            <a:off x="6816852" y="3090672"/>
+            <a:ext cx="1847088" cy="292608"/>
           </a:xfrm>
           <a:prstGeom prst="rect">
             <a:avLst/>
@@ -11652,14 +11457,14 @@
               <a:buNone/>
             </a:pPr>
             <a:r>
-              <a:rPr lang="en-US" sz="1100" dirty="0">
+              <a:rPr lang="en-US" sz="1300" dirty="0">
                 <a:solidFill>
                   <a:srgbClr val="FAF7F0"/>
                 </a:solidFill>
               </a:rPr>
               <a:t>ይመልሱ</a:t>
             </a:r>
-            <a:endParaRPr lang="en-US" sz="1100" dirty="0"/>
+            <a:endParaRPr lang="en-US" sz="1300" dirty="0"/>
           </a:p>
         </p:txBody>
       </p:sp>
@@ -11671,8 +11476,8 @@
         </p:nvSpPr>
         <p:spPr>
           <a:xfrm>
-            <a:off x="6867144" y="3255264"/>
-            <a:ext cx="1700784" cy="731520"/>
+            <a:off x="6853428" y="3419856"/>
+            <a:ext cx="1773936" cy="603504"/>
           </a:xfrm>
           <a:prstGeom prst="rect">
             <a:avLst/>
@@ -11688,7 +11493,7 @@
               <a:buNone/>
             </a:pPr>
             <a:r>
-              <a:rPr lang="en-US" sz="1000" dirty="0">
+              <a:rPr lang="en-US" sz="1300" dirty="0">
                 <a:solidFill>
                   <a:srgbClr val="EDD090"/>
                 </a:solidFill>
@@ -11696,9 +11501,9 @@
                 <a:ea typeface="Calibri" pitchFamily="34" charset="-122"/>
                 <a:cs typeface="Calibri" pitchFamily="34" charset="-120"/>
               </a:rPr>
-              <a:t>We remind you before it is due</a:t>
-            </a:r>
-            <a:endParaRPr lang="en-US" sz="1000" dirty="0"/>
+              <a:t>We remind you in time</a:t>
+            </a:r>
+            <a:endParaRPr lang="en-US" sz="1300" dirty="0"/>
           </a:p>
         </p:txBody>
       </p:sp>
@@ -11710,8 +11515,8 @@
         </p:nvSpPr>
         <p:spPr>
           <a:xfrm>
-            <a:off x="502920" y="4315968"/>
-            <a:ext cx="8138160" cy="292608"/>
+            <a:off x="502920" y="4352544"/>
+            <a:ext cx="8138160" cy="310896"/>
           </a:xfrm>
           <a:prstGeom prst="rect">
             <a:avLst/>
@@ -11727,7 +11532,7 @@
               <a:buNone/>
             </a:pPr>
             <a:r>
-              <a:rPr lang="en-US" sz="1100" i="1" dirty="0">
+              <a:rPr lang="en-US" sz="1300" i="1" dirty="0">
                 <a:solidFill>
                   <a:srgbClr val="FAF7F0"/>
                 </a:solidFill>
@@ -11735,9 +11540,9 @@
                 <a:ea typeface="Calibri" pitchFamily="34" charset="-122"/>
                 <a:cs typeface="Calibri" pitchFamily="34" charset="-120"/>
               </a:rPr>
-              <a:t>Books are free to borrow. Please return them on time so others can read them too.</a:t>
-            </a:r>
-            <a:endParaRPr lang="en-US" sz="1100" dirty="0"/>
+              <a:t>Please return them on time so others can read them too.</a:t>
+            </a:r>
+            <a:endParaRPr lang="en-US" sz="1300" dirty="0"/>
           </a:p>
         </p:txBody>
       </p:sp>
@@ -11781,8 +11586,8 @@
         </p:nvSpPr>
         <p:spPr>
           <a:xfrm>
-            <a:off x="640080" y="1554480"/>
-            <a:ext cx="1828800" cy="1828800"/>
+            <a:off x="566928" y="1572768"/>
+            <a:ext cx="2057400" cy="2057400"/>
           </a:xfrm>
           <a:prstGeom prst="ellipse">
             <a:avLst/>
@@ -11814,8 +11619,8 @@
         </p:blipFill>
         <p:spPr>
           <a:xfrm>
-            <a:off x="950976" y="1865376"/>
-            <a:ext cx="1207008" cy="1207008"/>
+            <a:off x="957834" y="1963674"/>
+            <a:ext cx="1275588" cy="1275588"/>
           </a:xfrm>
           <a:prstGeom prst="rect">
             <a:avLst/>
@@ -11830,8 +11635,8 @@
         </p:nvSpPr>
         <p:spPr>
           <a:xfrm>
-            <a:off x="3017520" y="274320"/>
-            <a:ext cx="5669280" cy="566928"/>
+            <a:off x="3108960" y="274320"/>
+            <a:ext cx="5577840" cy="603504"/>
           </a:xfrm>
           <a:prstGeom prst="rect">
             <a:avLst/>
@@ -11847,7 +11652,7 @@
               <a:buNone/>
             </a:pPr>
             <a:r>
-              <a:rPr lang="en-US" sz="3200" b="1" dirty="0">
+              <a:rPr lang="en-US" sz="3400" b="1" dirty="0">
                 <a:solidFill>
                   <a:srgbClr val="1C0F07"/>
                 </a:solidFill>
@@ -11857,7 +11662,7 @@
               </a:rPr>
               <a:t>Never Miss a Thing</a:t>
             </a:r>
-            <a:endParaRPr lang="en-US" sz="3200" dirty="0"/>
+            <a:endParaRPr lang="en-US" sz="3400" dirty="0"/>
           </a:p>
         </p:txBody>
       </p:sp>
@@ -11869,8 +11674,8 @@
         </p:nvSpPr>
         <p:spPr>
           <a:xfrm>
-            <a:off x="3017520" y="804672"/>
-            <a:ext cx="5669280" cy="347472"/>
+            <a:off x="3108960" y="841248"/>
+            <a:ext cx="5577840" cy="365760"/>
           </a:xfrm>
           <a:prstGeom prst="rect">
             <a:avLst/>
@@ -11886,14 +11691,14 @@
               <a:buNone/>
             </a:pPr>
             <a:r>
-              <a:rPr lang="en-US" sz="1700" dirty="0">
+              <a:rPr lang="en-US" sz="1900" dirty="0">
                 <a:solidFill>
                   <a:srgbClr val="7A5535"/>
                 </a:solidFill>
               </a:rPr>
               <a:t>ምንም ነገር አያመልጥዎ</a:t>
             </a:r>
-            <a:endParaRPr lang="en-US" sz="1700" dirty="0"/>
+            <a:endParaRPr lang="en-US" sz="1900" dirty="0"/>
           </a:p>
         </p:txBody>
       </p:sp>
@@ -11905,8 +11710,8 @@
         </p:nvSpPr>
         <p:spPr>
           <a:xfrm>
-            <a:off x="3017520" y="1298448"/>
-            <a:ext cx="5669280" cy="512064"/>
+            <a:off x="3108960" y="1371600"/>
+            <a:ext cx="5577840" cy="512064"/>
           </a:xfrm>
           <a:prstGeom prst="roundRect">
             <a:avLst>
@@ -11916,7 +11721,7 @@
           <a:solidFill>
             <a:srgbClr val="FAF7F0"/>
           </a:solidFill>
-          <a:ln w="9525">
+          <a:ln w="12700">
             <a:solidFill>
               <a:srgbClr val="C9A84C"/>
             </a:solidFill>
@@ -11932,8 +11737,8 @@
         </p:nvSpPr>
         <p:spPr>
           <a:xfrm>
-            <a:off x="3182112" y="1426464"/>
-            <a:ext cx="5394960" cy="274320"/>
+            <a:off x="3291840" y="1490472"/>
+            <a:ext cx="5257800" cy="292608"/>
           </a:xfrm>
           <a:prstGeom prst="rect">
             <a:avLst/>
@@ -11949,7 +11754,7 @@
               <a:buNone/>
             </a:pPr>
             <a:r>
-              <a:rPr lang="en-US" sz="1200" dirty="0">
+              <a:rPr lang="en-US" sz="1350" dirty="0">
                 <a:solidFill>
                   <a:srgbClr val="3D2312"/>
                 </a:solidFill>
@@ -11959,7 +11764,7 @@
               </a:rPr>
               <a:t>A new announcement is posted</a:t>
             </a:r>
-            <a:endParaRPr lang="en-US" sz="1200" dirty="0"/>
+            <a:endParaRPr lang="en-US" sz="1350" dirty="0"/>
           </a:p>
         </p:txBody>
       </p:sp>
@@ -11971,8 +11776,8 @@
         </p:nvSpPr>
         <p:spPr>
           <a:xfrm>
-            <a:off x="3017520" y="1920240"/>
-            <a:ext cx="5669280" cy="512064"/>
+            <a:off x="3108960" y="2011680"/>
+            <a:ext cx="5577840" cy="512064"/>
           </a:xfrm>
           <a:prstGeom prst="roundRect">
             <a:avLst>
@@ -11982,7 +11787,7 @@
           <a:solidFill>
             <a:srgbClr val="FAF7F0"/>
           </a:solidFill>
-          <a:ln w="9525">
+          <a:ln w="12700">
             <a:solidFill>
               <a:srgbClr val="C9A84C"/>
             </a:solidFill>
@@ -11998,8 +11803,8 @@
         </p:nvSpPr>
         <p:spPr>
           <a:xfrm>
-            <a:off x="3182112" y="2048256"/>
-            <a:ext cx="5394960" cy="274320"/>
+            <a:off x="3291840" y="2130552"/>
+            <a:ext cx="5257800" cy="292608"/>
           </a:xfrm>
           <a:prstGeom prst="rect">
             <a:avLst/>
@@ -12015,7 +11820,7 @@
               <a:buNone/>
             </a:pPr>
             <a:r>
-              <a:rPr lang="en-US" sz="1200" dirty="0">
+              <a:rPr lang="en-US" sz="1350" dirty="0">
                 <a:solidFill>
                   <a:srgbClr val="3D2312"/>
                 </a:solidFill>
@@ -12025,7 +11830,7 @@
               </a:rPr>
               <a:t>An event starts tomorrow</a:t>
             </a:r>
-            <a:endParaRPr lang="en-US" sz="1200" dirty="0"/>
+            <a:endParaRPr lang="en-US" sz="1350" dirty="0"/>
           </a:p>
         </p:txBody>
       </p:sp>
@@ -12037,8 +11842,8 @@
         </p:nvSpPr>
         <p:spPr>
           <a:xfrm>
-            <a:off x="3017520" y="2542032"/>
-            <a:ext cx="5669280" cy="512064"/>
+            <a:off x="3108960" y="2651760"/>
+            <a:ext cx="5577840" cy="512064"/>
           </a:xfrm>
           <a:prstGeom prst="roundRect">
             <a:avLst>
@@ -12048,7 +11853,7 @@
           <a:solidFill>
             <a:srgbClr val="FAF7F0"/>
           </a:solidFill>
-          <a:ln w="9525">
+          <a:ln w="12700">
             <a:solidFill>
               <a:srgbClr val="C9A84C"/>
             </a:solidFill>
@@ -12064,8 +11869,8 @@
         </p:nvSpPr>
         <p:spPr>
           <a:xfrm>
-            <a:off x="3182112" y="2670048"/>
-            <a:ext cx="5394960" cy="274320"/>
+            <a:off x="3291840" y="2770632"/>
+            <a:ext cx="5257800" cy="292608"/>
           </a:xfrm>
           <a:prstGeom prst="rect">
             <a:avLst/>
@@ -12081,7 +11886,7 @@
               <a:buNone/>
             </a:pPr>
             <a:r>
-              <a:rPr lang="en-US" sz="1200" dirty="0">
+              <a:rPr lang="en-US" sz="1350" dirty="0">
                 <a:solidFill>
                   <a:srgbClr val="3D2312"/>
                 </a:solidFill>
@@ -12091,7 +11896,7 @@
               </a:rPr>
               <a:t>Someone writes in your group</a:t>
             </a:r>
-            <a:endParaRPr lang="en-US" sz="1200" dirty="0"/>
+            <a:endParaRPr lang="en-US" sz="1350" dirty="0"/>
           </a:p>
         </p:txBody>
       </p:sp>
@@ -12103,8 +11908,8 @@
         </p:nvSpPr>
         <p:spPr>
           <a:xfrm>
-            <a:off x="3017520" y="3163824"/>
-            <a:ext cx="5669280" cy="512064"/>
+            <a:off x="3108960" y="3291840"/>
+            <a:ext cx="5577840" cy="512064"/>
           </a:xfrm>
           <a:prstGeom prst="roundRect">
             <a:avLst>
@@ -12114,7 +11919,7 @@
           <a:solidFill>
             <a:srgbClr val="FAF7F0"/>
           </a:solidFill>
-          <a:ln w="9525">
+          <a:ln w="12700">
             <a:solidFill>
               <a:srgbClr val="C9A84C"/>
             </a:solidFill>
@@ -12130,8 +11935,8 @@
         </p:nvSpPr>
         <p:spPr>
           <a:xfrm>
-            <a:off x="3182112" y="3291840"/>
-            <a:ext cx="5394960" cy="274320"/>
+            <a:off x="3291840" y="3410712"/>
+            <a:ext cx="5257800" cy="292608"/>
           </a:xfrm>
           <a:prstGeom prst="rect">
             <a:avLst/>
@@ -12147,7 +11952,7 @@
               <a:buNone/>
             </a:pPr>
             <a:r>
-              <a:rPr lang="en-US" sz="1200" dirty="0">
+              <a:rPr lang="en-US" sz="1350" dirty="0">
                 <a:solidFill>
                   <a:srgbClr val="3D2312"/>
                 </a:solidFill>
@@ -12155,9 +11960,9 @@
                 <a:ea typeface="Calibri" pitchFamily="34" charset="-122"/>
                 <a:cs typeface="Calibri" pitchFamily="34" charset="-120"/>
               </a:rPr>
-              <a:t>Your borrowed book is due soon</a:t>
-            </a:r>
-            <a:endParaRPr lang="en-US" sz="1200" dirty="0"/>
+              <a:t>Your book is due back soon</a:t>
+            </a:r>
+            <a:endParaRPr lang="en-US" sz="1350" dirty="0"/>
           </a:p>
         </p:txBody>
       </p:sp>
@@ -12169,8 +11974,8 @@
         </p:nvSpPr>
         <p:spPr>
           <a:xfrm>
-            <a:off x="3017520" y="3785616"/>
-            <a:ext cx="5669280" cy="512064"/>
+            <a:off x="3108960" y="3931920"/>
+            <a:ext cx="5577840" cy="512064"/>
           </a:xfrm>
           <a:prstGeom prst="roundRect">
             <a:avLst>
@@ -12180,7 +11985,7 @@
           <a:solidFill>
             <a:srgbClr val="FAF7F0"/>
           </a:solidFill>
-          <a:ln w="9525">
+          <a:ln w="12700">
             <a:solidFill>
               <a:srgbClr val="C9A84C"/>
             </a:solidFill>
@@ -12196,8 +12001,8 @@
         </p:nvSpPr>
         <p:spPr>
           <a:xfrm>
-            <a:off x="3182112" y="3913632"/>
-            <a:ext cx="5394960" cy="274320"/>
+            <a:off x="3291840" y="4050792"/>
+            <a:ext cx="5257800" cy="292608"/>
           </a:xfrm>
           <a:prstGeom prst="rect">
             <a:avLst/>
@@ -12213,7 +12018,7 @@
               <a:buNone/>
             </a:pPr>
             <a:r>
-              <a:rPr lang="en-US" sz="1200" dirty="0">
+              <a:rPr lang="en-US" sz="1350" dirty="0">
                 <a:solidFill>
                   <a:srgbClr val="3D2312"/>
                 </a:solidFill>
@@ -12221,9 +12026,9 @@
                 <a:ea typeface="Calibri" pitchFamily="34" charset="-122"/>
                 <a:cs typeface="Calibri" pitchFamily="34" charset="-120"/>
               </a:rPr>
-              <a:t>New books arrive in the library</a:t>
-            </a:r>
-            <a:endParaRPr lang="en-US" sz="1200" dirty="0"/>
+              <a:t>New books reach the library</a:t>
+            </a:r>
+            <a:endParaRPr lang="en-US" sz="1350" dirty="0"/>
           </a:p>
         </p:txBody>
       </p:sp>
@@ -12235,8 +12040,8 @@
         </p:nvSpPr>
         <p:spPr>
           <a:xfrm>
-            <a:off x="3017520" y="4498848"/>
-            <a:ext cx="5669280" cy="274320"/>
+            <a:off x="3108960" y="4553712"/>
+            <a:ext cx="5577840" cy="292608"/>
           </a:xfrm>
           <a:prstGeom prst="rect">
             <a:avLst/>
@@ -12252,7 +12057,7 @@
               <a:buNone/>
             </a:pPr>
             <a:r>
-              <a:rPr lang="en-US" sz="1050" i="1" dirty="0">
+              <a:rPr lang="en-US" sz="1300" i="1" dirty="0">
                 <a:solidFill>
                   <a:srgbClr val="7A5535"/>
                 </a:solidFill>
@@ -12260,9 +12065,9 @@
                 <a:ea typeface="Calibri" pitchFamily="34" charset="-122"/>
                 <a:cs typeface="Calibri" pitchFamily="34" charset="-120"/>
               </a:rPr>
-              <a:t>Turn these on in Profile → Notifications  ·  ፕሮፋይል → ማሳወቂያዎች</a:t>
-            </a:r>
-            <a:endParaRPr lang="en-US" sz="1050" dirty="0"/>
+              <a:t>Turn these on in Profile → Notifications</a:t>
+            </a:r>
+            <a:endParaRPr lang="en-US" sz="1300" dirty="0"/>
           </a:p>
         </p:txBody>
       </p:sp>
